--- a/docs/architecture.pptx
+++ b/docs/architecture.pptx
@@ -3120,7 +3120,7 @@
                 <a:ea typeface="Malgun Gothic"/>
                 <a:cs typeface="Malgun Gothic"/>
               </a:rPr>
-              <a:t>MTS 하이브리드 멀티캐스트 — 아키텍처 개요</a:t>
+              <a:t>VPC 내부 — 활성/대기 라우터와 멀티캐스트 복제</a:t>
             </a:r>
           </a:p>
         </p:txBody>
@@ -3133,46 +3133,15 @@
         </p:nvGrpSpPr>
         <p:grpSpPr>
           <a:xfrm>
-            <a:off x="424841" y="1036970"/>
-            <a:ext cx="11231101" cy="5503825"/>
-            <a:chOff x="424841" y="1036970"/>
-            <a:chExt cx="11231101" cy="5503825"/>
+            <a:off x="962887" y="1016151"/>
+            <a:ext cx="10178254" cy="5511499"/>
+            <a:chOff x="962887" y="1016151"/>
+            <a:chExt cx="10178254" cy="5511499"/>
           </a:xfrm>
         </p:grpSpPr>
-        <p:sp>
-          <p:nvSpPr>
-            <p:cNvPr id="4" name="Rectangle 3"/>
-            <p:cNvSpPr/>
-            <p:nvPr/>
-          </p:nvSpPr>
-          <p:spPr>
-            <a:xfrm>
-              <a:off x="565593" y="3424865"/>
-              <a:ext cx="2023140" cy="1166628"/>
-            </a:xfrm>
-            <a:prstGeom prst="rect">
-              <a:avLst/>
-            </a:prstGeom>
-            <a:noFill/>
-            <a:ln w="14767">
-              <a:solidFill>
-                <a:srgbClr val="7D8998"/>
-              </a:solidFill>
-              <a:prstDash val="solid"/>
-              <a:miter lim="800000"/>
-            </a:ln>
-          </p:spPr>
-          <p:txBody>
-            <a:bodyPr rtlCol="0" anchor="ctr"/>
-            <a:lstStyle/>
-            <a:p>
-              <a:pPr algn="ctr"/>
-            </a:p>
-          </p:txBody>
-        </p:sp>
         <p:pic>
           <p:nvPicPr>
-            <p:cNvPr id="5" name="Corporate-data-center_32" descr="Corporate data center_32"/>
+            <p:cNvPr id="4" name="AWS-Direct-Connect" descr="AWS Direct Connect"/>
             <p:cNvPicPr>
               <a:picLocks noChangeAspect="1"/>
             </p:cNvPicPr>
@@ -3192,8 +3161,8 @@
           </p:blipFill>
           <p:spPr>
             <a:xfrm>
-              <a:off x="565593" y="3424865"/>
-              <a:ext cx="177209" cy="177209"/>
+              <a:off x="1390028" y="3593836"/>
+              <a:ext cx="407003" cy="407003"/>
             </a:xfrm>
             <a:prstGeom prst="rect">
               <a:avLst/>
@@ -3202,14 +3171,14 @@
         </p:pic>
         <p:sp>
           <p:nvSpPr>
-            <p:cNvPr id="6" name="TextBox 5"/>
+            <p:cNvPr id="5" name="TextBox 4"/>
             <p:cNvSpPr txBox="1"/>
             <p:nvPr/>
           </p:nvSpPr>
           <p:spPr>
             <a:xfrm>
-              <a:off x="801872" y="3459569"/>
-              <a:ext cx="885124" cy="134384"/>
+              <a:off x="962887" y="4040692"/>
+              <a:ext cx="1261285" cy="154322"/>
             </a:xfrm>
             <a:prstGeom prst="rect">
               <a:avLst/>
@@ -3222,28 +3191,100 @@
             </a:bodyPr>
             <a:lstStyle/>
             <a:p>
-              <a:pPr algn="l">
+              <a:pPr algn="ctr">
                 <a:lnSpc>
                   <a:spcPct val="100000"/>
                 </a:lnSpc>
               </a:pPr>
               <a:r>
-                <a:rPr sz="813" b="1" lang="ko-KR">
+                <a:rPr sz="934" b="0" lang="ko-KR">
                   <a:solidFill>
-                    <a:srgbClr val="7D8998"/>
+                    <a:srgbClr val="232F3E"/>
                   </a:solidFill>
                   <a:latin typeface="Arial"/>
                   <a:ea typeface="Malgun Gothic"/>
                   <a:cs typeface="Malgun Gothic"/>
                 </a:rPr>
-                <a:t>On-premises</a:t>
+                <a:t>Direct Connect</a:t>
               </a:r>
+            </a:p>
+          </p:txBody>
+        </p:sp>
+        <p:sp>
+          <p:nvSpPr>
+            <p:cNvPr id="6" name="TextBox 5"/>
+            <p:cNvSpPr txBox="1"/>
+            <p:nvPr/>
+          </p:nvSpPr>
+          <p:spPr>
+            <a:xfrm>
+              <a:off x="1170628" y="4192470"/>
+              <a:ext cx="845803" cy="132276"/>
+            </a:xfrm>
+            <a:prstGeom prst="rect">
+              <a:avLst/>
+            </a:prstGeom>
+            <a:noFill/>
+          </p:spPr>
+          <p:txBody>
+            <a:bodyPr wrap="none" lIns="0" rIns="0" tIns="0" bIns="0" anchor="t">
+              <a:noAutofit/>
+            </a:bodyPr>
+            <a:lstStyle/>
+            <a:p>
+              <a:pPr algn="ctr">
+                <a:lnSpc>
+                  <a:spcPct val="100000"/>
+                </a:lnSpc>
+              </a:pPr>
+              <a:r>
+                <a:rPr sz="801" b="0" lang="ko-KR">
+                  <a:solidFill>
+                    <a:srgbClr val="545B64"/>
+                  </a:solidFill>
+                  <a:latin typeface="Arial"/>
+                  <a:ea typeface="Malgun Gothic"/>
+                  <a:cs typeface="Malgun Gothic"/>
+                </a:rPr>
+                <a:t>CGW에서 GRE</a:t>
+              </a:r>
+            </a:p>
+          </p:txBody>
+        </p:sp>
+        <p:sp>
+          <p:nvSpPr>
+            <p:cNvPr id="7" name="Rectangle 6"/>
+            <p:cNvSpPr/>
+            <p:nvPr/>
+          </p:nvSpPr>
+          <p:spPr>
+            <a:xfrm>
+              <a:off x="2187076" y="1016151"/>
+              <a:ext cx="8954065" cy="5511499"/>
+            </a:xfrm>
+            <a:prstGeom prst="rect">
+              <a:avLst/>
+            </a:prstGeom>
+            <a:noFill/>
+            <a:ln w="16958">
+              <a:solidFill>
+                <a:srgbClr val="232F3E"/>
+              </a:solidFill>
+              <a:prstDash val="solid"/>
+              <a:miter lim="800000"/>
+            </a:ln>
+          </p:spPr>
+          <p:txBody>
+            <a:bodyPr rtlCol="0" anchor="ctr"/>
+            <a:lstStyle/>
+            <a:p>
+              <a:pPr algn="ctr"/>
             </a:p>
           </p:txBody>
         </p:sp>
         <p:pic>
           <p:nvPicPr>
-            <p:cNvPr id="7" name="Server" descr="Server"/>
+            <p:cNvPr id="8" name="AWS-Cloud-logo_32" descr="AWS Cloud logo_32"/>
             <p:cNvPicPr>
               <a:picLocks noChangeAspect="1"/>
             </p:cNvPicPr>
@@ -3263,8 +3304,8 @@
           </p:blipFill>
           <p:spPr>
             <a:xfrm>
-              <a:off x="787105" y="3720214"/>
-              <a:ext cx="354419" cy="354419"/>
+              <a:off x="2187076" y="1016151"/>
+              <a:ext cx="271335" cy="271335"/>
             </a:xfrm>
             <a:prstGeom prst="rect">
               <a:avLst/>
@@ -3273,14 +3314,14 @@
         </p:pic>
         <p:sp>
           <p:nvSpPr>
-            <p:cNvPr id="8" name="TextBox 7"/>
+            <p:cNvPr id="9" name="TextBox 8"/>
             <p:cNvSpPr txBox="1"/>
             <p:nvPr/>
           </p:nvSpPr>
           <p:spPr>
             <a:xfrm>
-              <a:off x="424841" y="4109336"/>
-              <a:ext cx="1078946" cy="134384"/>
+              <a:off x="2526245" y="1081865"/>
+              <a:ext cx="914167" cy="165345"/>
             </a:xfrm>
             <a:prstGeom prst="rect">
               <a:avLst/>
@@ -3293,13 +3334,13 @@
             </a:bodyPr>
             <a:lstStyle/>
             <a:p>
-              <a:pPr algn="ctr">
+              <a:pPr algn="l">
                 <a:lnSpc>
                   <a:spcPct val="100000"/>
                 </a:lnSpc>
               </a:pPr>
               <a:r>
-                <a:rPr sz="813" b="0" lang="ko-KR">
+                <a:rPr sz="1001" b="1" lang="ko-KR">
                   <a:solidFill>
                     <a:srgbClr val="232F3E"/>
                   </a:solidFill>
@@ -3307,55 +3348,14 @@
                   <a:ea typeface="Malgun Gothic"/>
                   <a:cs typeface="Malgun Gothic"/>
                 </a:rPr>
-                <a:t>멀티캐스트 서버</a:t>
-              </a:r>
-            </a:p>
-          </p:txBody>
-        </p:sp>
-        <p:sp>
-          <p:nvSpPr>
-            <p:cNvPr id="9" name="TextBox 8"/>
-            <p:cNvSpPr txBox="1"/>
-            <p:nvPr/>
-          </p:nvSpPr>
-          <p:spPr>
-            <a:xfrm>
-              <a:off x="554517" y="4241505"/>
-              <a:ext cx="819593" cy="115186"/>
-            </a:xfrm>
-            <a:prstGeom prst="rect">
-              <a:avLst/>
-            </a:prstGeom>
-            <a:noFill/>
-          </p:spPr>
-          <p:txBody>
-            <a:bodyPr wrap="none" lIns="0" rIns="0" tIns="0" bIns="0" anchor="t">
-              <a:noAutofit/>
-            </a:bodyPr>
-            <a:lstStyle/>
-            <a:p>
-              <a:pPr algn="ctr">
-                <a:lnSpc>
-                  <a:spcPct val="100000"/>
-                </a:lnSpc>
-              </a:pPr>
-              <a:r>
-                <a:rPr sz="697" b="0" lang="ko-KR">
-                  <a:solidFill>
-                    <a:srgbClr val="545B64"/>
-                  </a:solidFill>
-                  <a:latin typeface="Arial"/>
-                  <a:ea typeface="Malgun Gothic"/>
-                  <a:cs typeface="Malgun Gothic"/>
-                </a:rPr>
-                <a:t>172.20.51.10</a:t>
+                <a:t>AWS Cloud</a:t>
               </a:r>
             </a:p>
           </p:txBody>
         </p:sp>
         <p:pic>
           <p:nvPicPr>
-            <p:cNvPr id="10" name="Amazon-VPC_Customer-Gateway" descr="Amazon VPC_Customer Gateway"/>
+            <p:cNvPr id="10" name="AWS-Direct-Connect_Gateway" descr="AWS Direct Connect_Gateway"/>
             <p:cNvPicPr>
               <a:picLocks noChangeAspect="1"/>
             </p:cNvPicPr>
@@ -3375,8 +3375,8 @@
           </p:blipFill>
           <p:spPr>
             <a:xfrm>
-              <a:off x="1820826" y="3720214"/>
-              <a:ext cx="354419" cy="354419"/>
+              <a:off x="2543203" y="3593836"/>
+              <a:ext cx="407003" cy="407003"/>
             </a:xfrm>
             <a:prstGeom prst="rect">
               <a:avLst/>
@@ -3391,8 +3391,8 @@
           </p:nvSpPr>
           <p:spPr>
             <a:xfrm>
-              <a:off x="1448871" y="4109336"/>
-              <a:ext cx="1098328" cy="134384"/>
+              <a:off x="2524125" y="4040692"/>
+              <a:ext cx="445159" cy="154322"/>
             </a:xfrm>
             <a:prstGeom prst="rect">
               <a:avLst/>
@@ -3411,7 +3411,7 @@
                 </a:lnSpc>
               </a:pPr>
               <a:r>
-                <a:rPr sz="813" b="0" lang="ko-KR">
+                <a:rPr sz="934" b="0" lang="ko-KR">
                   <a:solidFill>
                     <a:srgbClr val="232F3E"/>
                   </a:solidFill>
@@ -3419,108 +3419,26 @@
                   <a:ea typeface="Malgun Gothic"/>
                   <a:cs typeface="Malgun Gothic"/>
                 </a:rPr>
-                <a:t>CGW · AS 65000</a:t>
-              </a:r>
-            </a:p>
-          </p:txBody>
-        </p:sp>
-        <p:sp>
-          <p:nvSpPr>
-            <p:cNvPr id="12" name="TextBox 11"/>
-            <p:cNvSpPr txBox="1"/>
-            <p:nvPr/>
-          </p:nvSpPr>
-          <p:spPr>
-            <a:xfrm>
-              <a:off x="1466407" y="4241505"/>
-              <a:ext cx="1063256" cy="115186"/>
-            </a:xfrm>
-            <a:prstGeom prst="rect">
-              <a:avLst/>
-            </a:prstGeom>
-            <a:noFill/>
-          </p:spPr>
-          <p:txBody>
-            <a:bodyPr wrap="none" lIns="0" rIns="0" tIns="0" bIns="0" anchor="t">
-              <a:noAutofit/>
-            </a:bodyPr>
-            <a:lstStyle/>
-            <a:p>
-              <a:pPr algn="ctr">
-                <a:lnSpc>
-                  <a:spcPct val="100000"/>
-                </a:lnSpc>
-              </a:pPr>
-              <a:r>
-                <a:rPr sz="697" b="0" lang="ko-KR">
-                  <a:solidFill>
-                    <a:srgbClr val="545B64"/>
-                  </a:solidFill>
-                  <a:latin typeface="Arial"/>
-                  <a:ea typeface="Malgun Gothic"/>
-                  <a:cs typeface="Malgun Gothic"/>
-                </a:rPr>
-                <a:t>Lo0 172.20.255.1</a:t>
-              </a:r>
-            </a:p>
-          </p:txBody>
-        </p:sp>
-        <p:sp>
-          <p:nvSpPr>
-            <p:cNvPr id="13" name="TextBox 12"/>
-            <p:cNvSpPr txBox="1"/>
-            <p:nvPr/>
-          </p:nvSpPr>
-          <p:spPr>
-            <a:xfrm>
-              <a:off x="1770985" y="4359644"/>
-              <a:ext cx="454099" cy="115186"/>
-            </a:xfrm>
-            <a:prstGeom prst="rect">
-              <a:avLst/>
-            </a:prstGeom>
-            <a:noFill/>
-          </p:spPr>
-          <p:txBody>
-            <a:bodyPr wrap="none" lIns="0" rIns="0" tIns="0" bIns="0" anchor="t">
-              <a:noAutofit/>
-            </a:bodyPr>
-            <a:lstStyle/>
-            <a:p>
-              <a:pPr algn="ctr">
-                <a:lnSpc>
-                  <a:spcPct val="100000"/>
-                </a:lnSpc>
-              </a:pPr>
-              <a:r>
-                <a:rPr sz="697" b="0" lang="ko-KR">
-                  <a:solidFill>
-                    <a:srgbClr val="545B64"/>
-                  </a:solidFill>
-                  <a:latin typeface="Arial"/>
-                  <a:ea typeface="Malgun Gothic"/>
-                  <a:cs typeface="Malgun Gothic"/>
-                </a:rPr>
-                <a:t>PIM RP</a:t>
+                <a:t>DXGW</a:t>
               </a:r>
             </a:p>
           </p:txBody>
         </p:sp>
         <p:cxnSp>
           <p:nvCxnSpPr>
-            <p:cNvPr id="14" name="Connector 13"/>
+            <p:cNvPr id="12" name="Connector 11"/>
             <p:cNvCxnSpPr/>
             <p:nvPr/>
           </p:nvCxnSpPr>
           <p:spPr>
             <a:xfrm>
-              <a:off x="1171058" y="3897423"/>
-              <a:ext cx="605465" cy="0"/>
+              <a:off x="1830948" y="3797338"/>
+              <a:ext cx="661380" cy="0"/>
             </a:xfrm>
             <a:prstGeom prst="line">
               <a:avLst/>
             </a:prstGeom>
-            <a:ln w="11076">
+            <a:ln w="12719">
               <a:solidFill>
                 <a:srgbClr val="232F3E"/>
               </a:solidFill>
@@ -3532,48 +3450,40 @@
         </p:cxnSp>
         <p:sp>
           <p:nvSpPr>
-            <p:cNvPr id="15" name="TextBox 14"/>
-            <p:cNvSpPr txBox="1"/>
-            <p:nvPr/>
-          </p:nvSpPr>
-          <p:spPr>
-            <a:xfrm>
-              <a:off x="1040920" y="3754179"/>
-              <a:ext cx="880509" cy="115186"/>
-            </a:xfrm>
-            <a:prstGeom prst="rect">
-              <a:avLst/>
-            </a:prstGeom>
-            <a:noFill/>
-          </p:spPr>
-          <p:txBody>
-            <a:bodyPr wrap="none" lIns="0" rIns="0" tIns="0" bIns="0" anchor="t">
-              <a:noAutofit/>
-            </a:bodyPr>
-            <a:lstStyle/>
-            <a:p>
-              <a:pPr algn="ctr">
-                <a:lnSpc>
-                  <a:spcPct val="100000"/>
-                </a:lnSpc>
-              </a:pPr>
-              <a:r>
-                <a:rPr sz="697" b="0" lang="ko-KR">
-                  <a:solidFill>
-                    <a:srgbClr val="232F3E"/>
-                  </a:solidFill>
-                  <a:latin typeface="Arial"/>
-                  <a:ea typeface="Malgun Gothic"/>
-                  <a:cs typeface="Malgun Gothic"/>
-                </a:rPr>
-                <a:t>UDP 239.1.1.1</a:t>
-              </a:r>
+            <p:cNvPr id="13" name="Rectangle 12"/>
+            <p:cNvSpPr/>
+            <p:nvPr/>
+          </p:nvSpPr>
+          <p:spPr>
+            <a:xfrm>
+              <a:off x="3085874" y="1338361"/>
+              <a:ext cx="7936558" cy="5087537"/>
+            </a:xfrm>
+            <a:prstGeom prst="rect">
+              <a:avLst/>
+            </a:prstGeom>
+            <a:noFill/>
+            <a:ln w="16958">
+              <a:solidFill>
+                <a:srgbClr val="00A4A6"/>
+              </a:solidFill>
+              <a:custDash>
+                <a:ds d="150000" sp="150000"/>
+              </a:custDash>
+              <a:miter lim="800000"/>
+            </a:ln>
+          </p:spPr>
+          <p:txBody>
+            <a:bodyPr rtlCol="0" anchor="ctr"/>
+            <a:lstStyle/>
+            <a:p>
+              <a:pPr algn="ctr"/>
             </a:p>
           </p:txBody>
         </p:sp>
         <p:pic>
           <p:nvPicPr>
-            <p:cNvPr id="16" name="AWS-Direct-Connect" descr="AWS Direct Connect"/>
+            <p:cNvPr id="14" name="Region_32" descr="Region_32"/>
             <p:cNvPicPr>
               <a:picLocks noChangeAspect="1"/>
             </p:cNvPicPr>
@@ -3593,8 +3503,8 @@
           </p:blipFill>
           <p:spPr>
             <a:xfrm>
-              <a:off x="3016988" y="3720214"/>
-              <a:ext cx="354419" cy="354419"/>
+              <a:off x="3085874" y="1338361"/>
+              <a:ext cx="203501" cy="203501"/>
             </a:xfrm>
             <a:prstGeom prst="rect">
               <a:avLst/>
@@ -3603,14 +3513,14 @@
         </p:pic>
         <p:sp>
           <p:nvSpPr>
-            <p:cNvPr id="17" name="TextBox 16"/>
+            <p:cNvPr id="15" name="TextBox 14"/>
             <p:cNvSpPr txBox="1"/>
             <p:nvPr/>
           </p:nvSpPr>
           <p:spPr>
             <a:xfrm>
-              <a:off x="2645033" y="4109336"/>
-              <a:ext cx="1098328" cy="134384"/>
+              <a:off x="3357209" y="1378214"/>
+              <a:ext cx="1832573" cy="154322"/>
             </a:xfrm>
             <a:prstGeom prst="rect">
               <a:avLst/>
@@ -3623,165 +3533,28 @@
             </a:bodyPr>
             <a:lstStyle/>
             <a:p>
-              <a:pPr algn="ctr">
+              <a:pPr algn="l">
                 <a:lnSpc>
                   <a:spcPct val="100000"/>
                 </a:lnSpc>
               </a:pPr>
               <a:r>
-                <a:rPr sz="813" b="0" lang="ko-KR">
+                <a:rPr sz="934" b="1" lang="ko-KR">
                   <a:solidFill>
-                    <a:srgbClr val="232F3E"/>
+                    <a:srgbClr val="00A4A6"/>
                   </a:solidFill>
                   <a:latin typeface="Arial"/>
                   <a:ea typeface="Malgun Gothic"/>
                   <a:cs typeface="Malgun Gothic"/>
                 </a:rPr>
-                <a:t>Direct Connect</a:t>
+                <a:t>Region ap-northeast-2</a:t>
               </a:r>
-            </a:p>
-          </p:txBody>
-        </p:sp>
-        <p:sp>
-          <p:nvSpPr>
-            <p:cNvPr id="18" name="TextBox 17"/>
-            <p:cNvSpPr txBox="1"/>
-            <p:nvPr/>
-          </p:nvSpPr>
-          <p:spPr>
-            <a:xfrm>
-              <a:off x="2723485" y="4241505"/>
-              <a:ext cx="941424" cy="115186"/>
-            </a:xfrm>
-            <a:prstGeom prst="rect">
-              <a:avLst/>
-            </a:prstGeom>
-            <a:noFill/>
-          </p:spPr>
-          <p:txBody>
-            <a:bodyPr wrap="none" lIns="0" rIns="0" tIns="0" bIns="0" anchor="t">
-              <a:noAutofit/>
-            </a:bodyPr>
-            <a:lstStyle/>
-            <a:p>
-              <a:pPr algn="ctr">
-                <a:lnSpc>
-                  <a:spcPct val="100000"/>
-                </a:lnSpc>
-              </a:pPr>
-              <a:r>
-                <a:rPr sz="697" b="0" lang="ko-KR">
-                  <a:solidFill>
-                    <a:srgbClr val="545B64"/>
-                  </a:solidFill>
-                  <a:latin typeface="Arial"/>
-                  <a:ea typeface="Malgun Gothic"/>
-                  <a:cs typeface="Malgun Gothic"/>
-                </a:rPr>
-                <a:t>Transit VIF ×2</a:t>
-              </a:r>
-            </a:p>
-          </p:txBody>
-        </p:sp>
-        <p:cxnSp>
-          <p:nvCxnSpPr>
-            <p:cNvPr id="19" name="Connector 18"/>
-            <p:cNvCxnSpPr/>
-            <p:nvPr/>
-          </p:nvCxnSpPr>
-          <p:spPr>
-            <a:xfrm>
-              <a:off x="2204779" y="3897423"/>
-              <a:ext cx="767907" cy="0"/>
-            </a:xfrm>
-            <a:prstGeom prst="line">
-              <a:avLst/>
-            </a:prstGeom>
-            <a:ln w="11076">
-              <a:solidFill>
-                <a:srgbClr val="232F3E"/>
-              </a:solidFill>
-              <a:prstDash val="solid"/>
-              <a:miter lim="800000"/>
-              <a:tailEnd type="triangle" w="med" len="med"/>
-            </a:ln>
-          </p:spPr>
-        </p:cxnSp>
-        <p:sp>
-          <p:nvSpPr>
-            <p:cNvPr id="20" name="TextBox 19"/>
-            <p:cNvSpPr txBox="1"/>
-            <p:nvPr/>
-          </p:nvSpPr>
-          <p:spPr>
-            <a:xfrm>
-              <a:off x="2645033" y="3754179"/>
-              <a:ext cx="271352" cy="115186"/>
-            </a:xfrm>
-            <a:prstGeom prst="rect">
-              <a:avLst/>
-            </a:prstGeom>
-            <a:noFill/>
-          </p:spPr>
-          <p:txBody>
-            <a:bodyPr wrap="none" lIns="0" rIns="0" tIns="0" bIns="0" anchor="t">
-              <a:noAutofit/>
-            </a:bodyPr>
-            <a:lstStyle/>
-            <a:p>
-              <a:pPr algn="ctr">
-                <a:lnSpc>
-                  <a:spcPct val="100000"/>
-                </a:lnSpc>
-              </a:pPr>
-              <a:r>
-                <a:rPr sz="697" b="0" lang="ko-KR">
-                  <a:solidFill>
-                    <a:srgbClr val="232F3E"/>
-                  </a:solidFill>
-                  <a:latin typeface="Arial"/>
-                  <a:ea typeface="Malgun Gothic"/>
-                  <a:cs typeface="Malgun Gothic"/>
-                </a:rPr>
-                <a:t>GRE</a:t>
-              </a:r>
-            </a:p>
-          </p:txBody>
-        </p:sp>
-        <p:sp>
-          <p:nvSpPr>
-            <p:cNvPr id="21" name="Rectangle 20"/>
-            <p:cNvSpPr/>
-            <p:nvPr/>
-          </p:nvSpPr>
-          <p:spPr>
-            <a:xfrm>
-              <a:off x="3696291" y="1313121"/>
-              <a:ext cx="7959651" cy="5227674"/>
-            </a:xfrm>
-            <a:prstGeom prst="rect">
-              <a:avLst/>
-            </a:prstGeom>
-            <a:noFill/>
-            <a:ln w="14767">
-              <a:solidFill>
-                <a:srgbClr val="232F3E"/>
-              </a:solidFill>
-              <a:prstDash val="solid"/>
-              <a:miter lim="800000"/>
-            </a:ln>
-          </p:spPr>
-          <p:txBody>
-            <a:bodyPr rtlCol="0" anchor="ctr"/>
-            <a:lstStyle/>
-            <a:p>
-              <a:pPr algn="ctr"/>
             </a:p>
           </p:txBody>
         </p:sp>
         <p:pic>
           <p:nvPicPr>
-            <p:cNvPr id="22" name="AWS-Cloud-logo_32" descr="AWS Cloud logo_32"/>
+            <p:cNvPr id="16" name="AWS-Transit-Gateway" descr="AWS Transit Gateway"/>
             <p:cNvPicPr>
               <a:picLocks noChangeAspect="1"/>
             </p:cNvPicPr>
@@ -3801,8 +3574,8 @@
           </p:blipFill>
           <p:spPr>
             <a:xfrm>
-              <a:off x="3696291" y="1313121"/>
-              <a:ext cx="236279" cy="236279"/>
+              <a:off x="3543752" y="3593836"/>
+              <a:ext cx="407003" cy="407003"/>
             </a:xfrm>
             <a:prstGeom prst="rect">
               <a:avLst/>
@@ -3811,14 +3584,14 @@
         </p:pic>
         <p:sp>
           <p:nvSpPr>
-            <p:cNvPr id="23" name="TextBox 22"/>
+            <p:cNvPr id="17" name="TextBox 16"/>
             <p:cNvSpPr txBox="1"/>
             <p:nvPr/>
           </p:nvSpPr>
           <p:spPr>
             <a:xfrm>
-              <a:off x="3991640" y="1370345"/>
-              <a:ext cx="796057" cy="143983"/>
+              <a:off x="3075805" y="4040692"/>
+              <a:ext cx="1342898" cy="154322"/>
             </a:xfrm>
             <a:prstGeom prst="rect">
               <a:avLst/>
@@ -3831,13 +3604,13 @@
             </a:bodyPr>
             <a:lstStyle/>
             <a:p>
-              <a:pPr algn="l">
+              <a:pPr algn="ctr">
                 <a:lnSpc>
                   <a:spcPct val="100000"/>
                 </a:lnSpc>
               </a:pPr>
               <a:r>
-                <a:rPr sz="872" b="1" lang="ko-KR">
+                <a:rPr sz="934" b="0" lang="ko-KR">
                   <a:solidFill>
                     <a:srgbClr val="232F3E"/>
                   </a:solidFill>
@@ -3845,14 +3618,110 @@
                   <a:ea typeface="Malgun Gothic"/>
                   <a:cs typeface="Malgun Gothic"/>
                 </a:rPr>
-                <a:t>AWS Cloud</a:t>
+                <a:t>Transit Gateway</a:t>
               </a:r>
+            </a:p>
+          </p:txBody>
+        </p:sp>
+        <p:sp>
+          <p:nvSpPr>
+            <p:cNvPr id="18" name="TextBox 17"/>
+            <p:cNvSpPr txBox="1"/>
+            <p:nvPr/>
+          </p:nvSpPr>
+          <p:spPr>
+            <a:xfrm>
+              <a:off x="3416564" y="4192470"/>
+              <a:ext cx="661380" cy="132276"/>
+            </a:xfrm>
+            <a:prstGeom prst="rect">
+              <a:avLst/>
+            </a:prstGeom>
+            <a:noFill/>
+          </p:spPr>
+          <p:txBody>
+            <a:bodyPr wrap="none" lIns="0" rIns="0" tIns="0" bIns="0" anchor="t">
+              <a:noAutofit/>
+            </a:bodyPr>
+            <a:lstStyle/>
+            <a:p>
+              <a:pPr algn="ctr">
+                <a:lnSpc>
+                  <a:spcPct val="100000"/>
+                </a:lnSpc>
+              </a:pPr>
+              <a:r>
+                <a:rPr sz="801" b="0" lang="ko-KR">
+                  <a:solidFill>
+                    <a:srgbClr val="545B64"/>
+                  </a:solidFill>
+                  <a:latin typeface="Arial"/>
+                  <a:ea typeface="Malgun Gothic"/>
+                  <a:cs typeface="Malgun Gothic"/>
+                </a:rPr>
+                <a:t>AS 65400</a:t>
+              </a:r>
+            </a:p>
+          </p:txBody>
+        </p:sp>
+        <p:cxnSp>
+          <p:nvCxnSpPr>
+            <p:cNvPr id="19" name="Connector 18"/>
+            <p:cNvCxnSpPr/>
+            <p:nvPr/>
+          </p:nvCxnSpPr>
+          <p:spPr>
+            <a:xfrm>
+              <a:off x="2984123" y="3797338"/>
+              <a:ext cx="508754" cy="0"/>
+            </a:xfrm>
+            <a:prstGeom prst="line">
+              <a:avLst/>
+            </a:prstGeom>
+            <a:ln w="12719">
+              <a:solidFill>
+                <a:srgbClr val="232F3E"/>
+              </a:solidFill>
+              <a:prstDash val="solid"/>
+              <a:miter lim="800000"/>
+              <a:tailEnd type="triangle" w="med" len="med"/>
+            </a:ln>
+          </p:spPr>
+        </p:cxnSp>
+        <p:sp>
+          <p:nvSpPr>
+            <p:cNvPr id="20" name="Rectangle 19"/>
+            <p:cNvSpPr/>
+            <p:nvPr/>
+          </p:nvSpPr>
+          <p:spPr>
+            <a:xfrm>
+              <a:off x="4510384" y="1643614"/>
+              <a:ext cx="6393338" cy="4493991"/>
+            </a:xfrm>
+            <a:prstGeom prst="rect">
+              <a:avLst/>
+            </a:prstGeom>
+            <a:noFill/>
+            <a:ln w="16958">
+              <a:solidFill>
+                <a:srgbClr val="8C4FFF"/>
+              </a:solidFill>
+              <a:prstDash val="solid"/>
+              <a:miter lim="800000"/>
+            </a:ln>
+          </p:spPr>
+          <p:txBody>
+            <a:bodyPr rtlCol="0" anchor="ctr"/>
+            <a:lstStyle/>
+            <a:p>
+              <a:pPr algn="ctr"/>
             </a:p>
           </p:txBody>
         </p:sp>
         <p:pic>
           <p:nvPicPr>
-            <p:cNvPr id="24" name="AWS-Direct-Connect_Gateway" descr="AWS Direct Connect_Gateway"/>
+            <p:cNvPr id="21" name="Virtual-private-cloud-VPC_32" descr="Virtual private cloud VPC_32"/>
             <p:cNvPicPr>
               <a:picLocks noChangeAspect="1"/>
             </p:cNvPicPr>
@@ -3872,8 +3741,8 @@
           </p:blipFill>
           <p:spPr>
             <a:xfrm>
-              <a:off x="4006407" y="3720214"/>
-              <a:ext cx="354419" cy="354419"/>
+              <a:off x="4510384" y="1643614"/>
+              <a:ext cx="203501" cy="203501"/>
             </a:xfrm>
             <a:prstGeom prst="rect">
               <a:avLst/>
@@ -3882,14 +3751,14 @@
         </p:pic>
         <p:sp>
           <p:nvSpPr>
-            <p:cNvPr id="25" name="TextBox 24"/>
+            <p:cNvPr id="22" name="TextBox 21"/>
             <p:cNvSpPr txBox="1"/>
             <p:nvPr/>
           </p:nvSpPr>
           <p:spPr>
             <a:xfrm>
-              <a:off x="3989794" y="4109336"/>
-              <a:ext cx="387645" cy="134384"/>
+              <a:off x="4781720" y="1683466"/>
+              <a:ext cx="1342898" cy="154322"/>
             </a:xfrm>
             <a:prstGeom prst="rect">
               <a:avLst/>
@@ -3902,35 +3771,68 @@
             </a:bodyPr>
             <a:lstStyle/>
             <a:p>
-              <a:pPr algn="ctr">
+              <a:pPr algn="l">
                 <a:lnSpc>
                   <a:spcPct val="100000"/>
                 </a:lnSpc>
               </a:pPr>
               <a:r>
-                <a:rPr sz="813" b="0" lang="ko-KR">
+                <a:rPr sz="934" b="1" lang="ko-KR">
                   <a:solidFill>
-                    <a:srgbClr val="232F3E"/>
+                    <a:srgbClr val="8C4FFF"/>
                   </a:solidFill>
                   <a:latin typeface="Arial"/>
                   <a:ea typeface="Malgun Gothic"/>
                   <a:cs typeface="Malgun Gothic"/>
                 </a:rPr>
-                <a:t>DXGW</a:t>
+                <a:t>VPC 10.1.1.0/24</a:t>
               </a:r>
             </a:p>
           </p:txBody>
         </p:sp>
         <p:sp>
           <p:nvSpPr>
-            <p:cNvPr id="26" name="TextBox 25"/>
+            <p:cNvPr id="23" name="Rectangle 22"/>
+            <p:cNvSpPr/>
+            <p:nvPr/>
+          </p:nvSpPr>
+          <p:spPr>
+            <a:xfrm>
+              <a:off x="4629093" y="1931907"/>
+              <a:ext cx="6155920" cy="1475386"/>
+            </a:xfrm>
+            <a:prstGeom prst="rect">
+              <a:avLst/>
+            </a:prstGeom>
+            <a:noFill/>
+            <a:ln w="12719">
+              <a:solidFill>
+                <a:srgbClr val="00A4A6"/>
+              </a:solidFill>
+              <a:custDash>
+                <a:ds d="533333" sp="266667"/>
+              </a:custDash>
+              <a:miter lim="800000"/>
+            </a:ln>
+          </p:spPr>
+          <p:txBody>
+            <a:bodyPr rtlCol="0" anchor="ctr"/>
+            <a:lstStyle/>
+            <a:p>
+              <a:pPr algn="ctr"/>
+            </a:p>
+          </p:txBody>
+        </p:sp>
+        <p:sp>
+          <p:nvSpPr>
+            <p:cNvPr id="24" name="TextBox 23"/>
             <p:cNvSpPr txBox="1"/>
             <p:nvPr/>
           </p:nvSpPr>
           <p:spPr>
             <a:xfrm>
-              <a:off x="3895651" y="4241505"/>
-              <a:ext cx="575930" cy="115186"/>
+              <a:off x="4696927" y="1971760"/>
+              <a:ext cx="1832573" cy="154322"/>
             </a:xfrm>
             <a:prstGeom prst="rect">
               <a:avLst/>
@@ -3943,72 +3845,46 @@
             </a:bodyPr>
             <a:lstStyle/>
             <a:p>
-              <a:pPr algn="ctr">
+              <a:pPr algn="l">
                 <a:lnSpc>
                   <a:spcPct val="100000"/>
                 </a:lnSpc>
               </a:pPr>
               <a:r>
-                <a:rPr sz="697" b="0" lang="ko-KR">
+                <a:rPr sz="934" b="1" lang="ko-KR">
                   <a:solidFill>
-                    <a:srgbClr val="545B64"/>
+                    <a:srgbClr val="00A4A6"/>
                   </a:solidFill>
                   <a:latin typeface="Arial"/>
                   <a:ea typeface="Malgun Gothic"/>
                   <a:cs typeface="Malgun Gothic"/>
                 </a:rPr>
-                <a:t>AS 65300</a:t>
+                <a:t>AZ1 · ap-northeast-2a</a:t>
               </a:r>
             </a:p>
           </p:txBody>
         </p:sp>
-        <p:cxnSp>
-          <p:nvCxnSpPr>
-            <p:cNvPr id="27" name="Connector 26"/>
-            <p:cNvCxnSpPr/>
-            <p:nvPr/>
-          </p:nvCxnSpPr>
-          <p:spPr>
-            <a:xfrm>
-              <a:off x="3400942" y="3897423"/>
-              <a:ext cx="561163" cy="0"/>
-            </a:xfrm>
-            <a:prstGeom prst="line">
-              <a:avLst/>
-            </a:prstGeom>
-            <a:ln w="11076">
+        <p:sp>
+          <p:nvSpPr>
+            <p:cNvPr id="25" name="Rectangle 24"/>
+            <p:cNvSpPr/>
+            <p:nvPr/>
+          </p:nvSpPr>
+          <p:spPr>
+            <a:xfrm>
+              <a:off x="4730844" y="2186284"/>
+              <a:ext cx="1356677" cy="1119258"/>
+            </a:xfrm>
+            <a:prstGeom prst="rect">
+              <a:avLst/>
+            </a:prstGeom>
+            <a:noFill/>
+            <a:ln w="12719">
               <a:solidFill>
-                <a:srgbClr val="232F3E"/>
+                <a:srgbClr val="00A4A6"/>
               </a:solidFill>
               <a:prstDash val="solid"/>
               <a:miter lim="800000"/>
-              <a:tailEnd type="triangle" w="med" len="med"/>
-            </a:ln>
-          </p:spPr>
-        </p:cxnSp>
-        <p:sp>
-          <p:nvSpPr>
-            <p:cNvPr id="28" name="Rectangle 27"/>
-            <p:cNvSpPr/>
-            <p:nvPr/>
-          </p:nvSpPr>
-          <p:spPr>
-            <a:xfrm>
-              <a:off x="4626640" y="1593702"/>
-              <a:ext cx="6911163" cy="4828953"/>
-            </a:xfrm>
-            <a:prstGeom prst="rect">
-              <a:avLst/>
-            </a:prstGeom>
-            <a:noFill/>
-            <a:ln w="14767">
-              <a:solidFill>
-                <a:srgbClr val="00A4A6"/>
-              </a:solidFill>
-              <a:custDash>
-                <a:ds d="150000" sp="150000"/>
-              </a:custDash>
-              <a:miter lim="800000"/>
             </a:ln>
           </p:spPr>
           <p:txBody>
@@ -4021,7 +3897,7 @@
         </p:sp>
         <p:pic>
           <p:nvPicPr>
-            <p:cNvPr id="29" name="Region_32" descr="Region_32"/>
+            <p:cNvPr id="26" name="Private-subnet_32" descr="Private subnet_32"/>
             <p:cNvPicPr>
               <a:picLocks noChangeAspect="1"/>
             </p:cNvPicPr>
@@ -4041,8 +3917,8 @@
           </p:blipFill>
           <p:spPr>
             <a:xfrm>
-              <a:off x="4626640" y="1593702"/>
-              <a:ext cx="177209" cy="177209"/>
+              <a:off x="4730844" y="2186284"/>
+              <a:ext cx="203501" cy="203501"/>
             </a:xfrm>
             <a:prstGeom prst="rect">
               <a:avLst/>
@@ -4051,14 +3927,14 @@
         </p:pic>
         <p:sp>
           <p:nvSpPr>
-            <p:cNvPr id="30" name="TextBox 29"/>
+            <p:cNvPr id="27" name="TextBox 26"/>
             <p:cNvSpPr txBox="1"/>
             <p:nvPr/>
           </p:nvSpPr>
           <p:spPr>
             <a:xfrm>
-              <a:off x="4862919" y="1628406"/>
-              <a:ext cx="1595807" cy="134384"/>
+              <a:off x="5002180" y="2226137"/>
+              <a:ext cx="934835" cy="154322"/>
             </a:xfrm>
             <a:prstGeom prst="rect">
               <a:avLst/>
@@ -4077,7 +3953,7 @@
                 </a:lnSpc>
               </a:pPr>
               <a:r>
-                <a:rPr sz="813" b="1" lang="ko-KR">
+                <a:rPr sz="934" b="1" lang="ko-KR">
                   <a:solidFill>
                     <a:srgbClr val="00A4A6"/>
                   </a:solidFill>
@@ -4085,14 +3961,702 @@
                   <a:ea typeface="Malgun Gothic"/>
                   <a:cs typeface="Malgun Gothic"/>
                 </a:rPr>
-                <a:t>Region ap-northeast-2</a:t>
+                <a:t>TGW subnet</a:t>
               </a:r>
+            </a:p>
+          </p:txBody>
+        </p:sp>
+        <p:sp>
+          <p:nvSpPr>
+            <p:cNvPr id="28" name="Rectangle 27"/>
+            <p:cNvSpPr/>
+            <p:nvPr/>
+          </p:nvSpPr>
+          <p:spPr>
+            <a:xfrm>
+              <a:off x="6206230" y="2186284"/>
+              <a:ext cx="1916306" cy="1119258"/>
+            </a:xfrm>
+            <a:prstGeom prst="rect">
+              <a:avLst/>
+            </a:prstGeom>
+            <a:noFill/>
+            <a:ln w="12719">
+              <a:solidFill>
+                <a:srgbClr val="00A4A6"/>
+              </a:solidFill>
+              <a:prstDash val="solid"/>
+              <a:miter lim="800000"/>
+            </a:ln>
+          </p:spPr>
+          <p:txBody>
+            <a:bodyPr rtlCol="0" anchor="ctr"/>
+            <a:lstStyle/>
+            <a:p>
+              <a:pPr algn="ctr"/>
             </a:p>
           </p:txBody>
         </p:sp>
         <p:pic>
           <p:nvPicPr>
-            <p:cNvPr id="31" name="AWS-Transit-Gateway" descr="AWS Transit Gateway"/>
+            <p:cNvPr id="29" name="Private-subnet_32" descr="Private subnet_32"/>
+            <p:cNvPicPr>
+              <a:picLocks noChangeAspect="1"/>
+            </p:cNvPicPr>
+            <p:nvPr/>
+          </p:nvPicPr>
+          <p:blipFill>
+            <a:blip r:embed="rId14">
+              <a:extLst>
+                <a:ext uri="{96DAC541-7B7A-43D3-8B79-37D633B846F1}">
+                  <asvg:svgBlip xmlns:asvg="http://schemas.microsoft.com/office/drawing/2016/SVG/main" r:embed="rId15"/>
+                </a:ext>
+              </a:extLst>
+            </a:blip>
+            <a:stretch>
+              <a:fillRect/>
+            </a:stretch>
+          </p:blipFill>
+          <p:spPr>
+            <a:xfrm>
+              <a:off x="6206230" y="2186284"/>
+              <a:ext cx="203501" cy="203501"/>
+            </a:xfrm>
+            <a:prstGeom prst="rect">
+              <a:avLst/>
+            </a:prstGeom>
+          </p:spPr>
+        </p:pic>
+        <p:sp>
+          <p:nvSpPr>
+            <p:cNvPr id="30" name="TextBox 29"/>
+            <p:cNvSpPr txBox="1"/>
+            <p:nvPr/>
+          </p:nvSpPr>
+          <p:spPr>
+            <a:xfrm>
+              <a:off x="6477565" y="2226137"/>
+              <a:ext cx="1179673" cy="154322"/>
+            </a:xfrm>
+            <a:prstGeom prst="rect">
+              <a:avLst/>
+            </a:prstGeom>
+            <a:noFill/>
+          </p:spPr>
+          <p:txBody>
+            <a:bodyPr wrap="none" lIns="0" rIns="0" tIns="0" bIns="0" anchor="t">
+              <a:noAutofit/>
+            </a:bodyPr>
+            <a:lstStyle/>
+            <a:p>
+              <a:pPr algn="l">
+                <a:lnSpc>
+                  <a:spcPct val="100000"/>
+                </a:lnSpc>
+              </a:pPr>
+              <a:r>
+                <a:rPr sz="934" b="1" lang="ko-KR">
+                  <a:solidFill>
+                    <a:srgbClr val="00A4A6"/>
+                  </a:solidFill>
+                  <a:latin typeface="Arial"/>
+                  <a:ea typeface="Malgun Gothic"/>
+                  <a:cs typeface="Malgun Gothic"/>
+                </a:rPr>
+                <a:t>Router subnet</a:t>
+              </a:r>
+            </a:p>
+          </p:txBody>
+        </p:sp>
+        <p:sp>
+          <p:nvSpPr>
+            <p:cNvPr id="31" name="Rectangle 30"/>
+            <p:cNvSpPr/>
+            <p:nvPr/>
+          </p:nvSpPr>
+          <p:spPr>
+            <a:xfrm>
+              <a:off x="8309079" y="2186284"/>
+              <a:ext cx="2306350" cy="1119258"/>
+            </a:xfrm>
+            <a:prstGeom prst="rect">
+              <a:avLst/>
+            </a:prstGeom>
+            <a:noFill/>
+            <a:ln w="12719">
+              <a:solidFill>
+                <a:srgbClr val="00A4A6"/>
+              </a:solidFill>
+              <a:prstDash val="solid"/>
+              <a:miter lim="800000"/>
+            </a:ln>
+          </p:spPr>
+          <p:txBody>
+            <a:bodyPr rtlCol="0" anchor="ctr"/>
+            <a:lstStyle/>
+            <a:p>
+              <a:pPr algn="ctr"/>
+            </a:p>
+          </p:txBody>
+        </p:sp>
+        <p:pic>
+          <p:nvPicPr>
+            <p:cNvPr id="32" name="Private-subnet_32" descr="Private subnet_32"/>
+            <p:cNvPicPr>
+              <a:picLocks noChangeAspect="1"/>
+            </p:cNvPicPr>
+            <p:nvPr/>
+          </p:nvPicPr>
+          <p:blipFill>
+            <a:blip r:embed="rId14">
+              <a:extLst>
+                <a:ext uri="{96DAC541-7B7A-43D3-8B79-37D633B846F1}">
+                  <asvg:svgBlip xmlns:asvg="http://schemas.microsoft.com/office/drawing/2016/SVG/main" r:embed="rId15"/>
+                </a:ext>
+              </a:extLst>
+            </a:blip>
+            <a:stretch>
+              <a:fillRect/>
+            </a:stretch>
+          </p:blipFill>
+          <p:spPr>
+            <a:xfrm>
+              <a:off x="8309079" y="2186284"/>
+              <a:ext cx="203501" cy="203501"/>
+            </a:xfrm>
+            <a:prstGeom prst="rect">
+              <a:avLst/>
+            </a:prstGeom>
+          </p:spPr>
+        </p:pic>
+        <p:sp>
+          <p:nvSpPr>
+            <p:cNvPr id="33" name="TextBox 32"/>
+            <p:cNvSpPr txBox="1"/>
+            <p:nvPr/>
+          </p:nvSpPr>
+          <p:spPr>
+            <a:xfrm>
+              <a:off x="8580414" y="2226137"/>
+              <a:ext cx="1342898" cy="154322"/>
+            </a:xfrm>
+            <a:prstGeom prst="rect">
+              <a:avLst/>
+            </a:prstGeom>
+            <a:noFill/>
+          </p:spPr>
+          <p:txBody>
+            <a:bodyPr wrap="none" lIns="0" rIns="0" tIns="0" bIns="0" anchor="t">
+              <a:noAutofit/>
+            </a:bodyPr>
+            <a:lstStyle/>
+            <a:p>
+              <a:pPr algn="l">
+                <a:lnSpc>
+                  <a:spcPct val="100000"/>
+                </a:lnSpc>
+              </a:pPr>
+              <a:r>
+                <a:rPr sz="934" b="1" lang="ko-KR">
+                  <a:solidFill>
+                    <a:srgbClr val="00A4A6"/>
+                  </a:solidFill>
+                  <a:latin typeface="Arial"/>
+                  <a:ea typeface="Malgun Gothic"/>
+                  <a:cs typeface="Malgun Gothic"/>
+                </a:rPr>
+                <a:t>Receiver subnet</a:t>
+              </a:r>
+            </a:p>
+          </p:txBody>
+        </p:sp>
+        <p:sp>
+          <p:nvSpPr>
+            <p:cNvPr id="34" name="Rectangle 33"/>
+            <p:cNvSpPr/>
+            <p:nvPr/>
+          </p:nvSpPr>
+          <p:spPr>
+            <a:xfrm>
+              <a:off x="4629093" y="4560468"/>
+              <a:ext cx="6155920" cy="1475386"/>
+            </a:xfrm>
+            <a:prstGeom prst="rect">
+              <a:avLst/>
+            </a:prstGeom>
+            <a:noFill/>
+            <a:ln w="12719">
+              <a:solidFill>
+                <a:srgbClr val="00A4A6"/>
+              </a:solidFill>
+              <a:custDash>
+                <a:ds d="533333" sp="266667"/>
+              </a:custDash>
+              <a:miter lim="800000"/>
+            </a:ln>
+          </p:spPr>
+          <p:txBody>
+            <a:bodyPr rtlCol="0" anchor="ctr"/>
+            <a:lstStyle/>
+            <a:p>
+              <a:pPr algn="ctr"/>
+            </a:p>
+          </p:txBody>
+        </p:sp>
+        <p:sp>
+          <p:nvSpPr>
+            <p:cNvPr id="35" name="TextBox 34"/>
+            <p:cNvSpPr txBox="1"/>
+            <p:nvPr/>
+          </p:nvSpPr>
+          <p:spPr>
+            <a:xfrm>
+              <a:off x="4696927" y="4600321"/>
+              <a:ext cx="1832573" cy="154322"/>
+            </a:xfrm>
+            <a:prstGeom prst="rect">
+              <a:avLst/>
+            </a:prstGeom>
+            <a:noFill/>
+          </p:spPr>
+          <p:txBody>
+            <a:bodyPr wrap="none" lIns="0" rIns="0" tIns="0" bIns="0" anchor="t">
+              <a:noAutofit/>
+            </a:bodyPr>
+            <a:lstStyle/>
+            <a:p>
+              <a:pPr algn="l">
+                <a:lnSpc>
+                  <a:spcPct val="100000"/>
+                </a:lnSpc>
+              </a:pPr>
+              <a:r>
+                <a:rPr sz="934" b="1" lang="ko-KR">
+                  <a:solidFill>
+                    <a:srgbClr val="00A4A6"/>
+                  </a:solidFill>
+                  <a:latin typeface="Arial"/>
+                  <a:ea typeface="Malgun Gothic"/>
+                  <a:cs typeface="Malgun Gothic"/>
+                </a:rPr>
+                <a:t>AZ2 · ap-northeast-2c</a:t>
+              </a:r>
+            </a:p>
+          </p:txBody>
+        </p:sp>
+        <p:sp>
+          <p:nvSpPr>
+            <p:cNvPr id="36" name="Rectangle 35"/>
+            <p:cNvSpPr/>
+            <p:nvPr/>
+          </p:nvSpPr>
+          <p:spPr>
+            <a:xfrm>
+              <a:off x="4730844" y="4814845"/>
+              <a:ext cx="1356677" cy="1119258"/>
+            </a:xfrm>
+            <a:prstGeom prst="rect">
+              <a:avLst/>
+            </a:prstGeom>
+            <a:noFill/>
+            <a:ln w="12719">
+              <a:solidFill>
+                <a:srgbClr val="00A4A6"/>
+              </a:solidFill>
+              <a:prstDash val="solid"/>
+              <a:miter lim="800000"/>
+            </a:ln>
+          </p:spPr>
+          <p:txBody>
+            <a:bodyPr rtlCol="0" anchor="ctr"/>
+            <a:lstStyle/>
+            <a:p>
+              <a:pPr algn="ctr"/>
+            </a:p>
+          </p:txBody>
+        </p:sp>
+        <p:pic>
+          <p:nvPicPr>
+            <p:cNvPr id="37" name="Private-subnet_32" descr="Private subnet_32"/>
+            <p:cNvPicPr>
+              <a:picLocks noChangeAspect="1"/>
+            </p:cNvPicPr>
+            <p:nvPr/>
+          </p:nvPicPr>
+          <p:blipFill>
+            <a:blip r:embed="rId14">
+              <a:extLst>
+                <a:ext uri="{96DAC541-7B7A-43D3-8B79-37D633B846F1}">
+                  <asvg:svgBlip xmlns:asvg="http://schemas.microsoft.com/office/drawing/2016/SVG/main" r:embed="rId15"/>
+                </a:ext>
+              </a:extLst>
+            </a:blip>
+            <a:stretch>
+              <a:fillRect/>
+            </a:stretch>
+          </p:blipFill>
+          <p:spPr>
+            <a:xfrm>
+              <a:off x="4730844" y="4814845"/>
+              <a:ext cx="203501" cy="203501"/>
+            </a:xfrm>
+            <a:prstGeom prst="rect">
+              <a:avLst/>
+            </a:prstGeom>
+          </p:spPr>
+        </p:pic>
+        <p:sp>
+          <p:nvSpPr>
+            <p:cNvPr id="38" name="TextBox 37"/>
+            <p:cNvSpPr txBox="1"/>
+            <p:nvPr/>
+          </p:nvSpPr>
+          <p:spPr>
+            <a:xfrm>
+              <a:off x="5002180" y="4854697"/>
+              <a:ext cx="934835" cy="154322"/>
+            </a:xfrm>
+            <a:prstGeom prst="rect">
+              <a:avLst/>
+            </a:prstGeom>
+            <a:noFill/>
+          </p:spPr>
+          <p:txBody>
+            <a:bodyPr wrap="none" lIns="0" rIns="0" tIns="0" bIns="0" anchor="t">
+              <a:noAutofit/>
+            </a:bodyPr>
+            <a:lstStyle/>
+            <a:p>
+              <a:pPr algn="l">
+                <a:lnSpc>
+                  <a:spcPct val="100000"/>
+                </a:lnSpc>
+              </a:pPr>
+              <a:r>
+                <a:rPr sz="934" b="1" lang="ko-KR">
+                  <a:solidFill>
+                    <a:srgbClr val="00A4A6"/>
+                  </a:solidFill>
+                  <a:latin typeface="Arial"/>
+                  <a:ea typeface="Malgun Gothic"/>
+                  <a:cs typeface="Malgun Gothic"/>
+                </a:rPr>
+                <a:t>TGW subnet</a:t>
+              </a:r>
+            </a:p>
+          </p:txBody>
+        </p:sp>
+        <p:sp>
+          <p:nvSpPr>
+            <p:cNvPr id="39" name="Rectangle 38"/>
+            <p:cNvSpPr/>
+            <p:nvPr/>
+          </p:nvSpPr>
+          <p:spPr>
+            <a:xfrm>
+              <a:off x="6206230" y="4814845"/>
+              <a:ext cx="1916306" cy="1119258"/>
+            </a:xfrm>
+            <a:prstGeom prst="rect">
+              <a:avLst/>
+            </a:prstGeom>
+            <a:noFill/>
+            <a:ln w="12719">
+              <a:solidFill>
+                <a:srgbClr val="00A4A6"/>
+              </a:solidFill>
+              <a:prstDash val="solid"/>
+              <a:miter lim="800000"/>
+            </a:ln>
+          </p:spPr>
+          <p:txBody>
+            <a:bodyPr rtlCol="0" anchor="ctr"/>
+            <a:lstStyle/>
+            <a:p>
+              <a:pPr algn="ctr"/>
+            </a:p>
+          </p:txBody>
+        </p:sp>
+        <p:pic>
+          <p:nvPicPr>
+            <p:cNvPr id="40" name="Private-subnet_32" descr="Private subnet_32"/>
+            <p:cNvPicPr>
+              <a:picLocks noChangeAspect="1"/>
+            </p:cNvPicPr>
+            <p:nvPr/>
+          </p:nvPicPr>
+          <p:blipFill>
+            <a:blip r:embed="rId14">
+              <a:extLst>
+                <a:ext uri="{96DAC541-7B7A-43D3-8B79-37D633B846F1}">
+                  <asvg:svgBlip xmlns:asvg="http://schemas.microsoft.com/office/drawing/2016/SVG/main" r:embed="rId15"/>
+                </a:ext>
+              </a:extLst>
+            </a:blip>
+            <a:stretch>
+              <a:fillRect/>
+            </a:stretch>
+          </p:blipFill>
+          <p:spPr>
+            <a:xfrm>
+              <a:off x="6206230" y="4814845"/>
+              <a:ext cx="203501" cy="203501"/>
+            </a:xfrm>
+            <a:prstGeom prst="rect">
+              <a:avLst/>
+            </a:prstGeom>
+          </p:spPr>
+        </p:pic>
+        <p:sp>
+          <p:nvSpPr>
+            <p:cNvPr id="41" name="TextBox 40"/>
+            <p:cNvSpPr txBox="1"/>
+            <p:nvPr/>
+          </p:nvSpPr>
+          <p:spPr>
+            <a:xfrm>
+              <a:off x="6477565" y="4854697"/>
+              <a:ext cx="1179673" cy="154322"/>
+            </a:xfrm>
+            <a:prstGeom prst="rect">
+              <a:avLst/>
+            </a:prstGeom>
+            <a:noFill/>
+          </p:spPr>
+          <p:txBody>
+            <a:bodyPr wrap="none" lIns="0" rIns="0" tIns="0" bIns="0" anchor="t">
+              <a:noAutofit/>
+            </a:bodyPr>
+            <a:lstStyle/>
+            <a:p>
+              <a:pPr algn="l">
+                <a:lnSpc>
+                  <a:spcPct val="100000"/>
+                </a:lnSpc>
+              </a:pPr>
+              <a:r>
+                <a:rPr sz="934" b="1" lang="ko-KR">
+                  <a:solidFill>
+                    <a:srgbClr val="00A4A6"/>
+                  </a:solidFill>
+                  <a:latin typeface="Arial"/>
+                  <a:ea typeface="Malgun Gothic"/>
+                  <a:cs typeface="Malgun Gothic"/>
+                </a:rPr>
+                <a:t>Router subnet</a:t>
+              </a:r>
+            </a:p>
+          </p:txBody>
+        </p:sp>
+        <p:sp>
+          <p:nvSpPr>
+            <p:cNvPr id="42" name="Rectangle 41"/>
+            <p:cNvSpPr/>
+            <p:nvPr/>
+          </p:nvSpPr>
+          <p:spPr>
+            <a:xfrm>
+              <a:off x="8309079" y="4814845"/>
+              <a:ext cx="2306350" cy="1119258"/>
+            </a:xfrm>
+            <a:prstGeom prst="rect">
+              <a:avLst/>
+            </a:prstGeom>
+            <a:noFill/>
+            <a:ln w="12719">
+              <a:solidFill>
+                <a:srgbClr val="00A4A6"/>
+              </a:solidFill>
+              <a:prstDash val="solid"/>
+              <a:miter lim="800000"/>
+            </a:ln>
+          </p:spPr>
+          <p:txBody>
+            <a:bodyPr rtlCol="0" anchor="ctr"/>
+            <a:lstStyle/>
+            <a:p>
+              <a:pPr algn="ctr"/>
+            </a:p>
+          </p:txBody>
+        </p:sp>
+        <p:pic>
+          <p:nvPicPr>
+            <p:cNvPr id="43" name="Private-subnet_32" descr="Private subnet_32"/>
+            <p:cNvPicPr>
+              <a:picLocks noChangeAspect="1"/>
+            </p:cNvPicPr>
+            <p:nvPr/>
+          </p:nvPicPr>
+          <p:blipFill>
+            <a:blip r:embed="rId14">
+              <a:extLst>
+                <a:ext uri="{96DAC541-7B7A-43D3-8B79-37D633B846F1}">
+                  <asvg:svgBlip xmlns:asvg="http://schemas.microsoft.com/office/drawing/2016/SVG/main" r:embed="rId15"/>
+                </a:ext>
+              </a:extLst>
+            </a:blip>
+            <a:stretch>
+              <a:fillRect/>
+            </a:stretch>
+          </p:blipFill>
+          <p:spPr>
+            <a:xfrm>
+              <a:off x="8309079" y="4814845"/>
+              <a:ext cx="203501" cy="203501"/>
+            </a:xfrm>
+            <a:prstGeom prst="rect">
+              <a:avLst/>
+            </a:prstGeom>
+          </p:spPr>
+        </p:pic>
+        <p:sp>
+          <p:nvSpPr>
+            <p:cNvPr id="44" name="TextBox 43"/>
+            <p:cNvSpPr txBox="1"/>
+            <p:nvPr/>
+          </p:nvSpPr>
+          <p:spPr>
+            <a:xfrm>
+              <a:off x="8580414" y="4854697"/>
+              <a:ext cx="1342898" cy="154322"/>
+            </a:xfrm>
+            <a:prstGeom prst="rect">
+              <a:avLst/>
+            </a:prstGeom>
+            <a:noFill/>
+          </p:spPr>
+          <p:txBody>
+            <a:bodyPr wrap="none" lIns="0" rIns="0" tIns="0" bIns="0" anchor="t">
+              <a:noAutofit/>
+            </a:bodyPr>
+            <a:lstStyle/>
+            <a:p>
+              <a:pPr algn="l">
+                <a:lnSpc>
+                  <a:spcPct val="100000"/>
+                </a:lnSpc>
+              </a:pPr>
+              <a:r>
+                <a:rPr sz="934" b="1" lang="ko-KR">
+                  <a:solidFill>
+                    <a:srgbClr val="00A4A6"/>
+                  </a:solidFill>
+                  <a:latin typeface="Arial"/>
+                  <a:ea typeface="Malgun Gothic"/>
+                  <a:cs typeface="Malgun Gothic"/>
+                </a:rPr>
+                <a:t>Receiver subnet</a:t>
+              </a:r>
+            </a:p>
+          </p:txBody>
+        </p:sp>
+        <p:sp>
+          <p:nvSpPr>
+            <p:cNvPr id="45" name="Rectangle 44"/>
+            <p:cNvSpPr/>
+            <p:nvPr/>
+          </p:nvSpPr>
+          <p:spPr>
+            <a:xfrm>
+              <a:off x="8224286" y="1965824"/>
+              <a:ext cx="2475935" cy="4019154"/>
+            </a:xfrm>
+            <a:prstGeom prst="rect">
+              <a:avLst/>
+            </a:prstGeom>
+            <a:noFill/>
+            <a:ln w="12719">
+              <a:solidFill>
+                <a:srgbClr val="7D8998"/>
+              </a:solidFill>
+              <a:custDash>
+                <a:ds d="400000" sp="266667"/>
+              </a:custDash>
+              <a:miter lim="800000"/>
+            </a:ln>
+          </p:spPr>
+          <p:txBody>
+            <a:bodyPr rtlCol="0" anchor="ctr"/>
+            <a:lstStyle/>
+            <a:p>
+              <a:pPr algn="ctr"/>
+            </a:p>
+          </p:txBody>
+        </p:sp>
+        <p:pic>
+          <p:nvPicPr>
+            <p:cNvPr id="46" name="AWS-Transit-Gateway" descr="AWS Transit Gateway"/>
+            <p:cNvPicPr>
+              <a:picLocks noChangeAspect="1"/>
+            </p:cNvPicPr>
+            <p:nvPr/>
+          </p:nvPicPr>
+          <p:blipFill>
+            <a:blip r:embed="rId10">
+              <a:extLst>
+                <a:ext uri="{96DAC541-7B7A-43D3-8B79-37D633B846F1}">
+                  <asvg:svgBlip xmlns:asvg="http://schemas.microsoft.com/office/drawing/2016/SVG/main" r:embed="rId11"/>
+                </a:ext>
+              </a:extLst>
+            </a:blip>
+            <a:stretch>
+              <a:fillRect/>
+            </a:stretch>
+          </p:blipFill>
+          <p:spPr>
+            <a:xfrm>
+              <a:off x="8224286" y="1965824"/>
+              <a:ext cx="169585" cy="169585"/>
+            </a:xfrm>
+            <a:prstGeom prst="rect">
+              <a:avLst/>
+            </a:prstGeom>
+          </p:spPr>
+        </p:pic>
+        <p:sp>
+          <p:nvSpPr>
+            <p:cNvPr id="47" name="TextBox 46"/>
+            <p:cNvSpPr txBox="1"/>
+            <p:nvPr/>
+          </p:nvSpPr>
+          <p:spPr>
+            <a:xfrm>
+              <a:off x="8461705" y="2005677"/>
+              <a:ext cx="2448377" cy="154322"/>
+            </a:xfrm>
+            <a:prstGeom prst="rect">
+              <a:avLst/>
+            </a:prstGeom>
+            <a:noFill/>
+          </p:spPr>
+          <p:txBody>
+            <a:bodyPr wrap="none" lIns="0" rIns="0" tIns="0" bIns="0" anchor="t">
+              <a:noAutofit/>
+            </a:bodyPr>
+            <a:lstStyle/>
+            <a:p>
+              <a:pPr algn="l">
+                <a:lnSpc>
+                  <a:spcPct val="100000"/>
+                </a:lnSpc>
+              </a:pPr>
+              <a:r>
+                <a:rPr sz="934" b="1" lang="ko-KR">
+                  <a:solidFill>
+                    <a:srgbClr val="7D8998"/>
+                  </a:solidFill>
+                  <a:latin typeface="Arial"/>
+                  <a:ea typeface="Malgun Gothic"/>
+                  <a:cs typeface="Malgun Gothic"/>
+                </a:rPr>
+                <a:t>TGW 멀티캐스트 도메인 · IGMPv2</a:t>
+              </a:r>
+            </a:p>
+          </p:txBody>
+        </p:sp>
+        <p:pic>
+          <p:nvPicPr>
+            <p:cNvPr id="48" name="AWS-Transit-Gateway_Attachment" descr="AWS Transit Gateway_Attachment"/>
             <p:cNvPicPr>
               <a:picLocks noChangeAspect="1"/>
             </p:cNvPicPr>
@@ -4112,8 +4676,8 @@
           </p:blipFill>
           <p:spPr>
             <a:xfrm>
-              <a:off x="4995826" y="3720214"/>
-              <a:ext cx="354419" cy="354419"/>
+              <a:off x="5205681" y="2474578"/>
+              <a:ext cx="407003" cy="407003"/>
             </a:xfrm>
             <a:prstGeom prst="rect">
               <a:avLst/>
@@ -4122,14 +4686,14 @@
         </p:pic>
         <p:sp>
           <p:nvSpPr>
-            <p:cNvPr id="32" name="TextBox 31"/>
+            <p:cNvPr id="49" name="TextBox 48"/>
             <p:cNvSpPr txBox="1"/>
             <p:nvPr/>
           </p:nvSpPr>
           <p:spPr>
             <a:xfrm>
-              <a:off x="4588336" y="4109336"/>
-              <a:ext cx="1169397" cy="134384"/>
+              <a:off x="4778540" y="2921433"/>
+              <a:ext cx="1261285" cy="154322"/>
             </a:xfrm>
             <a:prstGeom prst="rect">
               <a:avLst/>
@@ -4148,7 +4712,7 @@
                 </a:lnSpc>
               </a:pPr>
               <a:r>
-                <a:rPr sz="813" b="0" lang="ko-KR">
+                <a:rPr sz="934" b="0" lang="ko-KR">
                   <a:solidFill>
                     <a:srgbClr val="232F3E"/>
                   </a:solidFill>
@@ -4156,110 +4720,14 @@
                   <a:ea typeface="Malgun Gothic"/>
                   <a:cs typeface="Malgun Gothic"/>
                 </a:rPr>
-                <a:t>Transit Gateway</a:t>
+                <a:t>TGW attachment</a:t>
               </a:r>
-            </a:p>
-          </p:txBody>
-        </p:sp>
-        <p:sp>
-          <p:nvSpPr>
-            <p:cNvPr id="33" name="TextBox 32"/>
-            <p:cNvSpPr txBox="1"/>
-            <p:nvPr/>
-          </p:nvSpPr>
-          <p:spPr>
-            <a:xfrm>
-              <a:off x="4885070" y="4241505"/>
-              <a:ext cx="575930" cy="115186"/>
-            </a:xfrm>
-            <a:prstGeom prst="rect">
-              <a:avLst/>
-            </a:prstGeom>
-            <a:noFill/>
-          </p:spPr>
-          <p:txBody>
-            <a:bodyPr wrap="none" lIns="0" rIns="0" tIns="0" bIns="0" anchor="t">
-              <a:noAutofit/>
-            </a:bodyPr>
-            <a:lstStyle/>
-            <a:p>
-              <a:pPr algn="ctr">
-                <a:lnSpc>
-                  <a:spcPct val="100000"/>
-                </a:lnSpc>
-              </a:pPr>
-              <a:r>
-                <a:rPr sz="697" b="0" lang="ko-KR">
-                  <a:solidFill>
-                    <a:srgbClr val="545B64"/>
-                  </a:solidFill>
-                  <a:latin typeface="Arial"/>
-                  <a:ea typeface="Malgun Gothic"/>
-                  <a:cs typeface="Malgun Gothic"/>
-                </a:rPr>
-                <a:t>AS 65400</a:t>
-              </a:r>
-            </a:p>
-          </p:txBody>
-        </p:sp>
-        <p:cxnSp>
-          <p:nvCxnSpPr>
-            <p:cNvPr id="34" name="Connector 33"/>
-            <p:cNvCxnSpPr/>
-            <p:nvPr/>
-          </p:nvCxnSpPr>
-          <p:spPr>
-            <a:xfrm>
-              <a:off x="4390360" y="3897423"/>
-              <a:ext cx="561163" cy="0"/>
-            </a:xfrm>
-            <a:prstGeom prst="line">
-              <a:avLst/>
-            </a:prstGeom>
-            <a:ln w="11076">
-              <a:solidFill>
-                <a:srgbClr val="232F3E"/>
-              </a:solidFill>
-              <a:prstDash val="solid"/>
-              <a:miter lim="800000"/>
-              <a:tailEnd type="triangle" w="med" len="med"/>
-            </a:ln>
-          </p:spPr>
-        </p:cxnSp>
-        <p:sp>
-          <p:nvSpPr>
-            <p:cNvPr id="35" name="Rectangle 34"/>
-            <p:cNvSpPr/>
-            <p:nvPr/>
-          </p:nvSpPr>
-          <p:spPr>
-            <a:xfrm>
-              <a:off x="5852337" y="1874284"/>
-              <a:ext cx="5567326" cy="4267791"/>
-            </a:xfrm>
-            <a:prstGeom prst="rect">
-              <a:avLst/>
-            </a:prstGeom>
-            <a:noFill/>
-            <a:ln w="14767">
-              <a:solidFill>
-                <a:srgbClr val="8C4FFF"/>
-              </a:solidFill>
-              <a:prstDash val="solid"/>
-              <a:miter lim="800000"/>
-            </a:ln>
-          </p:spPr>
-          <p:txBody>
-            <a:bodyPr rtlCol="0" anchor="ctr"/>
-            <a:lstStyle/>
-            <a:p>
-              <a:pPr algn="ctr"/>
             </a:p>
           </p:txBody>
         </p:sp>
         <p:pic>
           <p:nvPicPr>
-            <p:cNvPr id="36" name="Virtual-private-cloud-VPC_32" descr="Virtual private cloud VPC_32"/>
+            <p:cNvPr id="50" name="Amazon-EC2_Instance" descr="Amazon EC2_Instance"/>
             <p:cNvPicPr>
               <a:picLocks noChangeAspect="1"/>
             </p:cNvPicPr>
@@ -4279,8 +4747,8 @@
           </p:blipFill>
           <p:spPr>
             <a:xfrm>
-              <a:off x="5852337" y="1874284"/>
-              <a:ext cx="177209" cy="177209"/>
+              <a:off x="7189820" y="2474578"/>
+              <a:ext cx="407003" cy="407003"/>
             </a:xfrm>
             <a:prstGeom prst="rect">
               <a:avLst/>
@@ -4289,14 +4757,14 @@
         </p:pic>
         <p:sp>
           <p:nvSpPr>
-            <p:cNvPr id="37" name="TextBox 36"/>
+            <p:cNvPr id="51" name="TextBox 50"/>
             <p:cNvSpPr txBox="1"/>
             <p:nvPr/>
           </p:nvSpPr>
           <p:spPr>
             <a:xfrm>
-              <a:off x="6088616" y="1908987"/>
-              <a:ext cx="1169397" cy="134384"/>
+              <a:off x="6736712" y="2921433"/>
+              <a:ext cx="1313221" cy="154322"/>
             </a:xfrm>
             <a:prstGeom prst="rect">
               <a:avLst/>
@@ -4309,68 +4777,35 @@
             </a:bodyPr>
             <a:lstStyle/>
             <a:p>
-              <a:pPr algn="l">
+              <a:pPr algn="ctr">
                 <a:lnSpc>
                   <a:spcPct val="100000"/>
                 </a:lnSpc>
               </a:pPr>
               <a:r>
-                <a:rPr sz="813" b="1" lang="ko-KR">
+                <a:rPr sz="934" b="0" lang="ko-KR">
                   <a:solidFill>
-                    <a:srgbClr val="8C4FFF"/>
+                    <a:srgbClr val="232F3E"/>
                   </a:solidFill>
                   <a:latin typeface="Arial"/>
                   <a:ea typeface="Malgun Gothic"/>
                   <a:cs typeface="Malgun Gothic"/>
                 </a:rPr>
-                <a:t>VPC 10.1.1.0/24</a:t>
+                <a:t>C8000V-1 · 활성</a:t>
               </a:r>
             </a:p>
           </p:txBody>
         </p:sp>
         <p:sp>
           <p:nvSpPr>
-            <p:cNvPr id="38" name="Rectangle 37"/>
-            <p:cNvSpPr/>
-            <p:nvPr/>
-          </p:nvSpPr>
-          <p:spPr>
-            <a:xfrm>
-              <a:off x="5970477" y="2125330"/>
-              <a:ext cx="5331047" cy="1402907"/>
-            </a:xfrm>
-            <a:prstGeom prst="rect">
-              <a:avLst/>
-            </a:prstGeom>
-            <a:noFill/>
-            <a:ln w="11076">
-              <a:solidFill>
-                <a:srgbClr val="00A4A6"/>
-              </a:solidFill>
-              <a:custDash>
-                <a:ds d="533333" sp="266667"/>
-              </a:custDash>
-              <a:miter lim="800000"/>
-            </a:ln>
-          </p:spPr>
-          <p:txBody>
-            <a:bodyPr rtlCol="0" anchor="ctr"/>
-            <a:lstStyle/>
-            <a:p>
-              <a:pPr algn="ctr"/>
-            </a:p>
-          </p:txBody>
-        </p:sp>
-        <p:sp>
-          <p:nvSpPr>
-            <p:cNvPr id="39" name="TextBox 38"/>
+            <p:cNvPr id="52" name="TextBox 51"/>
             <p:cNvSpPr txBox="1"/>
             <p:nvPr/>
           </p:nvSpPr>
           <p:spPr>
             <a:xfrm>
-              <a:off x="6029547" y="2160034"/>
-              <a:ext cx="1595807" cy="134384"/>
+              <a:off x="6725583" y="3073212"/>
+              <a:ext cx="1335478" cy="132276"/>
             </a:xfrm>
             <a:prstGeom prst="rect">
               <a:avLst/>
@@ -4383,59 +4818,28 @@
             </a:bodyPr>
             <a:lstStyle/>
             <a:p>
-              <a:pPr algn="l">
+              <a:pPr algn="ctr">
                 <a:lnSpc>
                   <a:spcPct val="100000"/>
                 </a:lnSpc>
               </a:pPr>
               <a:r>
-                <a:rPr sz="813" b="1" lang="ko-KR">
+                <a:rPr sz="801" b="0" lang="ko-KR">
                   <a:solidFill>
-                    <a:srgbClr val="00A4A6"/>
+                    <a:srgbClr val="545B64"/>
                   </a:solidFill>
                   <a:latin typeface="Arial"/>
                   <a:ea typeface="Malgun Gothic"/>
                   <a:cs typeface="Malgun Gothic"/>
                 </a:rPr>
-                <a:t>AZ1 · ap-northeast-2a</a:t>
+                <a:t>Gi1 .30 · GRE 종단</a:t>
               </a:r>
-            </a:p>
-          </p:txBody>
-        </p:sp>
-        <p:sp>
-          <p:nvSpPr>
-            <p:cNvPr id="40" name="Rectangle 39"/>
-            <p:cNvSpPr/>
-            <p:nvPr/>
-          </p:nvSpPr>
-          <p:spPr>
-            <a:xfrm>
-              <a:off x="6073849" y="2391144"/>
-              <a:ext cx="1107558" cy="1033721"/>
-            </a:xfrm>
-            <a:prstGeom prst="rect">
-              <a:avLst/>
-            </a:prstGeom>
-            <a:noFill/>
-            <a:ln w="11076">
-              <a:solidFill>
-                <a:srgbClr val="00A4A6"/>
-              </a:solidFill>
-              <a:prstDash val="solid"/>
-              <a:miter lim="800000"/>
-            </a:ln>
-          </p:spPr>
-          <p:txBody>
-            <a:bodyPr rtlCol="0" anchor="ctr"/>
-            <a:lstStyle/>
-            <a:p>
-              <a:pPr algn="ctr"/>
             </a:p>
           </p:txBody>
         </p:sp>
         <p:pic>
           <p:nvPicPr>
-            <p:cNvPr id="41" name="Private-subnet_32" descr="Private subnet_32"/>
+            <p:cNvPr id="53" name="Amazon-VPC_Elastic-Network-Interface" descr="Amazon VPC_Elastic Network Interface"/>
             <p:cNvPicPr>
               <a:picLocks noChangeAspect="1"/>
             </p:cNvPicPr>
@@ -4455,8 +4859,8 @@
           </p:blipFill>
           <p:spPr>
             <a:xfrm>
-              <a:off x="6073849" y="2391144"/>
-              <a:ext cx="177209" cy="177209"/>
+              <a:off x="8631289" y="2474578"/>
+              <a:ext cx="407003" cy="407003"/>
             </a:xfrm>
             <a:prstGeom prst="rect">
               <a:avLst/>
@@ -4465,14 +4869,14 @@
         </p:pic>
         <p:sp>
           <p:nvSpPr>
-            <p:cNvPr id="42" name="TextBox 41"/>
+            <p:cNvPr id="54" name="TextBox 53"/>
             <p:cNvSpPr txBox="1"/>
             <p:nvPr/>
           </p:nvSpPr>
           <p:spPr>
             <a:xfrm>
-              <a:off x="6310128" y="2425848"/>
-              <a:ext cx="814055" cy="134384"/>
+              <a:off x="8285761" y="2921433"/>
+              <a:ext cx="1098060" cy="154322"/>
             </a:xfrm>
             <a:prstGeom prst="rect">
               <a:avLst/>
@@ -4485,59 +4889,364 @@
             </a:bodyPr>
             <a:lstStyle/>
             <a:p>
-              <a:pPr algn="l">
+              <a:pPr algn="ctr">
                 <a:lnSpc>
                   <a:spcPct val="100000"/>
                 </a:lnSpc>
               </a:pPr>
               <a:r>
-                <a:rPr sz="813" b="1" lang="ko-KR">
+                <a:rPr sz="934" b="0" lang="ko-KR">
                   <a:solidFill>
-                    <a:srgbClr val="00A4A6"/>
+                    <a:srgbClr val="232F3E"/>
                   </a:solidFill>
                   <a:latin typeface="Arial"/>
                   <a:ea typeface="Malgun Gothic"/>
                   <a:cs typeface="Malgun Gothic"/>
                 </a:rPr>
-                <a:t>TGW subnet</a:t>
+                <a:t>C8000V-1 Gi2</a:t>
               </a:r>
             </a:p>
           </p:txBody>
         </p:sp>
         <p:sp>
           <p:nvSpPr>
-            <p:cNvPr id="43" name="Rectangle 42"/>
-            <p:cNvSpPr/>
-            <p:nvPr/>
-          </p:nvSpPr>
-          <p:spPr>
-            <a:xfrm>
-              <a:off x="7299547" y="2391144"/>
-              <a:ext cx="1668721" cy="1033721"/>
-            </a:xfrm>
-            <a:prstGeom prst="rect">
-              <a:avLst/>
-            </a:prstGeom>
-            <a:noFill/>
-            <a:ln w="11076">
-              <a:solidFill>
-                <a:srgbClr val="00A4A6"/>
-              </a:solidFill>
-              <a:prstDash val="solid"/>
-              <a:miter lim="800000"/>
-            </a:ln>
-          </p:spPr>
-          <p:txBody>
-            <a:bodyPr rtlCol="0" anchor="ctr"/>
-            <a:lstStyle/>
-            <a:p>
-              <a:pPr algn="ctr"/>
+            <p:cNvPr id="55" name="TextBox 54"/>
+            <p:cNvSpPr txBox="1"/>
+            <p:nvPr/>
+          </p:nvSpPr>
+          <p:spPr>
+            <a:xfrm>
+              <a:off x="8469124" y="3073212"/>
+              <a:ext cx="731333" cy="132276"/>
+            </a:xfrm>
+            <a:prstGeom prst="rect">
+              <a:avLst/>
+            </a:prstGeom>
+            <a:noFill/>
+          </p:spPr>
+          <p:txBody>
+            <a:bodyPr wrap="none" lIns="0" rIns="0" tIns="0" bIns="0" anchor="t">
+              <a:noAutofit/>
+            </a:bodyPr>
+            <a:lstStyle/>
+            <a:p>
+              <a:pPr algn="ctr">
+                <a:lnSpc>
+                  <a:spcPct val="100000"/>
+                </a:lnSpc>
+              </a:pPr>
+              <a:r>
+                <a:rPr sz="801" b="0" lang="ko-KR">
+                  <a:solidFill>
+                    <a:srgbClr val="545B64"/>
+                  </a:solidFill>
+                  <a:latin typeface="Arial"/>
+                  <a:ea typeface="Malgun Gothic"/>
+                  <a:cs typeface="Malgun Gothic"/>
+                </a:rPr>
+                <a:t>10.1.1.90</a:t>
+              </a:r>
             </a:p>
           </p:txBody>
         </p:sp>
         <p:pic>
           <p:nvPicPr>
-            <p:cNvPr id="44" name="Private-subnet_32" descr="Private subnet_32"/>
+            <p:cNvPr id="56" name="Amazon-EC2_Instance" descr="Amazon EC2_Instance"/>
+            <p:cNvPicPr>
+              <a:picLocks noChangeAspect="1"/>
+            </p:cNvPicPr>
+            <p:nvPr/>
+          </p:nvPicPr>
+          <p:blipFill>
+            <a:blip r:embed="rId18">
+              <a:extLst>
+                <a:ext uri="{96DAC541-7B7A-43D3-8B79-37D633B846F1}">
+                  <asvg:svgBlip xmlns:asvg="http://schemas.microsoft.com/office/drawing/2016/SVG/main" r:embed="rId19"/>
+                </a:ext>
+              </a:extLst>
+            </a:blip>
+            <a:stretch>
+              <a:fillRect/>
+            </a:stretch>
+          </p:blipFill>
+          <p:spPr>
+            <a:xfrm>
+              <a:off x="9937091" y="2474578"/>
+              <a:ext cx="407003" cy="407003"/>
+            </a:xfrm>
+            <a:prstGeom prst="rect">
+              <a:avLst/>
+            </a:prstGeom>
+          </p:spPr>
+        </p:pic>
+        <p:sp>
+          <p:nvSpPr>
+            <p:cNvPr id="57" name="TextBox 56"/>
+            <p:cNvSpPr txBox="1"/>
+            <p:nvPr/>
+          </p:nvSpPr>
+          <p:spPr>
+            <a:xfrm>
+              <a:off x="9613820" y="2921433"/>
+              <a:ext cx="1053544" cy="154322"/>
+            </a:xfrm>
+            <a:prstGeom prst="rect">
+              <a:avLst/>
+            </a:prstGeom>
+            <a:noFill/>
+          </p:spPr>
+          <p:txBody>
+            <a:bodyPr wrap="none" lIns="0" rIns="0" tIns="0" bIns="0" anchor="t">
+              <a:noAutofit/>
+            </a:bodyPr>
+            <a:lstStyle/>
+            <a:p>
+              <a:pPr algn="ctr">
+                <a:lnSpc>
+                  <a:spcPct val="100000"/>
+                </a:lnSpc>
+              </a:pPr>
+              <a:r>
+                <a:rPr sz="934" b="0" lang="ko-KR">
+                  <a:solidFill>
+                    <a:srgbClr val="232F3E"/>
+                  </a:solidFill>
+                  <a:latin typeface="Arial"/>
+                  <a:ea typeface="Malgun Gothic"/>
+                  <a:cs typeface="Malgun Gothic"/>
+                </a:rPr>
+                <a:t>EC2-1 리시버</a:t>
+              </a:r>
+            </a:p>
+          </p:txBody>
+        </p:sp>
+        <p:sp>
+          <p:nvSpPr>
+            <p:cNvPr id="58" name="TextBox 57"/>
+            <p:cNvSpPr txBox="1"/>
+            <p:nvPr/>
+          </p:nvSpPr>
+          <p:spPr>
+            <a:xfrm>
+              <a:off x="9774925" y="3073212"/>
+              <a:ext cx="731333" cy="132276"/>
+            </a:xfrm>
+            <a:prstGeom prst="rect">
+              <a:avLst/>
+            </a:prstGeom>
+            <a:noFill/>
+          </p:spPr>
+          <p:txBody>
+            <a:bodyPr wrap="none" lIns="0" rIns="0" tIns="0" bIns="0" anchor="t">
+              <a:noAutofit/>
+            </a:bodyPr>
+            <a:lstStyle/>
+            <a:p>
+              <a:pPr algn="ctr">
+                <a:lnSpc>
+                  <a:spcPct val="100000"/>
+                </a:lnSpc>
+              </a:pPr>
+              <a:r>
+                <a:rPr sz="801" b="0" lang="ko-KR">
+                  <a:solidFill>
+                    <a:srgbClr val="545B64"/>
+                  </a:solidFill>
+                  <a:latin typeface="Arial"/>
+                  <a:ea typeface="Malgun Gothic"/>
+                  <a:cs typeface="Malgun Gothic"/>
+                </a:rPr>
+                <a:t>10.1.1.84</a:t>
+              </a:r>
+            </a:p>
+          </p:txBody>
+        </p:sp>
+        <p:pic>
+          <p:nvPicPr>
+            <p:cNvPr id="59" name="AWS-Transit-Gateway_Attachment" descr="AWS Transit Gateway_Attachment"/>
+            <p:cNvPicPr>
+              <a:picLocks noChangeAspect="1"/>
+            </p:cNvPicPr>
+            <p:nvPr/>
+          </p:nvPicPr>
+          <p:blipFill>
+            <a:blip r:embed="rId16">
+              <a:extLst>
+                <a:ext uri="{96DAC541-7B7A-43D3-8B79-37D633B846F1}">
+                  <asvg:svgBlip xmlns:asvg="http://schemas.microsoft.com/office/drawing/2016/SVG/main" r:embed="rId17"/>
+                </a:ext>
+              </a:extLst>
+            </a:blip>
+            <a:stretch>
+              <a:fillRect/>
+            </a:stretch>
+          </p:blipFill>
+          <p:spPr>
+            <a:xfrm>
+              <a:off x="5205681" y="5103139"/>
+              <a:ext cx="407003" cy="407003"/>
+            </a:xfrm>
+            <a:prstGeom prst="rect">
+              <a:avLst/>
+            </a:prstGeom>
+          </p:spPr>
+        </p:pic>
+        <p:sp>
+          <p:nvSpPr>
+            <p:cNvPr id="60" name="TextBox 59"/>
+            <p:cNvSpPr txBox="1"/>
+            <p:nvPr/>
+          </p:nvSpPr>
+          <p:spPr>
+            <a:xfrm>
+              <a:off x="4778540" y="5549994"/>
+              <a:ext cx="1261285" cy="154322"/>
+            </a:xfrm>
+            <a:prstGeom prst="rect">
+              <a:avLst/>
+            </a:prstGeom>
+            <a:noFill/>
+          </p:spPr>
+          <p:txBody>
+            <a:bodyPr wrap="none" lIns="0" rIns="0" tIns="0" bIns="0" anchor="t">
+              <a:noAutofit/>
+            </a:bodyPr>
+            <a:lstStyle/>
+            <a:p>
+              <a:pPr algn="ctr">
+                <a:lnSpc>
+                  <a:spcPct val="100000"/>
+                </a:lnSpc>
+              </a:pPr>
+              <a:r>
+                <a:rPr sz="934" b="0" lang="ko-KR">
+                  <a:solidFill>
+                    <a:srgbClr val="232F3E"/>
+                  </a:solidFill>
+                  <a:latin typeface="Arial"/>
+                  <a:ea typeface="Malgun Gothic"/>
+                  <a:cs typeface="Malgun Gothic"/>
+                </a:rPr>
+                <a:t>TGW attachment</a:t>
+              </a:r>
+            </a:p>
+          </p:txBody>
+        </p:sp>
+        <p:pic>
+          <p:nvPicPr>
+            <p:cNvPr id="61" name="Amazon-EC2_Instance" descr="Amazon EC2_Instance"/>
+            <p:cNvPicPr>
+              <a:picLocks noChangeAspect="1"/>
+            </p:cNvPicPr>
+            <p:nvPr/>
+          </p:nvPicPr>
+          <p:blipFill>
+            <a:blip r:embed="rId18">
+              <a:extLst>
+                <a:ext uri="{96DAC541-7B7A-43D3-8B79-37D633B846F1}">
+                  <asvg:svgBlip xmlns:asvg="http://schemas.microsoft.com/office/drawing/2016/SVG/main" r:embed="rId19"/>
+                </a:ext>
+              </a:extLst>
+            </a:blip>
+            <a:stretch>
+              <a:fillRect/>
+            </a:stretch>
+          </p:blipFill>
+          <p:spPr>
+            <a:xfrm>
+              <a:off x="7189820" y="5103139"/>
+              <a:ext cx="407003" cy="407003"/>
+            </a:xfrm>
+            <a:prstGeom prst="rect">
+              <a:avLst/>
+            </a:prstGeom>
+          </p:spPr>
+        </p:pic>
+        <p:sp>
+          <p:nvSpPr>
+            <p:cNvPr id="62" name="TextBox 61"/>
+            <p:cNvSpPr txBox="1"/>
+            <p:nvPr/>
+          </p:nvSpPr>
+          <p:spPr>
+            <a:xfrm>
+              <a:off x="6736712" y="5549994"/>
+              <a:ext cx="1313221" cy="154322"/>
+            </a:xfrm>
+            <a:prstGeom prst="rect">
+              <a:avLst/>
+            </a:prstGeom>
+            <a:noFill/>
+          </p:spPr>
+          <p:txBody>
+            <a:bodyPr wrap="none" lIns="0" rIns="0" tIns="0" bIns="0" anchor="t">
+              <a:noAutofit/>
+            </a:bodyPr>
+            <a:lstStyle/>
+            <a:p>
+              <a:pPr algn="ctr">
+                <a:lnSpc>
+                  <a:spcPct val="100000"/>
+                </a:lnSpc>
+              </a:pPr>
+              <a:r>
+                <a:rPr sz="934" b="0" lang="ko-KR">
+                  <a:solidFill>
+                    <a:srgbClr val="232F3E"/>
+                  </a:solidFill>
+                  <a:latin typeface="Arial"/>
+                  <a:ea typeface="Malgun Gothic"/>
+                  <a:cs typeface="Malgun Gothic"/>
+                </a:rPr>
+                <a:t>C8000V-2 · 대기</a:t>
+              </a:r>
+            </a:p>
+          </p:txBody>
+        </p:sp>
+        <p:sp>
+          <p:nvSpPr>
+            <p:cNvPr id="63" name="TextBox 62"/>
+            <p:cNvSpPr txBox="1"/>
+            <p:nvPr/>
+          </p:nvSpPr>
+          <p:spPr>
+            <a:xfrm>
+              <a:off x="6642910" y="5701772"/>
+              <a:ext cx="1500823" cy="132276"/>
+            </a:xfrm>
+            <a:prstGeom prst="rect">
+              <a:avLst/>
+            </a:prstGeom>
+            <a:noFill/>
+          </p:spPr>
+          <p:txBody>
+            <a:bodyPr wrap="none" lIns="0" rIns="0" tIns="0" bIns="0" anchor="t">
+              <a:noAutofit/>
+            </a:bodyPr>
+            <a:lstStyle/>
+            <a:p>
+              <a:pPr algn="ctr">
+                <a:lnSpc>
+                  <a:spcPct val="100000"/>
+                </a:lnSpc>
+              </a:pPr>
+              <a:r>
+                <a:rPr sz="801" b="0" lang="ko-KR">
+                  <a:solidFill>
+                    <a:srgbClr val="545B64"/>
+                  </a:solidFill>
+                  <a:latin typeface="Arial"/>
+                  <a:ea typeface="Malgun Gothic"/>
+                  <a:cs typeface="Malgun Gothic"/>
+                </a:rPr>
+                <a:t>Gi1 .40 · prepend ×3</a:t>
+              </a:r>
+            </a:p>
+          </p:txBody>
+        </p:sp>
+        <p:pic>
+          <p:nvPicPr>
+            <p:cNvPr id="64" name="Amazon-VPC_Elastic-Network-Interface" descr="Amazon VPC_Elastic Network Interface"/>
             <p:cNvPicPr>
               <a:picLocks noChangeAspect="1"/>
             </p:cNvPicPr>
@@ -4557,8 +5266,8 @@
           </p:blipFill>
           <p:spPr>
             <a:xfrm>
-              <a:off x="7299547" y="2391144"/>
-              <a:ext cx="177209" cy="177209"/>
+              <a:off x="8631289" y="5103139"/>
+              <a:ext cx="407003" cy="407003"/>
             </a:xfrm>
             <a:prstGeom prst="rect">
               <a:avLst/>
@@ -4567,14 +5276,14 @@
         </p:pic>
         <p:sp>
           <p:nvSpPr>
-            <p:cNvPr id="45" name="TextBox 44"/>
+            <p:cNvPr id="65" name="TextBox 64"/>
             <p:cNvSpPr txBox="1"/>
             <p:nvPr/>
           </p:nvSpPr>
           <p:spPr>
             <a:xfrm>
-              <a:off x="7535826" y="2425848"/>
-              <a:ext cx="1027260" cy="134384"/>
+              <a:off x="8285761" y="5549994"/>
+              <a:ext cx="1098060" cy="154322"/>
             </a:xfrm>
             <a:prstGeom prst="rect">
               <a:avLst/>
@@ -4587,69 +5296,79 @@
             </a:bodyPr>
             <a:lstStyle/>
             <a:p>
-              <a:pPr algn="l">
+              <a:pPr algn="ctr">
                 <a:lnSpc>
                   <a:spcPct val="100000"/>
                 </a:lnSpc>
               </a:pPr>
               <a:r>
-                <a:rPr sz="813" b="1" lang="ko-KR">
+                <a:rPr sz="934" b="0" lang="ko-KR">
                   <a:solidFill>
-                    <a:srgbClr val="00A4A6"/>
+                    <a:srgbClr val="232F3E"/>
                   </a:solidFill>
                   <a:latin typeface="Arial"/>
                   <a:ea typeface="Malgun Gothic"/>
                   <a:cs typeface="Malgun Gothic"/>
                 </a:rPr>
-                <a:t>Router subnet</a:t>
+                <a:t>C8000V-2 Gi2</a:t>
               </a:r>
             </a:p>
           </p:txBody>
         </p:sp>
         <p:sp>
           <p:nvSpPr>
-            <p:cNvPr id="46" name="Rectangle 45"/>
-            <p:cNvSpPr/>
-            <p:nvPr/>
-          </p:nvSpPr>
-          <p:spPr>
-            <a:xfrm>
-              <a:off x="9145477" y="2391144"/>
-              <a:ext cx="2008372" cy="1033721"/>
-            </a:xfrm>
-            <a:prstGeom prst="rect">
-              <a:avLst/>
-            </a:prstGeom>
-            <a:noFill/>
-            <a:ln w="11076">
-              <a:solidFill>
-                <a:srgbClr val="00A4A6"/>
-              </a:solidFill>
-              <a:prstDash val="solid"/>
-              <a:miter lim="800000"/>
-            </a:ln>
-          </p:spPr>
-          <p:txBody>
-            <a:bodyPr rtlCol="0" anchor="ctr"/>
-            <a:lstStyle/>
-            <a:p>
-              <a:pPr algn="ctr"/>
+            <p:cNvPr id="66" name="TextBox 65"/>
+            <p:cNvSpPr txBox="1"/>
+            <p:nvPr/>
+          </p:nvSpPr>
+          <p:spPr>
+            <a:xfrm>
+              <a:off x="8434147" y="5701772"/>
+              <a:ext cx="801287" cy="132276"/>
+            </a:xfrm>
+            <a:prstGeom prst="rect">
+              <a:avLst/>
+            </a:prstGeom>
+            <a:noFill/>
+          </p:spPr>
+          <p:txBody>
+            <a:bodyPr wrap="none" lIns="0" rIns="0" tIns="0" bIns="0" anchor="t">
+              <a:noAutofit/>
+            </a:bodyPr>
+            <a:lstStyle/>
+            <a:p>
+              <a:pPr algn="ctr">
+                <a:lnSpc>
+                  <a:spcPct val="100000"/>
+                </a:lnSpc>
+              </a:pPr>
+              <a:r>
+                <a:rPr sz="801" b="0" lang="ko-KR">
+                  <a:solidFill>
+                    <a:srgbClr val="545B64"/>
+                  </a:solidFill>
+                  <a:latin typeface="Arial"/>
+                  <a:ea typeface="Malgun Gothic"/>
+                  <a:cs typeface="Malgun Gothic"/>
+                </a:rPr>
+                <a:t>10.1.1.100</a:t>
+              </a:r>
             </a:p>
           </p:txBody>
         </p:sp>
         <p:pic>
           <p:nvPicPr>
-            <p:cNvPr id="47" name="Private-subnet_32" descr="Private subnet_32"/>
+            <p:cNvPr id="67" name="Amazon-EC2_Instance" descr="Amazon EC2_Instance"/>
             <p:cNvPicPr>
               <a:picLocks noChangeAspect="1"/>
             </p:cNvPicPr>
             <p:nvPr/>
           </p:nvPicPr>
           <p:blipFill>
-            <a:blip r:embed="rId20">
+            <a:blip r:embed="rId18">
               <a:extLst>
                 <a:ext uri="{96DAC541-7B7A-43D3-8B79-37D633B846F1}">
-                  <asvg:svgBlip xmlns:asvg="http://schemas.microsoft.com/office/drawing/2016/SVG/main" r:embed="rId21"/>
+                  <asvg:svgBlip xmlns:asvg="http://schemas.microsoft.com/office/drawing/2016/SVG/main" r:embed="rId19"/>
                 </a:ext>
               </a:extLst>
             </a:blip>
@@ -4659,8 +5378,8 @@
           </p:blipFill>
           <p:spPr>
             <a:xfrm>
-              <a:off x="9145477" y="2391144"/>
-              <a:ext cx="177209" cy="177209"/>
+              <a:off x="9937091" y="5103139"/>
+              <a:ext cx="407003" cy="407003"/>
             </a:xfrm>
             <a:prstGeom prst="rect">
               <a:avLst/>
@@ -4669,14 +5388,14 @@
         </p:pic>
         <p:sp>
           <p:nvSpPr>
-            <p:cNvPr id="48" name="TextBox 47"/>
+            <p:cNvPr id="68" name="TextBox 67"/>
             <p:cNvSpPr txBox="1"/>
             <p:nvPr/>
           </p:nvSpPr>
           <p:spPr>
             <a:xfrm>
-              <a:off x="9381756" y="2425848"/>
-              <a:ext cx="1169397" cy="134384"/>
+              <a:off x="9613820" y="5549994"/>
+              <a:ext cx="1053544" cy="154322"/>
             </a:xfrm>
             <a:prstGeom prst="rect">
               <a:avLst/>
@@ -4689,68 +5408,35 @@
             </a:bodyPr>
             <a:lstStyle/>
             <a:p>
-              <a:pPr algn="l">
+              <a:pPr algn="ctr">
                 <a:lnSpc>
                   <a:spcPct val="100000"/>
                 </a:lnSpc>
               </a:pPr>
               <a:r>
-                <a:rPr sz="813" b="1" lang="ko-KR">
+                <a:rPr sz="934" b="0" lang="ko-KR">
                   <a:solidFill>
-                    <a:srgbClr val="00A4A6"/>
+                    <a:srgbClr val="232F3E"/>
                   </a:solidFill>
                   <a:latin typeface="Arial"/>
                   <a:ea typeface="Malgun Gothic"/>
                   <a:cs typeface="Malgun Gothic"/>
                 </a:rPr>
-                <a:t>Receiver subnet</a:t>
+                <a:t>EC2-2 리시버</a:t>
               </a:r>
             </a:p>
           </p:txBody>
         </p:sp>
         <p:sp>
           <p:nvSpPr>
-            <p:cNvPr id="49" name="Rectangle 48"/>
-            <p:cNvSpPr/>
-            <p:nvPr/>
-          </p:nvSpPr>
-          <p:spPr>
-            <a:xfrm>
-              <a:off x="5970477" y="4621028"/>
-              <a:ext cx="5331047" cy="1402907"/>
-            </a:xfrm>
-            <a:prstGeom prst="rect">
-              <a:avLst/>
-            </a:prstGeom>
-            <a:noFill/>
-            <a:ln w="11076">
-              <a:solidFill>
-                <a:srgbClr val="00A4A6"/>
-              </a:solidFill>
-              <a:custDash>
-                <a:ds d="533333" sp="266667"/>
-              </a:custDash>
-              <a:miter lim="800000"/>
-            </a:ln>
-          </p:spPr>
-          <p:txBody>
-            <a:bodyPr rtlCol="0" anchor="ctr"/>
-            <a:lstStyle/>
-            <a:p>
-              <a:pPr algn="ctr"/>
-            </a:p>
-          </p:txBody>
-        </p:sp>
-        <p:sp>
-          <p:nvSpPr>
-            <p:cNvPr id="50" name="TextBox 49"/>
+            <p:cNvPr id="69" name="TextBox 68"/>
             <p:cNvSpPr txBox="1"/>
             <p:nvPr/>
           </p:nvSpPr>
           <p:spPr>
             <a:xfrm>
-              <a:off x="6029547" y="4655731"/>
-              <a:ext cx="1595807" cy="134384"/>
+              <a:off x="9739948" y="5701772"/>
+              <a:ext cx="801287" cy="132276"/>
             </a:xfrm>
             <a:prstGeom prst="rect">
               <a:avLst/>
@@ -4763,46 +5449,67 @@
             </a:bodyPr>
             <a:lstStyle/>
             <a:p>
-              <a:pPr algn="l">
+              <a:pPr algn="ctr">
                 <a:lnSpc>
                   <a:spcPct val="100000"/>
                 </a:lnSpc>
               </a:pPr>
               <a:r>
-                <a:rPr sz="813" b="1" lang="ko-KR">
+                <a:rPr sz="801" b="0" lang="ko-KR">
                   <a:solidFill>
-                    <a:srgbClr val="00A4A6"/>
+                    <a:srgbClr val="545B64"/>
                   </a:solidFill>
                   <a:latin typeface="Arial"/>
                   <a:ea typeface="Malgun Gothic"/>
                   <a:cs typeface="Malgun Gothic"/>
                 </a:rPr>
-                <a:t>AZ2 · ap-northeast-2c</a:t>
+                <a:t>10.1.1.116</a:t>
               </a:r>
             </a:p>
           </p:txBody>
         </p:sp>
         <p:sp>
           <p:nvSpPr>
-            <p:cNvPr id="51" name="Rectangle 50"/>
+            <p:cNvPr id="70" name="Freeform 69"/>
             <p:cNvSpPr/>
             <p:nvPr/>
           </p:nvSpPr>
           <p:spPr>
             <a:xfrm>
-              <a:off x="6073849" y="4886842"/>
-              <a:ext cx="1107558" cy="1033721"/>
-            </a:xfrm>
-            <a:prstGeom prst="rect">
-              <a:avLst/>
-            </a:prstGeom>
-            <a:noFill/>
-            <a:ln w="11076">
+              <a:off x="3984672" y="2678080"/>
+              <a:ext cx="1170134" cy="1119258"/>
+            </a:xfrm>
+            <a:custGeom>
+              <a:avLst/>
+              <a:gdLst/>
+              <a:ahLst/>
+              <a:cxnLst/>
+              <a:rect l="l" t="t" r="r" b="b"/>
+              <a:pathLst>
+                <a:path w="1170134" h="1119258">
+                  <a:moveTo>
+                    <a:pt x="0" y="1119258"/>
+                  </a:moveTo>
+                  <a:lnTo>
+                    <a:pt x="356128" y="1119258"/>
+                  </a:lnTo>
+                  <a:lnTo>
+                    <a:pt x="356128" y="0"/>
+                  </a:lnTo>
+                  <a:lnTo>
+                    <a:pt x="1170134" y="0"/>
+                  </a:lnTo>
+                </a:path>
+              </a:pathLst>
+            </a:custGeom>
+            <a:noFill/>
+            <a:ln w="12719">
               <a:solidFill>
-                <a:srgbClr val="00A4A6"/>
+                <a:srgbClr val="232F3E"/>
               </a:solidFill>
               <a:prstDash val="solid"/>
               <a:miter lim="800000"/>
+              <a:tailEnd type="triangle" w="med" len="med"/>
             </a:ln>
           </p:spPr>
           <p:txBody>
@@ -4813,46 +5520,91 @@
             </a:p>
           </p:txBody>
         </p:sp>
-        <p:pic>
-          <p:nvPicPr>
-            <p:cNvPr id="52" name="Private-subnet_32" descr="Private subnet_32"/>
-            <p:cNvPicPr>
-              <a:picLocks noChangeAspect="1"/>
-            </p:cNvPicPr>
-            <p:nvPr/>
-          </p:nvPicPr>
-          <p:blipFill>
-            <a:blip r:embed="rId20">
-              <a:extLst>
-                <a:ext uri="{96DAC541-7B7A-43D3-8B79-37D633B846F1}">
-                  <asvg:svgBlip xmlns:asvg="http://schemas.microsoft.com/office/drawing/2016/SVG/main" r:embed="rId21"/>
-                </a:ext>
-              </a:extLst>
-            </a:blip>
-            <a:stretch>
-              <a:fillRect/>
-            </a:stretch>
-          </p:blipFill>
-          <p:spPr>
-            <a:xfrm>
-              <a:off x="6073849" y="4886842"/>
-              <a:ext cx="177209" cy="177209"/>
-            </a:xfrm>
-            <a:prstGeom prst="rect">
-              <a:avLst/>
-            </a:prstGeom>
-          </p:spPr>
-        </p:pic>
-        <p:sp>
-          <p:nvSpPr>
-            <p:cNvPr id="53" name="TextBox 52"/>
+        <p:sp>
+          <p:nvSpPr>
+            <p:cNvPr id="71" name="Freeform 70"/>
+            <p:cNvSpPr/>
+            <p:nvPr/>
+          </p:nvSpPr>
+          <p:spPr>
+            <a:xfrm>
+              <a:off x="4340800" y="3797338"/>
+              <a:ext cx="814006" cy="1509302"/>
+            </a:xfrm>
+            <a:custGeom>
+              <a:avLst/>
+              <a:gdLst/>
+              <a:ahLst/>
+              <a:cxnLst/>
+              <a:rect l="l" t="t" r="r" b="b"/>
+              <a:pathLst>
+                <a:path w="814006" h="1509302">
+                  <a:moveTo>
+                    <a:pt x="0" y="0"/>
+                  </a:moveTo>
+                  <a:lnTo>
+                    <a:pt x="0" y="1509302"/>
+                  </a:lnTo>
+                  <a:lnTo>
+                    <a:pt x="814006" y="1509302"/>
+                  </a:lnTo>
+                </a:path>
+              </a:pathLst>
+            </a:custGeom>
+            <a:noFill/>
+            <a:ln w="12719">
+              <a:solidFill>
+                <a:srgbClr val="232F3E"/>
+              </a:solidFill>
+              <a:custDash>
+                <a:ds d="400000" sp="266667"/>
+              </a:custDash>
+              <a:miter lim="800000"/>
+              <a:tailEnd type="triangle" w="med" len="med"/>
+            </a:ln>
+          </p:spPr>
+          <p:txBody>
+            <a:bodyPr rtlCol="0" anchor="ctr"/>
+            <a:lstStyle/>
+            <a:p>
+              <a:pPr algn="ctr"/>
+            </a:p>
+          </p:txBody>
+        </p:sp>
+        <p:cxnSp>
+          <p:nvCxnSpPr>
+            <p:cNvPr id="72" name="Connector 71"/>
+            <p:cNvCxnSpPr/>
+            <p:nvPr/>
+          </p:nvCxnSpPr>
+          <p:spPr>
+            <a:xfrm>
+              <a:off x="5646601" y="2678080"/>
+              <a:ext cx="1492344" cy="0"/>
+            </a:xfrm>
+            <a:prstGeom prst="line">
+              <a:avLst/>
+            </a:prstGeom>
+            <a:ln w="12719">
+              <a:solidFill>
+                <a:srgbClr val="232F3E"/>
+              </a:solidFill>
+              <a:prstDash val="solid"/>
+              <a:miter lim="800000"/>
+              <a:tailEnd type="triangle" w="med" len="med"/>
+            </a:ln>
+          </p:spPr>
+        </p:cxnSp>
+        <p:sp>
+          <p:nvSpPr>
+            <p:cNvPr id="73" name="TextBox 72"/>
             <p:cNvSpPr txBox="1"/>
             <p:nvPr/>
           </p:nvSpPr>
           <p:spPr>
             <a:xfrm>
-              <a:off x="6310128" y="4921545"/>
-              <a:ext cx="814055" cy="134384"/>
+              <a:off x="5694297" y="2513582"/>
+              <a:ext cx="311612" cy="132276"/>
             </a:xfrm>
             <a:prstGeom prst="rect">
               <a:avLst/>
@@ -4865,96 +5617,61 @@
             </a:bodyPr>
             <a:lstStyle/>
             <a:p>
-              <a:pPr algn="l">
+              <a:pPr algn="ctr">
                 <a:lnSpc>
                   <a:spcPct val="100000"/>
                 </a:lnSpc>
               </a:pPr>
               <a:r>
-                <a:rPr sz="813" b="1" lang="ko-KR">
+                <a:rPr sz="801" b="0" lang="ko-KR">
                   <a:solidFill>
-                    <a:srgbClr val="00A4A6"/>
+                    <a:srgbClr val="232F3E"/>
                   </a:solidFill>
                   <a:latin typeface="Arial"/>
                   <a:ea typeface="Malgun Gothic"/>
                   <a:cs typeface="Malgun Gothic"/>
                 </a:rPr>
-                <a:t>TGW subnet</a:t>
+                <a:t>GRE</a:t>
               </a:r>
             </a:p>
           </p:txBody>
         </p:sp>
-        <p:sp>
-          <p:nvSpPr>
-            <p:cNvPr id="54" name="Rectangle 53"/>
-            <p:cNvSpPr/>
-            <p:nvPr/>
-          </p:nvSpPr>
-          <p:spPr>
-            <a:xfrm>
-              <a:off x="7299547" y="4886842"/>
-              <a:ext cx="1668721" cy="1033721"/>
-            </a:xfrm>
-            <a:prstGeom prst="rect">
-              <a:avLst/>
-            </a:prstGeom>
-            <a:noFill/>
-            <a:ln w="11076">
+        <p:cxnSp>
+          <p:nvCxnSpPr>
+            <p:cNvPr id="74" name="Connector 73"/>
+            <p:cNvCxnSpPr/>
+            <p:nvPr/>
+          </p:nvCxnSpPr>
+          <p:spPr>
+            <a:xfrm>
+              <a:off x="5646601" y="5306640"/>
+              <a:ext cx="1492344" cy="0"/>
+            </a:xfrm>
+            <a:prstGeom prst="line">
+              <a:avLst/>
+            </a:prstGeom>
+            <a:ln w="12719">
               <a:solidFill>
-                <a:srgbClr val="00A4A6"/>
+                <a:srgbClr val="232F3E"/>
               </a:solidFill>
-              <a:prstDash val="solid"/>
+              <a:custDash>
+                <a:ds d="400000" sp="266667"/>
+              </a:custDash>
               <a:miter lim="800000"/>
+              <a:tailEnd type="triangle" w="med" len="med"/>
             </a:ln>
           </p:spPr>
-          <p:txBody>
-            <a:bodyPr rtlCol="0" anchor="ctr"/>
-            <a:lstStyle/>
-            <a:p>
-              <a:pPr algn="ctr"/>
-            </a:p>
-          </p:txBody>
-        </p:sp>
-        <p:pic>
-          <p:nvPicPr>
-            <p:cNvPr id="55" name="Private-subnet_32" descr="Private subnet_32"/>
-            <p:cNvPicPr>
-              <a:picLocks noChangeAspect="1"/>
-            </p:cNvPicPr>
-            <p:nvPr/>
-          </p:nvPicPr>
-          <p:blipFill>
-            <a:blip r:embed="rId20">
-              <a:extLst>
-                <a:ext uri="{96DAC541-7B7A-43D3-8B79-37D633B846F1}">
-                  <asvg:svgBlip xmlns:asvg="http://schemas.microsoft.com/office/drawing/2016/SVG/main" r:embed="rId21"/>
-                </a:ext>
-              </a:extLst>
-            </a:blip>
-            <a:stretch>
-              <a:fillRect/>
-            </a:stretch>
-          </p:blipFill>
-          <p:spPr>
-            <a:xfrm>
-              <a:off x="7299547" y="4886842"/>
-              <a:ext cx="177209" cy="177209"/>
-            </a:xfrm>
-            <a:prstGeom prst="rect">
-              <a:avLst/>
-            </a:prstGeom>
-          </p:spPr>
-        </p:pic>
-        <p:sp>
-          <p:nvSpPr>
-            <p:cNvPr id="56" name="TextBox 55"/>
+        </p:cxnSp>
+        <p:sp>
+          <p:nvSpPr>
+            <p:cNvPr id="75" name="TextBox 74"/>
             <p:cNvSpPr txBox="1"/>
             <p:nvPr/>
           </p:nvSpPr>
           <p:spPr>
             <a:xfrm>
-              <a:off x="7535826" y="4921545"/>
-              <a:ext cx="1027260" cy="134384"/>
+              <a:off x="6294202" y="5142143"/>
+              <a:ext cx="807647" cy="132276"/>
             </a:xfrm>
             <a:prstGeom prst="rect">
               <a:avLst/>
@@ -4967,48 +5684,140 @@
             </a:bodyPr>
             <a:lstStyle/>
             <a:p>
-              <a:pPr algn="l">
+              <a:pPr algn="ctr">
                 <a:lnSpc>
                   <a:spcPct val="100000"/>
                 </a:lnSpc>
               </a:pPr>
               <a:r>
-                <a:rPr sz="813" b="1" lang="ko-KR">
+                <a:rPr sz="801" b="0" lang="ko-KR">
                   <a:solidFill>
-                    <a:srgbClr val="00A4A6"/>
+                    <a:srgbClr val="232F3E"/>
                   </a:solidFill>
                   <a:latin typeface="Arial"/>
                   <a:ea typeface="Malgun Gothic"/>
                   <a:cs typeface="Malgun Gothic"/>
                 </a:rPr>
-                <a:t>Router subnet</a:t>
+                <a:t>페일오버 시</a:t>
               </a:r>
             </a:p>
           </p:txBody>
         </p:sp>
-        <p:sp>
-          <p:nvSpPr>
-            <p:cNvPr id="57" name="Rectangle 56"/>
-            <p:cNvSpPr/>
-            <p:nvPr/>
-          </p:nvSpPr>
-          <p:spPr>
-            <a:xfrm>
-              <a:off x="9145477" y="4886842"/>
-              <a:ext cx="2008372" cy="1033721"/>
-            </a:xfrm>
-            <a:prstGeom prst="rect">
-              <a:avLst/>
-            </a:prstGeom>
-            <a:noFill/>
-            <a:ln w="11076">
+        <p:cxnSp>
+          <p:nvCxnSpPr>
+            <p:cNvPr id="76" name="Connector 75"/>
+            <p:cNvCxnSpPr/>
+            <p:nvPr/>
+          </p:nvCxnSpPr>
+          <p:spPr>
+            <a:xfrm>
+              <a:off x="7630740" y="2678080"/>
+              <a:ext cx="949674" cy="0"/>
+            </a:xfrm>
+            <a:prstGeom prst="line">
+              <a:avLst/>
+            </a:prstGeom>
+            <a:ln w="12719">
               <a:solidFill>
-                <a:srgbClr val="00A4A6"/>
+                <a:srgbClr val="232F3E"/>
               </a:solidFill>
               <a:prstDash val="solid"/>
               <a:miter lim="800000"/>
+              <a:tailEnd type="triangle" w="med" len="med"/>
             </a:ln>
           </p:spPr>
+        </p:cxnSp>
+        <p:cxnSp>
+          <p:nvCxnSpPr>
+            <p:cNvPr id="77" name="Connector 76"/>
+            <p:cNvCxnSpPr/>
+            <p:nvPr/>
+          </p:nvCxnSpPr>
+          <p:spPr>
+            <a:xfrm>
+              <a:off x="7630740" y="5306640"/>
+              <a:ext cx="949674" cy="0"/>
+            </a:xfrm>
+            <a:prstGeom prst="line">
+              <a:avLst/>
+            </a:prstGeom>
+            <a:ln w="12719">
+              <a:solidFill>
+                <a:srgbClr val="232F3E"/>
+              </a:solidFill>
+              <a:custDash>
+                <a:ds d="400000" sp="266667"/>
+              </a:custDash>
+              <a:miter lim="800000"/>
+              <a:tailEnd type="triangle" w="med" len="med"/>
+            </a:ln>
+          </p:spPr>
+        </p:cxnSp>
+        <p:cxnSp>
+          <p:nvCxnSpPr>
+            <p:cNvPr id="78" name="Connector 77"/>
+            <p:cNvCxnSpPr/>
+            <p:nvPr/>
+          </p:nvCxnSpPr>
+          <p:spPr>
+            <a:xfrm>
+              <a:off x="9072209" y="2678080"/>
+              <a:ext cx="814006" cy="0"/>
+            </a:xfrm>
+            <a:prstGeom prst="line">
+              <a:avLst/>
+            </a:prstGeom>
+            <a:ln w="12719">
+              <a:solidFill>
+                <a:srgbClr val="232F3E"/>
+              </a:solidFill>
+              <a:prstDash val="solid"/>
+              <a:miter lim="800000"/>
+              <a:tailEnd type="triangle" w="med" len="med"/>
+            </a:ln>
+          </p:spPr>
+        </p:cxnSp>
+        <p:sp>
+          <p:nvSpPr>
+            <p:cNvPr id="79" name="Freeform 78"/>
+            <p:cNvSpPr/>
+            <p:nvPr/>
+          </p:nvSpPr>
+          <p:spPr>
+            <a:xfrm>
+              <a:off x="9580963" y="2678080"/>
+              <a:ext cx="305252" cy="2628560"/>
+            </a:xfrm>
+            <a:custGeom>
+              <a:avLst/>
+              <a:gdLst/>
+              <a:ahLst/>
+              <a:cxnLst/>
+              <a:rect l="l" t="t" r="r" b="b"/>
+              <a:pathLst>
+                <a:path w="305252" h="2628560">
+                  <a:moveTo>
+                    <a:pt x="0" y="0"/>
+                  </a:moveTo>
+                  <a:lnTo>
+                    <a:pt x="0" y="2628560"/>
+                  </a:lnTo>
+                  <a:lnTo>
+                    <a:pt x="305252" y="2628560"/>
+                  </a:lnTo>
+                </a:path>
+              </a:pathLst>
+            </a:custGeom>
+            <a:noFill/>
+            <a:ln w="12719">
+              <a:solidFill>
+                <a:srgbClr val="232F3E"/>
+              </a:solidFill>
+              <a:prstDash val="solid"/>
+              <a:miter lim="800000"/>
+              <a:tailEnd type="triangle" w="med" len="med"/>
+            </a:ln>
+          </p:spPr>
           <p:txBody>
             <a:bodyPr rtlCol="0" anchor="ctr"/>
             <a:lstStyle/>
@@ -5017,46 +5826,16 @@
             </a:p>
           </p:txBody>
         </p:sp>
-        <p:pic>
-          <p:nvPicPr>
-            <p:cNvPr id="58" name="Private-subnet_32" descr="Private subnet_32"/>
-            <p:cNvPicPr>
-              <a:picLocks noChangeAspect="1"/>
-            </p:cNvPicPr>
-            <p:nvPr/>
-          </p:nvPicPr>
-          <p:blipFill>
-            <a:blip r:embed="rId20">
-              <a:extLst>
-                <a:ext uri="{96DAC541-7B7A-43D3-8B79-37D633B846F1}">
-                  <asvg:svgBlip xmlns:asvg="http://schemas.microsoft.com/office/drawing/2016/SVG/main" r:embed="rId21"/>
-                </a:ext>
-              </a:extLst>
-            </a:blip>
-            <a:stretch>
-              <a:fillRect/>
-            </a:stretch>
-          </p:blipFill>
-          <p:spPr>
-            <a:xfrm>
-              <a:off x="9145477" y="4886842"/>
-              <a:ext cx="177209" cy="177209"/>
-            </a:xfrm>
-            <a:prstGeom prst="rect">
-              <a:avLst/>
-            </a:prstGeom>
-          </p:spPr>
-        </p:pic>
-        <p:sp>
-          <p:nvSpPr>
-            <p:cNvPr id="59" name="TextBox 58"/>
+        <p:sp>
+          <p:nvSpPr>
+            <p:cNvPr id="80" name="TextBox 79"/>
             <p:cNvSpPr txBox="1"/>
             <p:nvPr/>
           </p:nvSpPr>
           <p:spPr>
             <a:xfrm>
-              <a:off x="9381756" y="4921545"/>
-              <a:ext cx="1169397" cy="134384"/>
+              <a:off x="9220596" y="2513582"/>
+              <a:ext cx="635942" cy="132276"/>
             </a:xfrm>
             <a:prstGeom prst="rect">
               <a:avLst/>
@@ -5069,132 +5848,28 @@
             </a:bodyPr>
             <a:lstStyle/>
             <a:p>
-              <a:pPr algn="l">
+              <a:pPr algn="ctr">
                 <a:lnSpc>
                   <a:spcPct val="100000"/>
                 </a:lnSpc>
               </a:pPr>
               <a:r>
-                <a:rPr sz="813" b="1" lang="ko-KR">
+                <a:rPr sz="801" b="0" lang="ko-KR">
                   <a:solidFill>
-                    <a:srgbClr val="00A4A6"/>
+                    <a:srgbClr val="232F3E"/>
                   </a:solidFill>
                   <a:latin typeface="Arial"/>
                   <a:ea typeface="Malgun Gothic"/>
                   <a:cs typeface="Malgun Gothic"/>
                 </a:rPr>
-                <a:t>Receiver subnet</a:t>
+                <a:t>TGW 복제</a:t>
               </a:r>
-            </a:p>
-          </p:txBody>
-        </p:sp>
-        <p:sp>
-          <p:nvSpPr>
-            <p:cNvPr id="60" name="Rectangle 59"/>
-            <p:cNvSpPr/>
-            <p:nvPr/>
-          </p:nvSpPr>
-          <p:spPr>
-            <a:xfrm>
-              <a:off x="9071640" y="2169633"/>
-              <a:ext cx="2156047" cy="3810000"/>
-            </a:xfrm>
-            <a:prstGeom prst="rect">
-              <a:avLst/>
-            </a:prstGeom>
-            <a:noFill/>
-            <a:ln w="11076">
-              <a:solidFill>
-                <a:srgbClr val="7D8998"/>
-              </a:solidFill>
-              <a:custDash>
-                <a:ds d="400000" sp="266667"/>
-              </a:custDash>
-              <a:miter lim="800000"/>
-            </a:ln>
-          </p:spPr>
-          <p:txBody>
-            <a:bodyPr rtlCol="0" anchor="ctr"/>
-            <a:lstStyle/>
-            <a:p>
-              <a:pPr algn="ctr"/>
             </a:p>
           </p:txBody>
         </p:sp>
         <p:pic>
           <p:nvPicPr>
-            <p:cNvPr id="61" name="AWS-Transit-Gateway" descr="AWS Transit Gateway"/>
-            <p:cNvPicPr>
-              <a:picLocks noChangeAspect="1"/>
-            </p:cNvPicPr>
-            <p:nvPr/>
-          </p:nvPicPr>
-          <p:blipFill>
-            <a:blip r:embed="rId16">
-              <a:extLst>
-                <a:ext uri="{96DAC541-7B7A-43D3-8B79-37D633B846F1}">
-                  <asvg:svgBlip xmlns:asvg="http://schemas.microsoft.com/office/drawing/2016/SVG/main" r:embed="rId17"/>
-                </a:ext>
-              </a:extLst>
-            </a:blip>
-            <a:stretch>
-              <a:fillRect/>
-            </a:stretch>
-          </p:blipFill>
-          <p:spPr>
-            <a:xfrm>
-              <a:off x="9071640" y="2169633"/>
-              <a:ext cx="147674" cy="147674"/>
-            </a:xfrm>
-            <a:prstGeom prst="rect">
-              <a:avLst/>
-            </a:prstGeom>
-          </p:spPr>
-        </p:pic>
-        <p:sp>
-          <p:nvSpPr>
-            <p:cNvPr id="62" name="TextBox 61"/>
-            <p:cNvSpPr txBox="1"/>
-            <p:nvPr/>
-          </p:nvSpPr>
-          <p:spPr>
-            <a:xfrm>
-              <a:off x="9278384" y="2204336"/>
-              <a:ext cx="2132049" cy="134384"/>
-            </a:xfrm>
-            <a:prstGeom prst="rect">
-              <a:avLst/>
-            </a:prstGeom>
-            <a:noFill/>
-          </p:spPr>
-          <p:txBody>
-            <a:bodyPr wrap="none" lIns="0" rIns="0" tIns="0" bIns="0" anchor="t">
-              <a:noAutofit/>
-            </a:bodyPr>
-            <a:lstStyle/>
-            <a:p>
-              <a:pPr algn="l">
-                <a:lnSpc>
-                  <a:spcPct val="100000"/>
-                </a:lnSpc>
-              </a:pPr>
-              <a:r>
-                <a:rPr sz="813" b="1" lang="ko-KR">
-                  <a:solidFill>
-                    <a:srgbClr val="7D8998"/>
-                  </a:solidFill>
-                  <a:latin typeface="Arial"/>
-                  <a:ea typeface="Malgun Gothic"/>
-                  <a:cs typeface="Malgun Gothic"/>
-                </a:rPr>
-                <a:t>TGW 멀티캐스트 도메인 · IGMPv2</a:t>
-              </a:r>
-            </a:p>
-          </p:txBody>
-        </p:sp>
-        <p:pic>
-          <p:nvPicPr>
-            <p:cNvPr id="63" name="AWS-Transit-Gateway_Attachment" descr="AWS Transit Gateway_Attachment"/>
+            <p:cNvPr id="81" name="Amazon-VPC_Router" descr="Amazon VPC_Router"/>
             <p:cNvPicPr>
               <a:picLocks noChangeAspect="1"/>
             </p:cNvPicPr>
@@ -5214,8 +5889,8 @@
           </p:blipFill>
           <p:spPr>
             <a:xfrm>
-              <a:off x="6450419" y="2642191"/>
-              <a:ext cx="354419" cy="354419"/>
+              <a:off x="7189820" y="3593836"/>
+              <a:ext cx="407003" cy="407003"/>
             </a:xfrm>
             <a:prstGeom prst="rect">
               <a:avLst/>
@@ -5224,14 +5899,14 @@
         </p:pic>
         <p:sp>
           <p:nvSpPr>
-            <p:cNvPr id="64" name="TextBox 63"/>
+            <p:cNvPr id="82" name="TextBox 81"/>
             <p:cNvSpPr txBox="1"/>
             <p:nvPr/>
           </p:nvSpPr>
           <p:spPr>
             <a:xfrm>
-              <a:off x="6078464" y="3031313"/>
-              <a:ext cx="1098328" cy="134384"/>
+              <a:off x="6681067" y="4040692"/>
+              <a:ext cx="1424510" cy="154322"/>
             </a:xfrm>
             <a:prstGeom prst="rect">
               <a:avLst/>
@@ -5250,7 +5925,7 @@
                 </a:lnSpc>
               </a:pPr>
               <a:r>
-                <a:rPr sz="813" b="0" lang="ko-KR">
+                <a:rPr sz="934" b="0" lang="ko-KR">
                   <a:solidFill>
                     <a:srgbClr val="232F3E"/>
                   </a:solidFill>
@@ -5258,14 +5933,187 @@
                   <a:ea typeface="Malgun Gothic"/>
                   <a:cs typeface="Malgun Gothic"/>
                 </a:rPr>
-                <a:t>TGW attachment</a:t>
+                <a:t>VPC Route Server</a:t>
+              </a:r>
+            </a:p>
+          </p:txBody>
+        </p:sp>
+        <p:sp>
+          <p:nvSpPr>
+            <p:cNvPr id="83" name="TextBox 82"/>
+            <p:cNvSpPr txBox="1"/>
+            <p:nvPr/>
+          </p:nvSpPr>
+          <p:spPr>
+            <a:xfrm>
+              <a:off x="7062632" y="4192470"/>
+              <a:ext cx="661380" cy="132276"/>
+            </a:xfrm>
+            <a:prstGeom prst="rect">
+              <a:avLst/>
+            </a:prstGeom>
+            <a:noFill/>
+          </p:spPr>
+          <p:txBody>
+            <a:bodyPr wrap="none" lIns="0" rIns="0" tIns="0" bIns="0" anchor="t">
+              <a:noAutofit/>
+            </a:bodyPr>
+            <a:lstStyle/>
+            <a:p>
+              <a:pPr algn="ctr">
+                <a:lnSpc>
+                  <a:spcPct val="100000"/>
+                </a:lnSpc>
+              </a:pPr>
+              <a:r>
+                <a:rPr sz="801" b="0" lang="ko-KR">
+                  <a:solidFill>
+                    <a:srgbClr val="545B64"/>
+                  </a:solidFill>
+                  <a:latin typeface="Arial"/>
+                  <a:ea typeface="Malgun Gothic"/>
+                  <a:cs typeface="Malgun Gothic"/>
+                </a:rPr>
+                <a:t>AS 65100</a:t>
+              </a:r>
+            </a:p>
+          </p:txBody>
+        </p:sp>
+        <p:cxnSp>
+          <p:nvCxnSpPr>
+            <p:cNvPr id="84" name="Connector 83"/>
+            <p:cNvCxnSpPr/>
+            <p:nvPr/>
+          </p:nvCxnSpPr>
+          <p:spPr>
+            <a:xfrm>
+              <a:off x="7393322" y="3220750"/>
+              <a:ext cx="0" cy="339169"/>
+            </a:xfrm>
+            <a:prstGeom prst="line">
+              <a:avLst/>
+            </a:prstGeom>
+            <a:ln w="12719">
+              <a:solidFill>
+                <a:srgbClr val="232F3E"/>
+              </a:solidFill>
+              <a:custDash>
+                <a:ds d="400000" sp="266667"/>
+              </a:custDash>
+              <a:miter lim="800000"/>
+            </a:ln>
+          </p:spPr>
+        </p:cxnSp>
+        <p:sp>
+          <p:nvSpPr>
+            <p:cNvPr id="85" name="TextBox 84"/>
+            <p:cNvSpPr txBox="1"/>
+            <p:nvPr/>
+          </p:nvSpPr>
+          <p:spPr>
+            <a:xfrm>
+              <a:off x="7461156" y="3429339"/>
+              <a:ext cx="591426" cy="132276"/>
+            </a:xfrm>
+            <a:prstGeom prst="rect">
+              <a:avLst/>
+            </a:prstGeom>
+            <a:noFill/>
+          </p:spPr>
+          <p:txBody>
+            <a:bodyPr wrap="none" lIns="0" rIns="0" tIns="0" bIns="0" anchor="t">
+              <a:noAutofit/>
+            </a:bodyPr>
+            <a:lstStyle/>
+            <a:p>
+              <a:pPr algn="l">
+                <a:lnSpc>
+                  <a:spcPct val="100000"/>
+                </a:lnSpc>
+              </a:pPr>
+              <a:r>
+                <a:rPr sz="801" b="0" lang="ko-KR">
+                  <a:solidFill>
+                    <a:srgbClr val="232F3E"/>
+                  </a:solidFill>
+                  <a:latin typeface="Arial"/>
+                  <a:ea typeface="Malgun Gothic"/>
+                  <a:cs typeface="Malgun Gothic"/>
+                </a:rPr>
+                <a:t>BGP·BFD</a:t>
+              </a:r>
+            </a:p>
+          </p:txBody>
+        </p:sp>
+        <p:cxnSp>
+          <p:nvCxnSpPr>
+            <p:cNvPr id="86" name="Connector 85"/>
+            <p:cNvCxnSpPr/>
+            <p:nvPr/>
+          </p:nvCxnSpPr>
+          <p:spPr>
+            <a:xfrm>
+              <a:off x="7393322" y="4340008"/>
+              <a:ext cx="0" cy="729214"/>
+            </a:xfrm>
+            <a:prstGeom prst="line">
+              <a:avLst/>
+            </a:prstGeom>
+            <a:ln w="12719">
+              <a:solidFill>
+                <a:srgbClr val="232F3E"/>
+              </a:solidFill>
+              <a:custDash>
+                <a:ds d="400000" sp="266667"/>
+              </a:custDash>
+              <a:miter lim="800000"/>
+            </a:ln>
+          </p:spPr>
+        </p:cxnSp>
+        <p:sp>
+          <p:nvSpPr>
+            <p:cNvPr id="87" name="TextBox 86"/>
+            <p:cNvSpPr txBox="1"/>
+            <p:nvPr/>
+          </p:nvSpPr>
+          <p:spPr>
+            <a:xfrm>
+              <a:off x="7461156" y="4395971"/>
+              <a:ext cx="591426" cy="132276"/>
+            </a:xfrm>
+            <a:prstGeom prst="rect">
+              <a:avLst/>
+            </a:prstGeom>
+            <a:noFill/>
+          </p:spPr>
+          <p:txBody>
+            <a:bodyPr wrap="none" lIns="0" rIns="0" tIns="0" bIns="0" anchor="t">
+              <a:noAutofit/>
+            </a:bodyPr>
+            <a:lstStyle/>
+            <a:p>
+              <a:pPr algn="l">
+                <a:lnSpc>
+                  <a:spcPct val="100000"/>
+                </a:lnSpc>
+              </a:pPr>
+              <a:r>
+                <a:rPr sz="801" b="0" lang="ko-KR">
+                  <a:solidFill>
+                    <a:srgbClr val="232F3E"/>
+                  </a:solidFill>
+                  <a:latin typeface="Arial"/>
+                  <a:ea typeface="Malgun Gothic"/>
+                  <a:cs typeface="Malgun Gothic"/>
+                </a:rPr>
+                <a:t>BGP·BFD</a:t>
               </a:r>
             </a:p>
           </p:txBody>
         </p:sp>
         <p:pic>
           <p:nvPicPr>
-            <p:cNvPr id="65" name="Amazon-EC2_Instance" descr="Amazon EC2_Instance"/>
+            <p:cNvPr id="88" name="Amazon-Route-53_Route-Table" descr="Amazon Route 53_Route Table"/>
             <p:cNvPicPr>
               <a:picLocks noChangeAspect="1"/>
             </p:cNvPicPr>
@@ -5285,8 +6133,8 @@
           </p:blipFill>
           <p:spPr>
             <a:xfrm>
-              <a:off x="8156058" y="2642191"/>
-              <a:ext cx="354419" cy="354419"/>
+              <a:off x="5205681" y="3593836"/>
+              <a:ext cx="407003" cy="407003"/>
             </a:xfrm>
             <a:prstGeom prst="rect">
               <a:avLst/>
@@ -5295,14 +6143,14 @@
         </p:pic>
         <p:sp>
           <p:nvSpPr>
-            <p:cNvPr id="66" name="TextBox 65"/>
+            <p:cNvPr id="89" name="TextBox 88"/>
             <p:cNvSpPr txBox="1"/>
             <p:nvPr/>
           </p:nvSpPr>
           <p:spPr>
             <a:xfrm>
-              <a:off x="7761491" y="3031313"/>
-              <a:ext cx="1143554" cy="134384"/>
+              <a:off x="4452090" y="4040692"/>
+              <a:ext cx="1914186" cy="154322"/>
             </a:xfrm>
             <a:prstGeom prst="rect">
               <a:avLst/>
@@ -5321,7 +6169,7 @@
                 </a:lnSpc>
               </a:pPr>
               <a:r>
-                <a:rPr sz="813" b="0" lang="ko-KR">
+                <a:rPr sz="934" b="0" lang="ko-KR">
                   <a:solidFill>
                     <a:srgbClr val="232F3E"/>
                   </a:solidFill>
@@ -5329,21 +6177,21 @@
                   <a:ea typeface="Malgun Gothic"/>
                   <a:cs typeface="Malgun Gothic"/>
                 </a:rPr>
-                <a:t>C8000V-1 · 활성</a:t>
+                <a:t>tgw-rtb · receiver-rtb</a:t>
               </a:r>
             </a:p>
           </p:txBody>
         </p:sp>
         <p:sp>
           <p:nvSpPr>
-            <p:cNvPr id="67" name="TextBox 66"/>
+            <p:cNvPr id="90" name="TextBox 89"/>
             <p:cNvSpPr txBox="1"/>
             <p:nvPr/>
           </p:nvSpPr>
           <p:spPr>
             <a:xfrm>
-              <a:off x="7751799" y="3163481"/>
-              <a:ext cx="1162936" cy="115186"/>
+              <a:off x="4776420" y="4192470"/>
+              <a:ext cx="1265525" cy="132276"/>
             </a:xfrm>
             <a:prstGeom prst="rect">
               <a:avLst/>
@@ -5362,7 +6210,7 @@
                 </a:lnSpc>
               </a:pPr>
               <a:r>
-                <a:rPr sz="697" b="0" lang="ko-KR">
+                <a:rPr sz="801" b="0" lang="ko-KR">
                   <a:solidFill>
                     <a:srgbClr val="545B64"/>
                   </a:solidFill>
@@ -5370,727 +6218,26 @@
                   <a:ea typeface="Malgun Gothic"/>
                   <a:cs typeface="Malgun Gothic"/>
                 </a:rPr>
-                <a:t>Gi1 .30 · GRE 종단</a:t>
+                <a:t>→ 활성 C8000V Gi1</a:t>
               </a:r>
             </a:p>
           </p:txBody>
         </p:sp>
-        <p:pic>
-          <p:nvPicPr>
-            <p:cNvPr id="68" name="Amazon-VPC_Elastic-Network-Interface" descr="Amazon VPC_Elastic Network Interface"/>
-            <p:cNvPicPr>
-              <a:picLocks noChangeAspect="1"/>
-            </p:cNvPicPr>
-            <p:nvPr/>
-          </p:nvPicPr>
-          <p:blipFill>
-            <a:blip r:embed="rId26">
-              <a:extLst>
-                <a:ext uri="{96DAC541-7B7A-43D3-8B79-37D633B846F1}">
-                  <asvg:svgBlip xmlns:asvg="http://schemas.microsoft.com/office/drawing/2016/SVG/main" r:embed="rId27"/>
-                </a:ext>
-              </a:extLst>
-            </a:blip>
-            <a:stretch>
-              <a:fillRect/>
-            </a:stretch>
-          </p:blipFill>
-          <p:spPr>
-            <a:xfrm>
-              <a:off x="9426058" y="2642191"/>
-              <a:ext cx="354419" cy="354419"/>
-            </a:xfrm>
-            <a:prstGeom prst="rect">
-              <a:avLst/>
-            </a:prstGeom>
-          </p:spPr>
-        </p:pic>
-        <p:sp>
-          <p:nvSpPr>
-            <p:cNvPr id="69" name="TextBox 68"/>
-            <p:cNvSpPr txBox="1"/>
-            <p:nvPr/>
-          </p:nvSpPr>
-          <p:spPr>
-            <a:xfrm>
-              <a:off x="9125172" y="3031313"/>
-              <a:ext cx="956192" cy="134384"/>
-            </a:xfrm>
-            <a:prstGeom prst="rect">
-              <a:avLst/>
-            </a:prstGeom>
-            <a:noFill/>
-          </p:spPr>
-          <p:txBody>
-            <a:bodyPr wrap="none" lIns="0" rIns="0" tIns="0" bIns="0" anchor="t">
-              <a:noAutofit/>
-            </a:bodyPr>
-            <a:lstStyle/>
-            <a:p>
-              <a:pPr algn="ctr">
-                <a:lnSpc>
-                  <a:spcPct val="100000"/>
-                </a:lnSpc>
-              </a:pPr>
-              <a:r>
-                <a:rPr sz="813" b="0" lang="ko-KR">
-                  <a:solidFill>
-                    <a:srgbClr val="232F3E"/>
-                  </a:solidFill>
-                  <a:latin typeface="Arial"/>
-                  <a:ea typeface="Malgun Gothic"/>
-                  <a:cs typeface="Malgun Gothic"/>
-                </a:rPr>
-                <a:t>C8000V-1 Gi2</a:t>
-              </a:r>
-            </a:p>
-          </p:txBody>
-        </p:sp>
-        <p:sp>
-          <p:nvSpPr>
-            <p:cNvPr id="70" name="TextBox 69"/>
-            <p:cNvSpPr txBox="1"/>
-            <p:nvPr/>
-          </p:nvSpPr>
-          <p:spPr>
-            <a:xfrm>
-              <a:off x="9284844" y="3163481"/>
-              <a:ext cx="636846" cy="115186"/>
-            </a:xfrm>
-            <a:prstGeom prst="rect">
-              <a:avLst/>
-            </a:prstGeom>
-            <a:noFill/>
-          </p:spPr>
-          <p:txBody>
-            <a:bodyPr wrap="none" lIns="0" rIns="0" tIns="0" bIns="0" anchor="t">
-              <a:noAutofit/>
-            </a:bodyPr>
-            <a:lstStyle/>
-            <a:p>
-              <a:pPr algn="ctr">
-                <a:lnSpc>
-                  <a:spcPct val="100000"/>
-                </a:lnSpc>
-              </a:pPr>
-              <a:r>
-                <a:rPr sz="697" b="0" lang="ko-KR">
-                  <a:solidFill>
-                    <a:srgbClr val="545B64"/>
-                  </a:solidFill>
-                  <a:latin typeface="Arial"/>
-                  <a:ea typeface="Malgun Gothic"/>
-                  <a:cs typeface="Malgun Gothic"/>
-                </a:rPr>
-                <a:t>10.1.1.90</a:t>
-              </a:r>
-            </a:p>
-          </p:txBody>
-        </p:sp>
-        <p:pic>
-          <p:nvPicPr>
-            <p:cNvPr id="71" name="Amazon-EC2_Instance" descr="Amazon EC2_Instance"/>
-            <p:cNvPicPr>
-              <a:picLocks noChangeAspect="1"/>
-            </p:cNvPicPr>
-            <p:nvPr/>
-          </p:nvPicPr>
-          <p:blipFill>
-            <a:blip r:embed="rId24">
-              <a:extLst>
-                <a:ext uri="{96DAC541-7B7A-43D3-8B79-37D633B846F1}">
-                  <asvg:svgBlip xmlns:asvg="http://schemas.microsoft.com/office/drawing/2016/SVG/main" r:embed="rId25"/>
-                </a:ext>
-              </a:extLst>
-            </a:blip>
-            <a:stretch>
-              <a:fillRect/>
-            </a:stretch>
-          </p:blipFill>
-          <p:spPr>
-            <a:xfrm>
-              <a:off x="10563151" y="2642191"/>
-              <a:ext cx="354419" cy="354419"/>
-            </a:xfrm>
-            <a:prstGeom prst="rect">
-              <a:avLst/>
-            </a:prstGeom>
-          </p:spPr>
-        </p:pic>
-        <p:sp>
-          <p:nvSpPr>
-            <p:cNvPr id="72" name="TextBox 71"/>
-            <p:cNvSpPr txBox="1"/>
-            <p:nvPr/>
-          </p:nvSpPr>
-          <p:spPr>
-            <a:xfrm>
-              <a:off x="10281647" y="3031313"/>
-              <a:ext cx="917427" cy="134384"/>
-            </a:xfrm>
-            <a:prstGeom prst="rect">
-              <a:avLst/>
-            </a:prstGeom>
-            <a:noFill/>
-          </p:spPr>
-          <p:txBody>
-            <a:bodyPr wrap="none" lIns="0" rIns="0" tIns="0" bIns="0" anchor="t">
-              <a:noAutofit/>
-            </a:bodyPr>
-            <a:lstStyle/>
-            <a:p>
-              <a:pPr algn="ctr">
-                <a:lnSpc>
-                  <a:spcPct val="100000"/>
-                </a:lnSpc>
-              </a:pPr>
-              <a:r>
-                <a:rPr sz="813" b="0" lang="ko-KR">
-                  <a:solidFill>
-                    <a:srgbClr val="232F3E"/>
-                  </a:solidFill>
-                  <a:latin typeface="Arial"/>
-                  <a:ea typeface="Malgun Gothic"/>
-                  <a:cs typeface="Malgun Gothic"/>
-                </a:rPr>
-                <a:t>EC2-1 리시버</a:t>
-              </a:r>
-            </a:p>
-          </p:txBody>
-        </p:sp>
-        <p:sp>
-          <p:nvSpPr>
-            <p:cNvPr id="73" name="TextBox 72"/>
-            <p:cNvSpPr txBox="1"/>
-            <p:nvPr/>
-          </p:nvSpPr>
-          <p:spPr>
-            <a:xfrm>
-              <a:off x="10421938" y="3163481"/>
-              <a:ext cx="636846" cy="115186"/>
-            </a:xfrm>
-            <a:prstGeom prst="rect">
-              <a:avLst/>
-            </a:prstGeom>
-            <a:noFill/>
-          </p:spPr>
-          <p:txBody>
-            <a:bodyPr wrap="none" lIns="0" rIns="0" tIns="0" bIns="0" anchor="t">
-              <a:noAutofit/>
-            </a:bodyPr>
-            <a:lstStyle/>
-            <a:p>
-              <a:pPr algn="ctr">
-                <a:lnSpc>
-                  <a:spcPct val="100000"/>
-                </a:lnSpc>
-              </a:pPr>
-              <a:r>
-                <a:rPr sz="697" b="0" lang="ko-KR">
-                  <a:solidFill>
-                    <a:srgbClr val="545B64"/>
-                  </a:solidFill>
-                  <a:latin typeface="Arial"/>
-                  <a:ea typeface="Malgun Gothic"/>
-                  <a:cs typeface="Malgun Gothic"/>
-                </a:rPr>
-                <a:t>10.1.1.84</a:t>
-              </a:r>
-            </a:p>
-          </p:txBody>
-        </p:sp>
-        <p:pic>
-          <p:nvPicPr>
-            <p:cNvPr id="74" name="AWS-Transit-Gateway_Attachment" descr="AWS Transit Gateway_Attachment"/>
-            <p:cNvPicPr>
-              <a:picLocks noChangeAspect="1"/>
-            </p:cNvPicPr>
-            <p:nvPr/>
-          </p:nvPicPr>
-          <p:blipFill>
-            <a:blip r:embed="rId22">
-              <a:extLst>
-                <a:ext uri="{96DAC541-7B7A-43D3-8B79-37D633B846F1}">
-                  <asvg:svgBlip xmlns:asvg="http://schemas.microsoft.com/office/drawing/2016/SVG/main" r:embed="rId23"/>
-                </a:ext>
-              </a:extLst>
-            </a:blip>
-            <a:stretch>
-              <a:fillRect/>
-            </a:stretch>
-          </p:blipFill>
-          <p:spPr>
-            <a:xfrm>
-              <a:off x="6450419" y="5137888"/>
-              <a:ext cx="354419" cy="354419"/>
-            </a:xfrm>
-            <a:prstGeom prst="rect">
-              <a:avLst/>
-            </a:prstGeom>
-          </p:spPr>
-        </p:pic>
-        <p:sp>
-          <p:nvSpPr>
-            <p:cNvPr id="75" name="TextBox 74"/>
-            <p:cNvSpPr txBox="1"/>
-            <p:nvPr/>
-          </p:nvSpPr>
-          <p:spPr>
-            <a:xfrm>
-              <a:off x="6078464" y="5527010"/>
-              <a:ext cx="1098328" cy="134384"/>
-            </a:xfrm>
-            <a:prstGeom prst="rect">
-              <a:avLst/>
-            </a:prstGeom>
-            <a:noFill/>
-          </p:spPr>
-          <p:txBody>
-            <a:bodyPr wrap="none" lIns="0" rIns="0" tIns="0" bIns="0" anchor="t">
-              <a:noAutofit/>
-            </a:bodyPr>
-            <a:lstStyle/>
-            <a:p>
-              <a:pPr algn="ctr">
-                <a:lnSpc>
-                  <a:spcPct val="100000"/>
-                </a:lnSpc>
-              </a:pPr>
-              <a:r>
-                <a:rPr sz="813" b="0" lang="ko-KR">
-                  <a:solidFill>
-                    <a:srgbClr val="232F3E"/>
-                  </a:solidFill>
-                  <a:latin typeface="Arial"/>
-                  <a:ea typeface="Malgun Gothic"/>
-                  <a:cs typeface="Malgun Gothic"/>
-                </a:rPr>
-                <a:t>TGW attachment</a:t>
-              </a:r>
-            </a:p>
-          </p:txBody>
-        </p:sp>
-        <p:pic>
-          <p:nvPicPr>
-            <p:cNvPr id="76" name="Amazon-EC2_Instance" descr="Amazon EC2_Instance"/>
-            <p:cNvPicPr>
-              <a:picLocks noChangeAspect="1"/>
-            </p:cNvPicPr>
-            <p:nvPr/>
-          </p:nvPicPr>
-          <p:blipFill>
-            <a:blip r:embed="rId24">
-              <a:extLst>
-                <a:ext uri="{96DAC541-7B7A-43D3-8B79-37D633B846F1}">
-                  <asvg:svgBlip xmlns:asvg="http://schemas.microsoft.com/office/drawing/2016/SVG/main" r:embed="rId25"/>
-                </a:ext>
-              </a:extLst>
-            </a:blip>
-            <a:stretch>
-              <a:fillRect/>
-            </a:stretch>
-          </p:blipFill>
-          <p:spPr>
-            <a:xfrm>
-              <a:off x="8156058" y="5137888"/>
-              <a:ext cx="354419" cy="354419"/>
-            </a:xfrm>
-            <a:prstGeom prst="rect">
-              <a:avLst/>
-            </a:prstGeom>
-          </p:spPr>
-        </p:pic>
-        <p:sp>
-          <p:nvSpPr>
-            <p:cNvPr id="77" name="TextBox 76"/>
-            <p:cNvSpPr txBox="1"/>
-            <p:nvPr/>
-          </p:nvSpPr>
-          <p:spPr>
-            <a:xfrm>
-              <a:off x="7761491" y="5527010"/>
-              <a:ext cx="1143554" cy="134384"/>
-            </a:xfrm>
-            <a:prstGeom prst="rect">
-              <a:avLst/>
-            </a:prstGeom>
-            <a:noFill/>
-          </p:spPr>
-          <p:txBody>
-            <a:bodyPr wrap="none" lIns="0" rIns="0" tIns="0" bIns="0" anchor="t">
-              <a:noAutofit/>
-            </a:bodyPr>
-            <a:lstStyle/>
-            <a:p>
-              <a:pPr algn="ctr">
-                <a:lnSpc>
-                  <a:spcPct val="100000"/>
-                </a:lnSpc>
-              </a:pPr>
-              <a:r>
-                <a:rPr sz="813" b="0" lang="ko-KR">
-                  <a:solidFill>
-                    <a:srgbClr val="232F3E"/>
-                  </a:solidFill>
-                  <a:latin typeface="Arial"/>
-                  <a:ea typeface="Malgun Gothic"/>
-                  <a:cs typeface="Malgun Gothic"/>
-                </a:rPr>
-                <a:t>C8000V-2 · 대기</a:t>
-              </a:r>
-            </a:p>
-          </p:txBody>
-        </p:sp>
-        <p:sp>
-          <p:nvSpPr>
-            <p:cNvPr id="78" name="TextBox 77"/>
-            <p:cNvSpPr txBox="1"/>
-            <p:nvPr/>
-          </p:nvSpPr>
-          <p:spPr>
-            <a:xfrm>
-              <a:off x="7679808" y="5659179"/>
-              <a:ext cx="1306919" cy="115186"/>
-            </a:xfrm>
-            <a:prstGeom prst="rect">
-              <a:avLst/>
-            </a:prstGeom>
-            <a:noFill/>
-          </p:spPr>
-          <p:txBody>
-            <a:bodyPr wrap="none" lIns="0" rIns="0" tIns="0" bIns="0" anchor="t">
-              <a:noAutofit/>
-            </a:bodyPr>
-            <a:lstStyle/>
-            <a:p>
-              <a:pPr algn="ctr">
-                <a:lnSpc>
-                  <a:spcPct val="100000"/>
-                </a:lnSpc>
-              </a:pPr>
-              <a:r>
-                <a:rPr sz="697" b="0" lang="ko-KR">
-                  <a:solidFill>
-                    <a:srgbClr val="545B64"/>
-                  </a:solidFill>
-                  <a:latin typeface="Arial"/>
-                  <a:ea typeface="Malgun Gothic"/>
-                  <a:cs typeface="Malgun Gothic"/>
-                </a:rPr>
-                <a:t>Gi1 .40 · prepend ×3</a:t>
-              </a:r>
-            </a:p>
-          </p:txBody>
-        </p:sp>
-        <p:pic>
-          <p:nvPicPr>
-            <p:cNvPr id="79" name="Amazon-VPC_Elastic-Network-Interface" descr="Amazon VPC_Elastic Network Interface"/>
-            <p:cNvPicPr>
-              <a:picLocks noChangeAspect="1"/>
-            </p:cNvPicPr>
-            <p:nvPr/>
-          </p:nvPicPr>
-          <p:blipFill>
-            <a:blip r:embed="rId26">
-              <a:extLst>
-                <a:ext uri="{96DAC541-7B7A-43D3-8B79-37D633B846F1}">
-                  <asvg:svgBlip xmlns:asvg="http://schemas.microsoft.com/office/drawing/2016/SVG/main" r:embed="rId27"/>
-                </a:ext>
-              </a:extLst>
-            </a:blip>
-            <a:stretch>
-              <a:fillRect/>
-            </a:stretch>
-          </p:blipFill>
-          <p:spPr>
-            <a:xfrm>
-              <a:off x="9426058" y="5137888"/>
-              <a:ext cx="354419" cy="354419"/>
-            </a:xfrm>
-            <a:prstGeom prst="rect">
-              <a:avLst/>
-            </a:prstGeom>
-          </p:spPr>
-        </p:pic>
-        <p:sp>
-          <p:nvSpPr>
-            <p:cNvPr id="80" name="TextBox 79"/>
-            <p:cNvSpPr txBox="1"/>
-            <p:nvPr/>
-          </p:nvSpPr>
-          <p:spPr>
-            <a:xfrm>
-              <a:off x="9125172" y="5527010"/>
-              <a:ext cx="956192" cy="134384"/>
-            </a:xfrm>
-            <a:prstGeom prst="rect">
-              <a:avLst/>
-            </a:prstGeom>
-            <a:noFill/>
-          </p:spPr>
-          <p:txBody>
-            <a:bodyPr wrap="none" lIns="0" rIns="0" tIns="0" bIns="0" anchor="t">
-              <a:noAutofit/>
-            </a:bodyPr>
-            <a:lstStyle/>
-            <a:p>
-              <a:pPr algn="ctr">
-                <a:lnSpc>
-                  <a:spcPct val="100000"/>
-                </a:lnSpc>
-              </a:pPr>
-              <a:r>
-                <a:rPr sz="813" b="0" lang="ko-KR">
-                  <a:solidFill>
-                    <a:srgbClr val="232F3E"/>
-                  </a:solidFill>
-                  <a:latin typeface="Arial"/>
-                  <a:ea typeface="Malgun Gothic"/>
-                  <a:cs typeface="Malgun Gothic"/>
-                </a:rPr>
-                <a:t>C8000V-2 Gi2</a:t>
-              </a:r>
-            </a:p>
-          </p:txBody>
-        </p:sp>
-        <p:sp>
-          <p:nvSpPr>
-            <p:cNvPr id="81" name="TextBox 80"/>
-            <p:cNvSpPr txBox="1"/>
-            <p:nvPr/>
-          </p:nvSpPr>
-          <p:spPr>
-            <a:xfrm>
-              <a:off x="9254387" y="5659179"/>
-              <a:ext cx="697762" cy="115186"/>
-            </a:xfrm>
-            <a:prstGeom prst="rect">
-              <a:avLst/>
-            </a:prstGeom>
-            <a:noFill/>
-          </p:spPr>
-          <p:txBody>
-            <a:bodyPr wrap="none" lIns="0" rIns="0" tIns="0" bIns="0" anchor="t">
-              <a:noAutofit/>
-            </a:bodyPr>
-            <a:lstStyle/>
-            <a:p>
-              <a:pPr algn="ctr">
-                <a:lnSpc>
-                  <a:spcPct val="100000"/>
-                </a:lnSpc>
-              </a:pPr>
-              <a:r>
-                <a:rPr sz="697" b="0" lang="ko-KR">
-                  <a:solidFill>
-                    <a:srgbClr val="545B64"/>
-                  </a:solidFill>
-                  <a:latin typeface="Arial"/>
-                  <a:ea typeface="Malgun Gothic"/>
-                  <a:cs typeface="Malgun Gothic"/>
-                </a:rPr>
-                <a:t>10.1.1.100</a:t>
-              </a:r>
-            </a:p>
-          </p:txBody>
-        </p:sp>
-        <p:pic>
-          <p:nvPicPr>
-            <p:cNvPr id="82" name="Amazon-EC2_Instance" descr="Amazon EC2_Instance"/>
-            <p:cNvPicPr>
-              <a:picLocks noChangeAspect="1"/>
-            </p:cNvPicPr>
-            <p:nvPr/>
-          </p:nvPicPr>
-          <p:blipFill>
-            <a:blip r:embed="rId24">
-              <a:extLst>
-                <a:ext uri="{96DAC541-7B7A-43D3-8B79-37D633B846F1}">
-                  <asvg:svgBlip xmlns:asvg="http://schemas.microsoft.com/office/drawing/2016/SVG/main" r:embed="rId25"/>
-                </a:ext>
-              </a:extLst>
-            </a:blip>
-            <a:stretch>
-              <a:fillRect/>
-            </a:stretch>
-          </p:blipFill>
-          <p:spPr>
-            <a:xfrm>
-              <a:off x="10563151" y="5137888"/>
-              <a:ext cx="354419" cy="354419"/>
-            </a:xfrm>
-            <a:prstGeom prst="rect">
-              <a:avLst/>
-            </a:prstGeom>
-          </p:spPr>
-        </p:pic>
-        <p:sp>
-          <p:nvSpPr>
-            <p:cNvPr id="83" name="TextBox 82"/>
-            <p:cNvSpPr txBox="1"/>
-            <p:nvPr/>
-          </p:nvSpPr>
-          <p:spPr>
-            <a:xfrm>
-              <a:off x="10281647" y="5527010"/>
-              <a:ext cx="917427" cy="134384"/>
-            </a:xfrm>
-            <a:prstGeom prst="rect">
-              <a:avLst/>
-            </a:prstGeom>
-            <a:noFill/>
-          </p:spPr>
-          <p:txBody>
-            <a:bodyPr wrap="none" lIns="0" rIns="0" tIns="0" bIns="0" anchor="t">
-              <a:noAutofit/>
-            </a:bodyPr>
-            <a:lstStyle/>
-            <a:p>
-              <a:pPr algn="ctr">
-                <a:lnSpc>
-                  <a:spcPct val="100000"/>
-                </a:lnSpc>
-              </a:pPr>
-              <a:r>
-                <a:rPr sz="813" b="0" lang="ko-KR">
-                  <a:solidFill>
-                    <a:srgbClr val="232F3E"/>
-                  </a:solidFill>
-                  <a:latin typeface="Arial"/>
-                  <a:ea typeface="Malgun Gothic"/>
-                  <a:cs typeface="Malgun Gothic"/>
-                </a:rPr>
-                <a:t>EC2-2 리시버</a:t>
-              </a:r>
-            </a:p>
-          </p:txBody>
-        </p:sp>
-        <p:sp>
-          <p:nvSpPr>
-            <p:cNvPr id="84" name="TextBox 83"/>
-            <p:cNvSpPr txBox="1"/>
-            <p:nvPr/>
-          </p:nvSpPr>
-          <p:spPr>
-            <a:xfrm>
-              <a:off x="10391480" y="5659179"/>
-              <a:ext cx="697762" cy="115186"/>
-            </a:xfrm>
-            <a:prstGeom prst="rect">
-              <a:avLst/>
-            </a:prstGeom>
-            <a:noFill/>
-          </p:spPr>
-          <p:txBody>
-            <a:bodyPr wrap="none" lIns="0" rIns="0" tIns="0" bIns="0" anchor="t">
-              <a:noAutofit/>
-            </a:bodyPr>
-            <a:lstStyle/>
-            <a:p>
-              <a:pPr algn="ctr">
-                <a:lnSpc>
-                  <a:spcPct val="100000"/>
-                </a:lnSpc>
-              </a:pPr>
-              <a:r>
-                <a:rPr sz="697" b="0" lang="ko-KR">
-                  <a:solidFill>
-                    <a:srgbClr val="545B64"/>
-                  </a:solidFill>
-                  <a:latin typeface="Arial"/>
-                  <a:ea typeface="Malgun Gothic"/>
-                  <a:cs typeface="Malgun Gothic"/>
-                </a:rPr>
-                <a:t>10.1.1.116</a:t>
-              </a:r>
-            </a:p>
-          </p:txBody>
-        </p:sp>
-        <p:sp>
-          <p:nvSpPr>
-            <p:cNvPr id="85" name="Freeform 84"/>
-            <p:cNvSpPr/>
-            <p:nvPr/>
-          </p:nvSpPr>
-          <p:spPr>
-            <a:xfrm>
-              <a:off x="5379779" y="2819400"/>
-              <a:ext cx="1026337" cy="1078023"/>
-            </a:xfrm>
-            <a:custGeom>
-              <a:avLst/>
-              <a:gdLst/>
-              <a:ahLst/>
-              <a:cxnLst/>
-              <a:rect l="l" t="t" r="r" b="b"/>
-              <a:pathLst>
-                <a:path w="1026337" h="1078023">
-                  <a:moveTo>
-                    <a:pt x="0" y="1078023"/>
-                  </a:moveTo>
-                  <a:lnTo>
-                    <a:pt x="324884" y="1078023"/>
-                  </a:lnTo>
-                  <a:lnTo>
-                    <a:pt x="324884" y="0"/>
-                  </a:lnTo>
-                  <a:lnTo>
-                    <a:pt x="1026337" y="0"/>
-                  </a:lnTo>
-                </a:path>
-              </a:pathLst>
-            </a:custGeom>
-            <a:noFill/>
-            <a:ln w="11076">
-              <a:solidFill>
-                <a:srgbClr val="232F3E"/>
-              </a:solidFill>
-              <a:prstDash val="solid"/>
-              <a:miter lim="800000"/>
-              <a:tailEnd type="triangle" w="med" len="med"/>
-            </a:ln>
-          </p:spPr>
-          <p:txBody>
-            <a:bodyPr rtlCol="0" anchor="ctr"/>
-            <a:lstStyle/>
-            <a:p>
-              <a:pPr algn="ctr"/>
-            </a:p>
-          </p:txBody>
-        </p:sp>
-        <p:sp>
-          <p:nvSpPr>
-            <p:cNvPr id="86" name="Freeform 85"/>
-            <p:cNvSpPr/>
-            <p:nvPr/>
-          </p:nvSpPr>
-          <p:spPr>
-            <a:xfrm>
-              <a:off x="5704663" y="3897423"/>
-              <a:ext cx="701453" cy="1417675"/>
-            </a:xfrm>
-            <a:custGeom>
-              <a:avLst/>
-              <a:gdLst/>
-              <a:ahLst/>
-              <a:cxnLst/>
-              <a:rect l="l" t="t" r="r" b="b"/>
-              <a:pathLst>
-                <a:path w="701453" h="1417675">
-                  <a:moveTo>
-                    <a:pt x="0" y="0"/>
-                  </a:moveTo>
-                  <a:lnTo>
-                    <a:pt x="0" y="1417675"/>
-                  </a:lnTo>
-                  <a:lnTo>
-                    <a:pt x="701453" y="1417675"/>
-                  </a:lnTo>
-                </a:path>
-              </a:pathLst>
-            </a:custGeom>
-            <a:noFill/>
-            <a:ln w="11076">
+        <p:cxnSp>
+          <p:nvCxnSpPr>
+            <p:cNvPr id="91" name="Connector 90"/>
+            <p:cNvCxnSpPr/>
+            <p:nvPr/>
+          </p:nvCxnSpPr>
+          <p:spPr>
+            <a:xfrm flipH="1">
+              <a:off x="5663559" y="3797338"/>
+              <a:ext cx="1492345" cy="0"/>
+            </a:xfrm>
+            <a:prstGeom prst="line">
+              <a:avLst/>
+            </a:prstGeom>
+            <a:ln w="12719">
               <a:solidFill>
                 <a:srgbClr val="232F3E"/>
               </a:solidFill>
@@ -6101,48 +6248,17 @@
               <a:tailEnd type="triangle" w="med" len="med"/>
             </a:ln>
           </p:spPr>
-          <p:txBody>
-            <a:bodyPr rtlCol="0" anchor="ctr"/>
-            <a:lstStyle/>
-            <a:p>
-              <a:pPr algn="ctr"/>
-            </a:p>
-          </p:txBody>
-        </p:sp>
-        <p:cxnSp>
-          <p:nvCxnSpPr>
-            <p:cNvPr id="87" name="Connector 86"/>
-            <p:cNvCxnSpPr/>
-            <p:nvPr/>
-          </p:nvCxnSpPr>
-          <p:spPr>
-            <a:xfrm>
-              <a:off x="6834372" y="2819400"/>
-              <a:ext cx="1277384" cy="0"/>
-            </a:xfrm>
-            <a:prstGeom prst="line">
-              <a:avLst/>
-            </a:prstGeom>
-            <a:ln w="11076">
-              <a:solidFill>
-                <a:srgbClr val="232F3E"/>
-              </a:solidFill>
-              <a:prstDash val="solid"/>
-              <a:miter lim="800000"/>
-              <a:tailEnd type="triangle" w="med" len="med"/>
-            </a:ln>
-          </p:spPr>
         </p:cxnSp>
         <p:sp>
           <p:nvSpPr>
-            <p:cNvPr id="88" name="TextBox 87"/>
+            <p:cNvPr id="92" name="TextBox 91"/>
             <p:cNvSpPr txBox="1"/>
             <p:nvPr/>
           </p:nvSpPr>
           <p:spPr>
             <a:xfrm>
-              <a:off x="6861138" y="2676156"/>
-              <a:ext cx="271352" cy="115186"/>
+              <a:off x="6069502" y="3632841"/>
+              <a:ext cx="680458" cy="132276"/>
             </a:xfrm>
             <a:prstGeom prst="rect">
               <a:avLst/>
@@ -6161,666 +6277,7 @@
                 </a:lnSpc>
               </a:pPr>
               <a:r>
-                <a:rPr sz="697" b="0" lang="ko-KR">
-                  <a:solidFill>
-                    <a:srgbClr val="232F3E"/>
-                  </a:solidFill>
-                  <a:latin typeface="Arial"/>
-                  <a:ea typeface="Malgun Gothic"/>
-                  <a:cs typeface="Malgun Gothic"/>
-                </a:rPr>
-                <a:t>GRE</a:t>
-              </a:r>
-            </a:p>
-          </p:txBody>
-        </p:sp>
-        <p:cxnSp>
-          <p:nvCxnSpPr>
-            <p:cNvPr id="89" name="Connector 88"/>
-            <p:cNvCxnSpPr/>
-            <p:nvPr/>
-          </p:nvCxnSpPr>
-          <p:spPr>
-            <a:xfrm>
-              <a:off x="6834372" y="5315098"/>
-              <a:ext cx="1277384" cy="0"/>
-            </a:xfrm>
-            <a:prstGeom prst="line">
-              <a:avLst/>
-            </a:prstGeom>
-            <a:ln w="11076">
-              <a:solidFill>
-                <a:srgbClr val="232F3E"/>
-              </a:solidFill>
-              <a:custDash>
-                <a:ds d="400000" sp="266667"/>
-              </a:custDash>
-              <a:miter lim="800000"/>
-              <a:tailEnd type="triangle" w="med" len="med"/>
-            </a:ln>
-          </p:spPr>
-        </p:cxnSp>
-        <p:sp>
-          <p:nvSpPr>
-            <p:cNvPr id="90" name="TextBox 89"/>
-            <p:cNvSpPr txBox="1"/>
-            <p:nvPr/>
-          </p:nvSpPr>
-          <p:spPr>
-            <a:xfrm>
-              <a:off x="7376153" y="5171853"/>
-              <a:ext cx="703299" cy="115186"/>
-            </a:xfrm>
-            <a:prstGeom prst="rect">
-              <a:avLst/>
-            </a:prstGeom>
-            <a:noFill/>
-          </p:spPr>
-          <p:txBody>
-            <a:bodyPr wrap="none" lIns="0" rIns="0" tIns="0" bIns="0" anchor="t">
-              <a:noAutofit/>
-            </a:bodyPr>
-            <a:lstStyle/>
-            <a:p>
-              <a:pPr algn="ctr">
-                <a:lnSpc>
-                  <a:spcPct val="100000"/>
-                </a:lnSpc>
-              </a:pPr>
-              <a:r>
-                <a:rPr sz="697" b="0" lang="ko-KR">
-                  <a:solidFill>
-                    <a:srgbClr val="232F3E"/>
-                  </a:solidFill>
-                  <a:latin typeface="Arial"/>
-                  <a:ea typeface="Malgun Gothic"/>
-                  <a:cs typeface="Malgun Gothic"/>
-                </a:rPr>
-                <a:t>페일오버 시</a:t>
-              </a:r>
-            </a:p>
-          </p:txBody>
-        </p:sp>
-        <p:cxnSp>
-          <p:nvCxnSpPr>
-            <p:cNvPr id="91" name="Connector 90"/>
-            <p:cNvCxnSpPr/>
-            <p:nvPr/>
-          </p:nvCxnSpPr>
-          <p:spPr>
-            <a:xfrm>
-              <a:off x="8540012" y="2819400"/>
-              <a:ext cx="841744" cy="0"/>
-            </a:xfrm>
-            <a:prstGeom prst="line">
-              <a:avLst/>
-            </a:prstGeom>
-            <a:ln w="11076">
-              <a:solidFill>
-                <a:srgbClr val="232F3E"/>
-              </a:solidFill>
-              <a:prstDash val="solid"/>
-              <a:miter lim="800000"/>
-              <a:tailEnd type="triangle" w="med" len="med"/>
-            </a:ln>
-          </p:spPr>
-        </p:cxnSp>
-        <p:cxnSp>
-          <p:nvCxnSpPr>
-            <p:cNvPr id="92" name="Connector 91"/>
-            <p:cNvCxnSpPr/>
-            <p:nvPr/>
-          </p:nvCxnSpPr>
-          <p:spPr>
-            <a:xfrm>
-              <a:off x="8540012" y="5315098"/>
-              <a:ext cx="841744" cy="0"/>
-            </a:xfrm>
-            <a:prstGeom prst="line">
-              <a:avLst/>
-            </a:prstGeom>
-            <a:ln w="11076">
-              <a:solidFill>
-                <a:srgbClr val="232F3E"/>
-              </a:solidFill>
-              <a:custDash>
-                <a:ds d="400000" sp="266667"/>
-              </a:custDash>
-              <a:miter lim="800000"/>
-              <a:tailEnd type="triangle" w="med" len="med"/>
-            </a:ln>
-          </p:spPr>
-        </p:cxnSp>
-        <p:cxnSp>
-          <p:nvCxnSpPr>
-            <p:cNvPr id="93" name="Connector 92"/>
-            <p:cNvCxnSpPr/>
-            <p:nvPr/>
-          </p:nvCxnSpPr>
-          <p:spPr>
-            <a:xfrm>
-              <a:off x="9810012" y="2819400"/>
-              <a:ext cx="708837" cy="0"/>
-            </a:xfrm>
-            <a:prstGeom prst="line">
-              <a:avLst/>
-            </a:prstGeom>
-            <a:ln w="11076">
-              <a:solidFill>
-                <a:srgbClr val="232F3E"/>
-              </a:solidFill>
-              <a:prstDash val="solid"/>
-              <a:miter lim="800000"/>
-              <a:tailEnd type="triangle" w="med" len="med"/>
-            </a:ln>
-          </p:spPr>
-        </p:cxnSp>
-        <p:sp>
-          <p:nvSpPr>
-            <p:cNvPr id="94" name="Freeform 93"/>
-            <p:cNvSpPr/>
-            <p:nvPr/>
-          </p:nvSpPr>
-          <p:spPr>
-            <a:xfrm>
-              <a:off x="10253035" y="2819400"/>
-              <a:ext cx="265814" cy="2495698"/>
-            </a:xfrm>
-            <a:custGeom>
-              <a:avLst/>
-              <a:gdLst/>
-              <a:ahLst/>
-              <a:cxnLst/>
-              <a:rect l="l" t="t" r="r" b="b"/>
-              <a:pathLst>
-                <a:path w="265814" h="2495698">
-                  <a:moveTo>
-                    <a:pt x="0" y="0"/>
-                  </a:moveTo>
-                  <a:lnTo>
-                    <a:pt x="0" y="2495698"/>
-                  </a:lnTo>
-                  <a:lnTo>
-                    <a:pt x="265814" y="2495698"/>
-                  </a:lnTo>
-                </a:path>
-              </a:pathLst>
-            </a:custGeom>
-            <a:noFill/>
-            <a:ln w="11076">
-              <a:solidFill>
-                <a:srgbClr val="232F3E"/>
-              </a:solidFill>
-              <a:prstDash val="solid"/>
-              <a:miter lim="800000"/>
-              <a:tailEnd type="triangle" w="med" len="med"/>
-            </a:ln>
-          </p:spPr>
-          <p:txBody>
-            <a:bodyPr rtlCol="0" anchor="ctr"/>
-            <a:lstStyle/>
-            <a:p>
-              <a:pPr algn="ctr"/>
-            </a:p>
-          </p:txBody>
-        </p:sp>
-        <p:sp>
-          <p:nvSpPr>
-            <p:cNvPr id="95" name="TextBox 94"/>
-            <p:cNvSpPr txBox="1"/>
-            <p:nvPr/>
-          </p:nvSpPr>
-          <p:spPr>
-            <a:xfrm>
-              <a:off x="9939227" y="2676156"/>
-              <a:ext cx="553779" cy="115186"/>
-            </a:xfrm>
-            <a:prstGeom prst="rect">
-              <a:avLst/>
-            </a:prstGeom>
-            <a:noFill/>
-          </p:spPr>
-          <p:txBody>
-            <a:bodyPr wrap="none" lIns="0" rIns="0" tIns="0" bIns="0" anchor="t">
-              <a:noAutofit/>
-            </a:bodyPr>
-            <a:lstStyle/>
-            <a:p>
-              <a:pPr algn="ctr">
-                <a:lnSpc>
-                  <a:spcPct val="100000"/>
-                </a:lnSpc>
-              </a:pPr>
-              <a:r>
-                <a:rPr sz="697" b="0" lang="ko-KR">
-                  <a:solidFill>
-                    <a:srgbClr val="232F3E"/>
-                  </a:solidFill>
-                  <a:latin typeface="Arial"/>
-                  <a:ea typeface="Malgun Gothic"/>
-                  <a:cs typeface="Malgun Gothic"/>
-                </a:rPr>
-                <a:t>TGW 복제</a:t>
-              </a:r>
-            </a:p>
-          </p:txBody>
-        </p:sp>
-        <p:pic>
-          <p:nvPicPr>
-            <p:cNvPr id="96" name="Amazon-VPC_Router" descr="Amazon VPC_Router"/>
-            <p:cNvPicPr>
-              <a:picLocks noChangeAspect="1"/>
-            </p:cNvPicPr>
-            <p:nvPr/>
-          </p:nvPicPr>
-          <p:blipFill>
-            <a:blip r:embed="rId28">
-              <a:extLst>
-                <a:ext uri="{96DAC541-7B7A-43D3-8B79-37D633B846F1}">
-                  <asvg:svgBlip xmlns:asvg="http://schemas.microsoft.com/office/drawing/2016/SVG/main" r:embed="rId29"/>
-                </a:ext>
-              </a:extLst>
-            </a:blip>
-            <a:stretch>
-              <a:fillRect/>
-            </a:stretch>
-          </p:blipFill>
-          <p:spPr>
-            <a:xfrm>
-              <a:off x="8156058" y="3720214"/>
-              <a:ext cx="354419" cy="354419"/>
-            </a:xfrm>
-            <a:prstGeom prst="rect">
-              <a:avLst/>
-            </a:prstGeom>
-          </p:spPr>
-        </p:pic>
-        <p:sp>
-          <p:nvSpPr>
-            <p:cNvPr id="97" name="TextBox 96"/>
-            <p:cNvSpPr txBox="1"/>
-            <p:nvPr/>
-          </p:nvSpPr>
-          <p:spPr>
-            <a:xfrm>
-              <a:off x="7713035" y="4109336"/>
-              <a:ext cx="1240465" cy="134384"/>
-            </a:xfrm>
-            <a:prstGeom prst="rect">
-              <a:avLst/>
-            </a:prstGeom>
-            <a:noFill/>
-          </p:spPr>
-          <p:txBody>
-            <a:bodyPr wrap="none" lIns="0" rIns="0" tIns="0" bIns="0" anchor="t">
-              <a:noAutofit/>
-            </a:bodyPr>
-            <a:lstStyle/>
-            <a:p>
-              <a:pPr algn="ctr">
-                <a:lnSpc>
-                  <a:spcPct val="100000"/>
-                </a:lnSpc>
-              </a:pPr>
-              <a:r>
-                <a:rPr sz="813" b="0" lang="ko-KR">
-                  <a:solidFill>
-                    <a:srgbClr val="232F3E"/>
-                  </a:solidFill>
-                  <a:latin typeface="Arial"/>
-                  <a:ea typeface="Malgun Gothic"/>
-                  <a:cs typeface="Malgun Gothic"/>
-                </a:rPr>
-                <a:t>VPC Route Server</a:t>
-              </a:r>
-            </a:p>
-          </p:txBody>
-        </p:sp>
-        <p:sp>
-          <p:nvSpPr>
-            <p:cNvPr id="98" name="TextBox 97"/>
-            <p:cNvSpPr txBox="1"/>
-            <p:nvPr/>
-          </p:nvSpPr>
-          <p:spPr>
-            <a:xfrm>
-              <a:off x="8045302" y="4241505"/>
-              <a:ext cx="575930" cy="115186"/>
-            </a:xfrm>
-            <a:prstGeom prst="rect">
-              <a:avLst/>
-            </a:prstGeom>
-            <a:noFill/>
-          </p:spPr>
-          <p:txBody>
-            <a:bodyPr wrap="none" lIns="0" rIns="0" tIns="0" bIns="0" anchor="t">
-              <a:noAutofit/>
-            </a:bodyPr>
-            <a:lstStyle/>
-            <a:p>
-              <a:pPr algn="ctr">
-                <a:lnSpc>
-                  <a:spcPct val="100000"/>
-                </a:lnSpc>
-              </a:pPr>
-              <a:r>
-                <a:rPr sz="697" b="0" lang="ko-KR">
-                  <a:solidFill>
-                    <a:srgbClr val="545B64"/>
-                  </a:solidFill>
-                  <a:latin typeface="Arial"/>
-                  <a:ea typeface="Malgun Gothic"/>
-                  <a:cs typeface="Malgun Gothic"/>
-                </a:rPr>
-                <a:t>AS 65100</a:t>
-              </a:r>
-            </a:p>
-          </p:txBody>
-        </p:sp>
-        <p:cxnSp>
-          <p:nvCxnSpPr>
-            <p:cNvPr id="99" name="Connector 98"/>
-            <p:cNvCxnSpPr/>
-            <p:nvPr/>
-          </p:nvCxnSpPr>
-          <p:spPr>
-            <a:xfrm>
-              <a:off x="8333267" y="3291958"/>
-              <a:ext cx="0" cy="398721"/>
-            </a:xfrm>
-            <a:prstGeom prst="line">
-              <a:avLst/>
-            </a:prstGeom>
-            <a:ln w="11076">
-              <a:solidFill>
-                <a:srgbClr val="232F3E"/>
-              </a:solidFill>
-              <a:custDash>
-                <a:ds d="400000" sp="266667"/>
-              </a:custDash>
-              <a:miter lim="800000"/>
-            </a:ln>
-          </p:spPr>
-        </p:cxnSp>
-        <p:sp>
-          <p:nvSpPr>
-            <p:cNvPr id="100" name="TextBox 99"/>
-            <p:cNvSpPr txBox="1"/>
-            <p:nvPr/>
-          </p:nvSpPr>
-          <p:spPr>
-            <a:xfrm>
-              <a:off x="8392337" y="3576970"/>
-              <a:ext cx="515015" cy="115186"/>
-            </a:xfrm>
-            <a:prstGeom prst="rect">
-              <a:avLst/>
-            </a:prstGeom>
-            <a:noFill/>
-          </p:spPr>
-          <p:txBody>
-            <a:bodyPr wrap="none" lIns="0" rIns="0" tIns="0" bIns="0" anchor="t">
-              <a:noAutofit/>
-            </a:bodyPr>
-            <a:lstStyle/>
-            <a:p>
-              <a:pPr algn="l">
-                <a:lnSpc>
-                  <a:spcPct val="100000"/>
-                </a:lnSpc>
-              </a:pPr>
-              <a:r>
-                <a:rPr sz="697" b="0" lang="ko-KR">
-                  <a:solidFill>
-                    <a:srgbClr val="232F3E"/>
-                  </a:solidFill>
-                  <a:latin typeface="Arial"/>
-                  <a:ea typeface="Malgun Gothic"/>
-                  <a:cs typeface="Malgun Gothic"/>
-                </a:rPr>
-                <a:t>BGP·BFD</a:t>
-              </a:r>
-            </a:p>
-          </p:txBody>
-        </p:sp>
-        <p:cxnSp>
-          <p:nvCxnSpPr>
-            <p:cNvPr id="101" name="Connector 100"/>
-            <p:cNvCxnSpPr/>
-            <p:nvPr/>
-          </p:nvCxnSpPr>
-          <p:spPr>
-            <a:xfrm>
-              <a:off x="8333267" y="4369981"/>
-              <a:ext cx="0" cy="738372"/>
-            </a:xfrm>
-            <a:prstGeom prst="line">
-              <a:avLst/>
-            </a:prstGeom>
-            <a:ln w="11076">
-              <a:solidFill>
-                <a:srgbClr val="232F3E"/>
-              </a:solidFill>
-              <a:custDash>
-                <a:ds d="400000" sp="266667"/>
-              </a:custDash>
-              <a:miter lim="800000"/>
-            </a:ln>
-          </p:spPr>
-        </p:cxnSp>
-        <p:sp>
-          <p:nvSpPr>
-            <p:cNvPr id="102" name="TextBox 101"/>
-            <p:cNvSpPr txBox="1"/>
-            <p:nvPr/>
-          </p:nvSpPr>
-          <p:spPr>
-            <a:xfrm>
-              <a:off x="8392337" y="4477784"/>
-              <a:ext cx="515015" cy="115186"/>
-            </a:xfrm>
-            <a:prstGeom prst="rect">
-              <a:avLst/>
-            </a:prstGeom>
-            <a:noFill/>
-          </p:spPr>
-          <p:txBody>
-            <a:bodyPr wrap="none" lIns="0" rIns="0" tIns="0" bIns="0" anchor="t">
-              <a:noAutofit/>
-            </a:bodyPr>
-            <a:lstStyle/>
-            <a:p>
-              <a:pPr algn="l">
-                <a:lnSpc>
-                  <a:spcPct val="100000"/>
-                </a:lnSpc>
-              </a:pPr>
-              <a:r>
-                <a:rPr sz="697" b="0" lang="ko-KR">
-                  <a:solidFill>
-                    <a:srgbClr val="232F3E"/>
-                  </a:solidFill>
-                  <a:latin typeface="Arial"/>
-                  <a:ea typeface="Malgun Gothic"/>
-                  <a:cs typeface="Malgun Gothic"/>
-                </a:rPr>
-                <a:t>BGP·BFD</a:t>
-              </a:r>
-            </a:p>
-          </p:txBody>
-        </p:sp>
-        <p:sp>
-          <p:nvSpPr>
-            <p:cNvPr id="103" name="Rounded Rectangle 102"/>
-            <p:cNvSpPr/>
-            <p:nvPr/>
-          </p:nvSpPr>
-          <p:spPr>
-            <a:xfrm>
-              <a:off x="6073849" y="3705447"/>
-              <a:ext cx="1107558" cy="310116"/>
-            </a:xfrm>
-            <a:prstGeom prst="roundRect">
-              <a:avLst>
-                <a:gd name="adj" fmla="val 14285"/>
-              </a:avLst>
-            </a:prstGeom>
-            <a:solidFill>
-              <a:srgbClr val="F2F3F3"/>
-            </a:solidFill>
-            <a:ln w="7384">
-              <a:solidFill>
-                <a:srgbClr val="7D8998"/>
-              </a:solidFill>
-              <a:prstDash val="solid"/>
-              <a:miter lim="800000"/>
-            </a:ln>
-          </p:spPr>
-          <p:txBody>
-            <a:bodyPr rtlCol="0" anchor="ctr"/>
-            <a:lstStyle/>
-            <a:p>
-              <a:pPr algn="ctr"/>
-            </a:p>
-          </p:txBody>
-        </p:sp>
-        <p:sp>
-          <p:nvSpPr>
-            <p:cNvPr id="104" name="TextBox 103"/>
-            <p:cNvSpPr txBox="1"/>
-            <p:nvPr/>
-          </p:nvSpPr>
-          <p:spPr>
-            <a:xfrm>
-              <a:off x="5913253" y="3754179"/>
-              <a:ext cx="1428750" cy="115186"/>
-            </a:xfrm>
-            <a:prstGeom prst="rect">
-              <a:avLst/>
-            </a:prstGeom>
-            <a:noFill/>
-          </p:spPr>
-          <p:txBody>
-            <a:bodyPr wrap="none" lIns="0" rIns="0" tIns="0" bIns="0" anchor="t">
-              <a:noAutofit/>
-            </a:bodyPr>
-            <a:lstStyle/>
-            <a:p>
-              <a:pPr algn="ctr">
-                <a:lnSpc>
-                  <a:spcPct val="100000"/>
-                </a:lnSpc>
-              </a:pPr>
-              <a:r>
-                <a:rPr sz="697" b="1" lang="ko-KR">
-                  <a:solidFill>
-                    <a:srgbClr val="232F3E"/>
-                  </a:solidFill>
-                  <a:latin typeface="Arial"/>
-                  <a:ea typeface="Malgun Gothic"/>
-                  <a:cs typeface="Malgun Gothic"/>
-                </a:rPr>
-                <a:t>tgw-rtb · receiver-rtb</a:t>
-              </a:r>
-            </a:p>
-          </p:txBody>
-        </p:sp>
-        <p:sp>
-          <p:nvSpPr>
-            <p:cNvPr id="105" name="TextBox 104"/>
-            <p:cNvSpPr txBox="1"/>
-            <p:nvPr/>
-          </p:nvSpPr>
-          <p:spPr>
-            <a:xfrm>
-              <a:off x="6076618" y="3872319"/>
-              <a:ext cx="1102020" cy="115186"/>
-            </a:xfrm>
-            <a:prstGeom prst="rect">
-              <a:avLst/>
-            </a:prstGeom>
-            <a:noFill/>
-          </p:spPr>
-          <p:txBody>
-            <a:bodyPr wrap="none" lIns="0" rIns="0" tIns="0" bIns="0" anchor="t">
-              <a:noAutofit/>
-            </a:bodyPr>
-            <a:lstStyle/>
-            <a:p>
-              <a:pPr algn="ctr">
-                <a:lnSpc>
-                  <a:spcPct val="100000"/>
-                </a:lnSpc>
-              </a:pPr>
-              <a:r>
-                <a:rPr sz="697" b="0" lang="ko-KR">
-                  <a:solidFill>
-                    <a:srgbClr val="232F3E"/>
-                  </a:solidFill>
-                  <a:latin typeface="Arial"/>
-                  <a:ea typeface="Malgun Gothic"/>
-                  <a:cs typeface="Malgun Gothic"/>
-                </a:rPr>
-                <a:t>→ 활성 C8000V Gi1</a:t>
-              </a:r>
-            </a:p>
-          </p:txBody>
-        </p:sp>
-        <p:cxnSp>
-          <p:nvCxnSpPr>
-            <p:cNvPr id="106" name="Connector 105"/>
-            <p:cNvCxnSpPr/>
-            <p:nvPr/>
-          </p:nvCxnSpPr>
-          <p:spPr>
-            <a:xfrm flipH="1">
-              <a:off x="7210942" y="3897423"/>
-              <a:ext cx="915581" cy="0"/>
-            </a:xfrm>
-            <a:prstGeom prst="line">
-              <a:avLst/>
-            </a:prstGeom>
-            <a:ln w="11076">
-              <a:solidFill>
-                <a:srgbClr val="232F3E"/>
-              </a:solidFill>
-              <a:custDash>
-                <a:ds d="400000" sp="266667"/>
-              </a:custDash>
-              <a:miter lim="800000"/>
-              <a:tailEnd type="triangle" w="med" len="med"/>
-            </a:ln>
-          </p:spPr>
-        </p:cxnSp>
-        <p:sp>
-          <p:nvSpPr>
-            <p:cNvPr id="107" name="TextBox 106"/>
-            <p:cNvSpPr txBox="1"/>
-            <p:nvPr/>
-          </p:nvSpPr>
-          <p:spPr>
-            <a:xfrm>
-              <a:off x="7372461" y="3754179"/>
-              <a:ext cx="592544" cy="115186"/>
-            </a:xfrm>
-            <a:prstGeom prst="rect">
-              <a:avLst/>
-            </a:prstGeom>
-            <a:noFill/>
-          </p:spPr>
-          <p:txBody>
-            <a:bodyPr wrap="none" lIns="0" rIns="0" tIns="0" bIns="0" anchor="t">
-              <a:noAutofit/>
-            </a:bodyPr>
-            <a:lstStyle/>
-            <a:p>
-              <a:pPr algn="ctr">
-                <a:lnSpc>
-                  <a:spcPct val="100000"/>
-                </a:lnSpc>
-              </a:pPr>
-              <a:r>
-                <a:rPr sz="697" b="0" lang="ko-KR">
+                <a:rPr sz="801" b="0" lang="ko-KR">
                   <a:solidFill>
                     <a:srgbClr val="232F3E"/>
                   </a:solidFill>
@@ -6835,109 +6292,14 @@
         </p:sp>
         <p:sp>
           <p:nvSpPr>
-            <p:cNvPr id="108" name="Freeform 107"/>
-            <p:cNvSpPr/>
-            <p:nvPr/>
-          </p:nvSpPr>
-          <p:spPr>
-            <a:xfrm>
-              <a:off x="1998035" y="1180214"/>
-              <a:ext cx="6335232" cy="2510465"/>
-            </a:xfrm>
-            <a:custGeom>
-              <a:avLst/>
-              <a:gdLst/>
-              <a:ahLst/>
-              <a:cxnLst/>
-              <a:rect l="l" t="t" r="r" b="b"/>
-              <a:pathLst>
-                <a:path w="6335232" h="2510465">
-                  <a:moveTo>
-                    <a:pt x="0" y="2510465"/>
-                  </a:moveTo>
-                  <a:lnTo>
-                    <a:pt x="0" y="0"/>
-                  </a:lnTo>
-                  <a:lnTo>
-                    <a:pt x="6335232" y="0"/>
-                  </a:lnTo>
-                  <a:lnTo>
-                    <a:pt x="6335232" y="1417674"/>
-                  </a:lnTo>
-                </a:path>
-              </a:pathLst>
-            </a:custGeom>
-            <a:noFill/>
-            <a:ln w="11076">
-              <a:solidFill>
-                <a:srgbClr val="232F3E"/>
-              </a:solidFill>
-              <a:custDash>
-                <a:ds d="400000" sp="266667"/>
-              </a:custDash>
-              <a:miter lim="800000"/>
-              <a:tailEnd type="triangle" w="med" len="med"/>
-            </a:ln>
-          </p:spPr>
-          <p:txBody>
-            <a:bodyPr rtlCol="0" anchor="ctr"/>
-            <a:lstStyle/>
-            <a:p>
-              <a:pPr algn="ctr"/>
-            </a:p>
-          </p:txBody>
-        </p:sp>
-        <p:sp>
-          <p:nvSpPr>
-            <p:cNvPr id="109" name="TextBox 108"/>
+            <p:cNvPr id="93" name="TextBox 92"/>
             <p:cNvSpPr txBox="1"/>
             <p:nvPr/>
           </p:nvSpPr>
           <p:spPr>
             <a:xfrm>
-              <a:off x="2308151" y="1036970"/>
-              <a:ext cx="5715000" cy="115186"/>
-            </a:xfrm>
-            <a:prstGeom prst="rect">
-              <a:avLst/>
-            </a:prstGeom>
-            <a:noFill/>
-          </p:spPr>
-          <p:txBody>
-            <a:bodyPr wrap="none" lIns="0" rIns="0" tIns="0" bIns="0" anchor="t">
-              <a:noAutofit/>
-            </a:bodyPr>
-            <a:lstStyle/>
-            <a:p>
-              <a:pPr algn="ctr">
-                <a:lnSpc>
-                  <a:spcPct val="100000"/>
-                </a:lnSpc>
-              </a:pPr>
-              <a:r>
-                <a:rPr sz="697" b="0" lang="ko-KR">
-                  <a:solidFill>
-                    <a:srgbClr val="232F3E"/>
-                  </a:solidFill>
-                  <a:latin typeface="Arial"/>
-                  <a:ea typeface="Malgun Gothic"/>
-                  <a:cs typeface="Malgun Gothic"/>
-                </a:rPr>
-                <a:t>GRE Tunnel100 (오버레이) · 172.20.255.1 → 애니캐스트 Lo0 10.255.255.1 · eBGP 65000↔65200 + PIM</a:t>
-              </a:r>
-            </a:p>
-          </p:txBody>
-        </p:sp>
-        <p:sp>
-          <p:nvSpPr>
-            <p:cNvPr id="110" name="TextBox 109"/>
-            <p:cNvSpPr txBox="1"/>
-            <p:nvPr/>
-          </p:nvSpPr>
-          <p:spPr>
-            <a:xfrm>
-              <a:off x="6114459" y="6235109"/>
-              <a:ext cx="5305203" cy="115186"/>
+              <a:off x="4811397" y="6227485"/>
+              <a:ext cx="6092326" cy="132276"/>
             </a:xfrm>
             <a:prstGeom prst="rect">
               <a:avLst/>
@@ -6956,7 +6318,7 @@
                 </a:lnSpc>
               </a:pPr>
               <a:r>
-                <a:rPr sz="697" b="0" lang="ko-KR">
+                <a:rPr sz="801" b="0" lang="ko-KR">
                   <a:solidFill>
                     <a:srgbClr val="545B64"/>
                   </a:solidFill>
@@ -7032,10 +6394,10 @@
         </p:nvGrpSpPr>
         <p:grpSpPr>
           <a:xfrm>
-            <a:off x="403746" y="1267308"/>
-            <a:ext cx="11419537" cy="5009183"/>
-            <a:chOff x="403746" y="1267308"/>
-            <a:chExt cx="11419537" cy="5009183"/>
+            <a:off x="377411" y="1359038"/>
+            <a:ext cx="11458437" cy="4825724"/>
+            <a:chOff x="377411" y="1359038"/>
+            <a:chExt cx="11458437" cy="4825724"/>
           </a:xfrm>
         </p:grpSpPr>
         <p:sp>
@@ -7046,14 +6408,14 @@
           </p:nvSpPr>
           <p:spPr>
             <a:xfrm>
-              <a:off x="403746" y="2230613"/>
-              <a:ext cx="2627194" cy="1383656"/>
-            </a:xfrm>
-            <a:prstGeom prst="rect">
-              <a:avLst/>
-            </a:prstGeom>
-            <a:noFill/>
-            <a:ln w="17515">
+              <a:off x="377411" y="2421973"/>
+              <a:ext cx="1828248" cy="1700696"/>
+            </a:xfrm>
+            <a:prstGeom prst="rect">
+              <a:avLst/>
+            </a:prstGeom>
+            <a:noFill/>
+            <a:ln w="21259">
               <a:solidFill>
                 <a:srgbClr val="7D8998"/>
               </a:solidFill>
@@ -7091,8 +6453,8 @@
           </p:blipFill>
           <p:spPr>
             <a:xfrm>
-              <a:off x="403746" y="2230613"/>
-              <a:ext cx="210176" cy="210176"/>
+              <a:off x="377411" y="2421973"/>
+              <a:ext cx="255104" cy="255104"/>
             </a:xfrm>
             <a:prstGeom prst="rect">
               <a:avLst/>
@@ -7107,8 +6469,8 @@
           </p:nvSpPr>
           <p:spPr>
             <a:xfrm>
-              <a:off x="683980" y="2271772"/>
-              <a:ext cx="1049783" cy="159383"/>
+              <a:off x="717550" y="2471931"/>
+              <a:ext cx="1274193" cy="193454"/>
             </a:xfrm>
             <a:prstGeom prst="rect">
               <a:avLst/>
@@ -7127,7 +6489,7 @@
                 </a:lnSpc>
               </a:pPr>
               <a:r>
-                <a:rPr sz="965" b="1" lang="ko-KR">
+                <a:rPr sz="1171" b="1" lang="ko-KR">
                   <a:solidFill>
                     <a:srgbClr val="7D8998"/>
                   </a:solidFill>
@@ -7162,8 +6524,8 @@
           </p:blipFill>
           <p:spPr>
             <a:xfrm>
-              <a:off x="1507168" y="2580905"/>
-              <a:ext cx="420351" cy="420351"/>
+              <a:off x="1036430" y="2804629"/>
+              <a:ext cx="510209" cy="510209"/>
             </a:xfrm>
             <a:prstGeom prst="rect">
               <a:avLst/>
@@ -7178,8 +6540,8 @@
           </p:nvSpPr>
           <p:spPr>
             <a:xfrm>
-              <a:off x="1081343" y="3042416"/>
-              <a:ext cx="1272000" cy="159383"/>
+              <a:off x="519578" y="3364796"/>
+              <a:ext cx="1543913" cy="193454"/>
             </a:xfrm>
             <a:prstGeom prst="rect">
               <a:avLst/>
@@ -7198,7 +6560,7 @@
                 </a:lnSpc>
               </a:pPr>
               <a:r>
-                <a:rPr sz="965" b="0" lang="ko-KR">
+                <a:rPr sz="1171" b="0" lang="ko-KR">
                   <a:solidFill>
                     <a:srgbClr val="232F3E"/>
                   </a:solidFill>
@@ -7219,8 +6581,8 @@
           </p:nvSpPr>
           <p:spPr>
             <a:xfrm>
-              <a:off x="472710" y="3199172"/>
-              <a:ext cx="2489266" cy="136614"/>
+              <a:off x="526222" y="3555061"/>
+              <a:ext cx="1530626" cy="165818"/>
             </a:xfrm>
             <a:prstGeom prst="rect">
               <a:avLst/>
@@ -7239,7 +6601,7 @@
                 </a:lnSpc>
               </a:pPr>
               <a:r>
-                <a:rPr sz="827" b="0" lang="ko-KR">
+                <a:rPr sz="1004" b="0" lang="ko-KR">
                   <a:solidFill>
                     <a:srgbClr val="545B64"/>
                   </a:solidFill>
@@ -7247,14 +6609,55 @@
                   <a:ea typeface="Malgun Gothic"/>
                   <a:cs typeface="Malgun Gothic"/>
                 </a:rPr>
-                <a:t>outer 172.20.255.1 → 10.255.255.1</a:t>
+                <a:t>src 172.20.255.1</a:t>
+              </a:r>
+            </a:p>
+          </p:txBody>
+        </p:sp>
+        <p:sp>
+          <p:nvSpPr>
+            <p:cNvPr id="10" name="TextBox 9"/>
+            <p:cNvSpPr txBox="1"/>
+            <p:nvPr/>
+          </p:nvSpPr>
+          <p:spPr>
+            <a:xfrm>
+              <a:off x="526222" y="3725131"/>
+              <a:ext cx="1530626" cy="165818"/>
+            </a:xfrm>
+            <a:prstGeom prst="rect">
+              <a:avLst/>
+            </a:prstGeom>
+            <a:noFill/>
+          </p:spPr>
+          <p:txBody>
+            <a:bodyPr wrap="none" lIns="0" rIns="0" tIns="0" bIns="0" anchor="t">
+              <a:noAutofit/>
+            </a:bodyPr>
+            <a:lstStyle/>
+            <a:p>
+              <a:pPr algn="ctr">
+                <a:lnSpc>
+                  <a:spcPct val="100000"/>
+                </a:lnSpc>
+              </a:pPr>
+              <a:r>
+                <a:rPr sz="1004" b="0" lang="ko-KR">
+                  <a:solidFill>
+                    <a:srgbClr val="545B64"/>
+                  </a:solidFill>
+                  <a:latin typeface="Arial"/>
+                  <a:ea typeface="Malgun Gothic"/>
+                  <a:cs typeface="Malgun Gothic"/>
+                </a:rPr>
+                <a:t>dst 10.255.255.1</a:t>
               </a:r>
             </a:p>
           </p:txBody>
         </p:sp>
         <p:pic>
           <p:nvPicPr>
-            <p:cNvPr id="10" name="AWS-Direct-Connect" descr="AWS Direct Connect"/>
+            <p:cNvPr id="11" name="AWS-Direct-Connect" descr="AWS Direct Connect"/>
             <p:cNvPicPr>
               <a:picLocks noChangeAspect="1"/>
             </p:cNvPicPr>
@@ -7274,8 +6677,8 @@
           </p:blipFill>
           <p:spPr>
             <a:xfrm>
-              <a:off x="3608923" y="2580905"/>
-              <a:ext cx="420351" cy="420351"/>
+              <a:off x="2673350" y="2804629"/>
+              <a:ext cx="510209" cy="510209"/>
             </a:xfrm>
             <a:prstGeom prst="rect">
               <a:avLst/>
@@ -7284,14 +6687,14 @@
         </p:pic>
         <p:sp>
           <p:nvSpPr>
-            <p:cNvPr id="11" name="TextBox 10"/>
+            <p:cNvPr id="12" name="TextBox 11"/>
             <p:cNvSpPr txBox="1"/>
             <p:nvPr/>
           </p:nvSpPr>
           <p:spPr>
             <a:xfrm>
-              <a:off x="3167773" y="3042416"/>
-              <a:ext cx="1302650" cy="159383"/>
+              <a:off x="2137897" y="3364796"/>
+              <a:ext cx="1581115" cy="193454"/>
             </a:xfrm>
             <a:prstGeom prst="rect">
               <a:avLst/>
@@ -7310,7 +6713,7 @@
                 </a:lnSpc>
               </a:pPr>
               <a:r>
-                <a:rPr sz="965" b="0" lang="ko-KR">
+                <a:rPr sz="1171" b="0" lang="ko-KR">
                   <a:solidFill>
                     <a:srgbClr val="232F3E"/>
                   </a:solidFill>
@@ -7325,14 +6728,14 @@
         </p:sp>
         <p:sp>
           <p:nvSpPr>
-            <p:cNvPr id="12" name="TextBox 11"/>
+            <p:cNvPr id="13" name="TextBox 12"/>
             <p:cNvSpPr txBox="1"/>
             <p:nvPr/>
           </p:nvSpPr>
           <p:spPr>
             <a:xfrm>
-              <a:off x="3260820" y="3199172"/>
-              <a:ext cx="1116557" cy="136614"/>
+              <a:off x="2250833" y="3555061"/>
+              <a:ext cx="1355242" cy="165818"/>
             </a:xfrm>
             <a:prstGeom prst="rect">
               <a:avLst/>
@@ -7351,7 +6754,7 @@
                 </a:lnSpc>
               </a:pPr>
               <a:r>
-                <a:rPr sz="827" b="0" lang="ko-KR">
+                <a:rPr sz="1004" b="0" lang="ko-KR">
                   <a:solidFill>
                     <a:srgbClr val="545B64"/>
                   </a:solidFill>
@@ -7366,19 +6769,19 @@
         </p:sp>
         <p:cxnSp>
           <p:nvCxnSpPr>
-            <p:cNvPr id="13" name="Connector 12"/>
+            <p:cNvPr id="14" name="Connector 13"/>
             <p:cNvCxnSpPr/>
             <p:nvPr/>
           </p:nvCxnSpPr>
           <p:spPr>
             <a:xfrm>
-              <a:off x="1962548" y="2791081"/>
-              <a:ext cx="1593831" cy="0"/>
+              <a:off x="1589157" y="3059734"/>
+              <a:ext cx="1020417" cy="0"/>
             </a:xfrm>
             <a:prstGeom prst="line">
               <a:avLst/>
             </a:prstGeom>
-            <a:ln w="13136">
+            <a:ln w="15944">
               <a:solidFill>
                 <a:srgbClr val="232F3E"/>
               </a:solidFill>
@@ -7390,14 +6793,14 @@
         </p:cxnSp>
         <p:sp>
           <p:nvSpPr>
-            <p:cNvPr id="14" name="TextBox 13"/>
+            <p:cNvPr id="15" name="TextBox 14"/>
             <p:cNvSpPr txBox="1"/>
             <p:nvPr/>
           </p:nvSpPr>
           <p:spPr>
             <a:xfrm>
-              <a:off x="2729908" y="2621189"/>
-              <a:ext cx="321831" cy="136614"/>
+              <a:off x="2212302" y="2853524"/>
+              <a:ext cx="390629" cy="165818"/>
             </a:xfrm>
             <a:prstGeom prst="rect">
               <a:avLst/>
@@ -7416,7 +6819,7 @@
                 </a:lnSpc>
               </a:pPr>
               <a:r>
-                <a:rPr sz="827" b="0" lang="ko-KR">
+                <a:rPr sz="1004" b="0" lang="ko-KR">
                   <a:solidFill>
                     <a:srgbClr val="232F3E"/>
                   </a:solidFill>
@@ -7431,20 +6834,20 @@
         </p:sp>
         <p:sp>
           <p:nvSpPr>
-            <p:cNvPr id="15" name="Rectangle 14"/>
+            <p:cNvPr id="16" name="Rectangle 15"/>
             <p:cNvSpPr/>
             <p:nvPr/>
           </p:nvSpPr>
           <p:spPr>
             <a:xfrm>
-              <a:off x="4519684" y="1267308"/>
-              <a:ext cx="7303599" cy="5009183"/>
-            </a:xfrm>
-            <a:prstGeom prst="rect">
-              <a:avLst/>
-            </a:prstGeom>
-            <a:noFill/>
-            <a:ln w="17515">
+              <a:off x="3629991" y="1359038"/>
+              <a:ext cx="8205857" cy="4825724"/>
+            </a:xfrm>
+            <a:prstGeom prst="rect">
+              <a:avLst/>
+            </a:prstGeom>
+            <a:noFill/>
+            <a:ln w="21259">
               <a:solidFill>
                 <a:srgbClr val="232F3E"/>
               </a:solidFill>
@@ -7462,7 +6865,7 @@
         </p:sp>
         <p:pic>
           <p:nvPicPr>
-            <p:cNvPr id="16" name="AWS-Cloud-logo_32" descr="AWS Cloud logo_32"/>
+            <p:cNvPr id="17" name="AWS-Cloud-logo_32" descr="AWS Cloud logo_32"/>
             <p:cNvPicPr>
               <a:picLocks noChangeAspect="1"/>
             </p:cNvPicPr>
@@ -7482,8 +6885,8 @@
           </p:blipFill>
           <p:spPr>
             <a:xfrm>
-              <a:off x="4519684" y="1267308"/>
-              <a:ext cx="280234" cy="280234"/>
+              <a:off x="3629991" y="1359038"/>
+              <a:ext cx="340139" cy="340139"/>
             </a:xfrm>
             <a:prstGeom prst="rect">
               <a:avLst/>
@@ -7492,14 +6895,14 @@
         </p:pic>
         <p:sp>
           <p:nvSpPr>
-            <p:cNvPr id="17" name="TextBox 16"/>
+            <p:cNvPr id="18" name="TextBox 17"/>
             <p:cNvSpPr txBox="1"/>
             <p:nvPr/>
           </p:nvSpPr>
           <p:spPr>
             <a:xfrm>
-              <a:off x="4869976" y="1335178"/>
-              <a:ext cx="944148" cy="170768"/>
+              <a:off x="4055165" y="1441415"/>
+              <a:ext cx="1145977" cy="207272"/>
             </a:xfrm>
             <a:prstGeom prst="rect">
               <a:avLst/>
@@ -7518,7 +6921,7 @@
                 </a:lnSpc>
               </a:pPr>
               <a:r>
-                <a:rPr sz="1034" b="1" lang="ko-KR">
+                <a:rPr sz="1255" b="1" lang="ko-KR">
                   <a:solidFill>
                     <a:srgbClr val="232F3E"/>
                   </a:solidFill>
@@ -7533,7 +6936,7 @@
         </p:sp>
         <p:pic>
           <p:nvPicPr>
-            <p:cNvPr id="18" name="AWS-Direct-Connect_Gateway" descr="AWS Direct Connect_Gateway"/>
+            <p:cNvPr id="19" name="AWS-Direct-Connect_Gateway" descr="AWS Direct Connect_Gateway"/>
             <p:cNvPicPr>
               <a:picLocks noChangeAspect="1"/>
             </p:cNvPicPr>
@@ -7553,8 +6956,8 @@
           </p:blipFill>
           <p:spPr>
             <a:xfrm>
-              <a:off x="4922520" y="2580905"/>
-              <a:ext cx="420351" cy="420351"/>
+              <a:off x="3991389" y="2804629"/>
+              <a:ext cx="510209" cy="510209"/>
             </a:xfrm>
             <a:prstGeom prst="rect">
               <a:avLst/>
@@ -7563,14 +6966,14 @@
         </p:pic>
         <p:sp>
           <p:nvSpPr>
-            <p:cNvPr id="19" name="TextBox 18"/>
+            <p:cNvPr id="20" name="TextBox 19"/>
             <p:cNvSpPr txBox="1"/>
             <p:nvPr/>
           </p:nvSpPr>
           <p:spPr>
             <a:xfrm>
-              <a:off x="4902816" y="3042416"/>
-              <a:ext cx="459759" cy="159383"/>
+              <a:off x="3967473" y="3364796"/>
+              <a:ext cx="558041" cy="193454"/>
             </a:xfrm>
             <a:prstGeom prst="rect">
               <a:avLst/>
@@ -7589,7 +6992,7 @@
                 </a:lnSpc>
               </a:pPr>
               <a:r>
-                <a:rPr sz="965" b="0" lang="ko-KR">
+                <a:rPr sz="1171" b="0" lang="ko-KR">
                   <a:solidFill>
                     <a:srgbClr val="232F3E"/>
                   </a:solidFill>
@@ -7604,19 +7007,19 @@
         </p:sp>
         <p:cxnSp>
           <p:nvCxnSpPr>
-            <p:cNvPr id="20" name="Connector 19"/>
+            <p:cNvPr id="21" name="Connector 20"/>
             <p:cNvCxnSpPr/>
             <p:nvPr/>
           </p:nvCxnSpPr>
           <p:spPr>
             <a:xfrm>
-              <a:off x="4064303" y="2791081"/>
-              <a:ext cx="805673" cy="0"/>
+              <a:off x="3226076" y="3059734"/>
+              <a:ext cx="701537" cy="0"/>
             </a:xfrm>
             <a:prstGeom prst="line">
               <a:avLst/>
             </a:prstGeom>
-            <a:ln w="13136">
+            <a:ln w="15944">
               <a:solidFill>
                 <a:srgbClr val="232F3E"/>
               </a:solidFill>
@@ -7628,20 +7031,20 @@
         </p:cxnSp>
         <p:sp>
           <p:nvSpPr>
-            <p:cNvPr id="21" name="Rectangle 20"/>
+            <p:cNvPr id="22" name="Rectangle 21"/>
             <p:cNvSpPr/>
             <p:nvPr/>
           </p:nvSpPr>
           <p:spPr>
             <a:xfrm>
-              <a:off x="5570561" y="1617601"/>
-              <a:ext cx="6077576" cy="4483744"/>
-            </a:xfrm>
-            <a:prstGeom prst="rect">
-              <a:avLst/>
-            </a:prstGeom>
-            <a:noFill/>
-            <a:ln w="17515">
+              <a:off x="4714185" y="1762953"/>
+              <a:ext cx="6994111" cy="4272998"/>
+            </a:xfrm>
+            <a:prstGeom prst="rect">
+              <a:avLst/>
+            </a:prstGeom>
+            <a:noFill/>
+            <a:ln w="21259">
               <a:solidFill>
                 <a:srgbClr val="00A4A6"/>
               </a:solidFill>
@@ -7661,7 +7064,7 @@
         </p:sp>
         <p:pic>
           <p:nvPicPr>
-            <p:cNvPr id="22" name="Region_32" descr="Region_32"/>
+            <p:cNvPr id="23" name="Region_32" descr="Region_32"/>
             <p:cNvPicPr>
               <a:picLocks noChangeAspect="1"/>
             </p:cNvPicPr>
@@ -7681,8 +7084,8 @@
           </p:blipFill>
           <p:spPr>
             <a:xfrm>
-              <a:off x="5570561" y="1617601"/>
-              <a:ext cx="210176" cy="210176"/>
+              <a:off x="4714185" y="1762953"/>
+              <a:ext cx="255104" cy="255104"/>
             </a:xfrm>
             <a:prstGeom prst="rect">
               <a:avLst/>
@@ -7691,14 +7094,14 @@
         </p:pic>
         <p:sp>
           <p:nvSpPr>
-            <p:cNvPr id="23" name="TextBox 22"/>
+            <p:cNvPr id="24" name="TextBox 23"/>
             <p:cNvSpPr txBox="1"/>
             <p:nvPr/>
           </p:nvSpPr>
           <p:spPr>
             <a:xfrm>
-              <a:off x="5850795" y="1658760"/>
-              <a:ext cx="1892674" cy="159383"/>
+              <a:off x="5054324" y="1812911"/>
+              <a:ext cx="2297268" cy="193454"/>
             </a:xfrm>
             <a:prstGeom prst="rect">
               <a:avLst/>
@@ -7717,7 +7120,7 @@
                 </a:lnSpc>
               </a:pPr>
               <a:r>
-                <a:rPr sz="965" b="1" lang="ko-KR">
+                <a:rPr sz="1171" b="1" lang="ko-KR">
                   <a:solidFill>
                     <a:srgbClr val="00A4A6"/>
                   </a:solidFill>
@@ -7732,7 +7135,7 @@
         </p:sp>
         <p:pic>
           <p:nvPicPr>
-            <p:cNvPr id="24" name="AWS-Transit-Gateway" descr="AWS Transit Gateway"/>
+            <p:cNvPr id="25" name="AWS-Transit-Gateway" descr="AWS Transit Gateway"/>
             <p:cNvPicPr>
               <a:picLocks noChangeAspect="1"/>
             </p:cNvPicPr>
@@ -7752,8 +7155,8 @@
           </p:blipFill>
           <p:spPr>
             <a:xfrm>
-              <a:off x="6148544" y="2580905"/>
-              <a:ext cx="420351" cy="420351"/>
+              <a:off x="5224393" y="2804629"/>
+              <a:ext cx="510209" cy="510209"/>
             </a:xfrm>
             <a:prstGeom prst="rect">
               <a:avLst/>
@@ -7762,14 +7165,14 @@
         </p:pic>
         <p:sp>
           <p:nvSpPr>
-            <p:cNvPr id="25" name="TextBox 24"/>
+            <p:cNvPr id="26" name="TextBox 25"/>
             <p:cNvSpPr txBox="1"/>
             <p:nvPr/>
           </p:nvSpPr>
           <p:spPr>
             <a:xfrm>
-              <a:off x="5665250" y="3042416"/>
-              <a:ext cx="1386940" cy="159383"/>
+              <a:off x="5251631" y="3364796"/>
+              <a:ext cx="455733" cy="193454"/>
             </a:xfrm>
             <a:prstGeom prst="rect">
               <a:avLst/>
@@ -7788,7 +7191,7 @@
                 </a:lnSpc>
               </a:pPr>
               <a:r>
-                <a:rPr sz="965" b="0" lang="ko-KR">
+                <a:rPr sz="1171" b="0" lang="ko-KR">
                   <a:solidFill>
                     <a:srgbClr val="232F3E"/>
                   </a:solidFill>
@@ -7796,26 +7199,26 @@
                   <a:ea typeface="Malgun Gothic"/>
                   <a:cs typeface="Malgun Gothic"/>
                 </a:rPr>
-                <a:t>Transit Gateway</a:t>
+                <a:t>TGW</a:t>
               </a:r>
             </a:p>
           </p:txBody>
         </p:sp>
         <p:cxnSp>
           <p:nvCxnSpPr>
-            <p:cNvPr id="26" name="Connector 25"/>
+            <p:cNvPr id="27" name="Connector 26"/>
             <p:cNvCxnSpPr/>
             <p:nvPr/>
           </p:nvCxnSpPr>
           <p:spPr>
             <a:xfrm>
-              <a:off x="5377900" y="2791081"/>
-              <a:ext cx="718100" cy="0"/>
+              <a:off x="4544115" y="3059734"/>
+              <a:ext cx="616502" cy="0"/>
             </a:xfrm>
             <a:prstGeom prst="line">
               <a:avLst/>
             </a:prstGeom>
-            <a:ln w="13136">
+            <a:ln w="15944">
               <a:solidFill>
                 <a:srgbClr val="232F3E"/>
               </a:solidFill>
@@ -7825,198 +7228,9 @@
             </a:ln>
           </p:spPr>
         </p:cxnSp>
-        <p:sp>
-          <p:nvSpPr>
-            <p:cNvPr id="27" name="Rounded Rectangle 26"/>
-            <p:cNvSpPr/>
-            <p:nvPr/>
-          </p:nvSpPr>
-          <p:spPr>
-            <a:xfrm>
-              <a:off x="5701921" y="3281490"/>
-              <a:ext cx="1313597" cy="507924"/>
-            </a:xfrm>
-            <a:prstGeom prst="roundRect">
-              <a:avLst>
-                <a:gd name="adj" fmla="val 10344"/>
-              </a:avLst>
-            </a:prstGeom>
-            <a:solidFill>
-              <a:srgbClr val="F2F3F3"/>
-            </a:solidFill>
-            <a:ln w="8757">
-              <a:solidFill>
-                <a:srgbClr val="7D8998"/>
-              </a:solidFill>
-              <a:prstDash val="solid"/>
-              <a:miter lim="800000"/>
-            </a:ln>
-          </p:spPr>
-          <p:txBody>
-            <a:bodyPr rtlCol="0" anchor="ctr"/>
-            <a:lstStyle/>
-            <a:p>
-              <a:pPr algn="ctr"/>
-            </a:p>
-          </p:txBody>
-        </p:sp>
-        <p:sp>
-          <p:nvSpPr>
-            <p:cNvPr id="28" name="TextBox 27"/>
-            <p:cNvSpPr txBox="1"/>
-            <p:nvPr/>
-          </p:nvSpPr>
-          <p:spPr>
-            <a:xfrm>
-              <a:off x="5731477" y="3339289"/>
-              <a:ext cx="1254485" cy="136614"/>
-            </a:xfrm>
-            <a:prstGeom prst="rect">
-              <a:avLst/>
-            </a:prstGeom>
-            <a:noFill/>
-          </p:spPr>
-          <p:txBody>
-            <a:bodyPr wrap="none" lIns="0" rIns="0" tIns="0" bIns="0" anchor="t">
-              <a:noAutofit/>
-            </a:bodyPr>
-            <a:lstStyle/>
-            <a:p>
-              <a:pPr algn="ctr">
-                <a:lnSpc>
-                  <a:spcPct val="100000"/>
-                </a:lnSpc>
-              </a:pPr>
-              <a:r>
-                <a:rPr sz="827" b="1" lang="ko-KR">
-                  <a:solidFill>
-                    <a:srgbClr val="232F3E"/>
-                  </a:solidFill>
-                  <a:latin typeface="Arial"/>
-                  <a:ea typeface="Malgun Gothic"/>
-                  <a:cs typeface="Malgun Gothic"/>
-                </a:rPr>
-                <a:t>TGW 라우팅 테이블</a:t>
-              </a:r>
-            </a:p>
-          </p:txBody>
-        </p:sp>
-        <p:sp>
-          <p:nvSpPr>
-            <p:cNvPr id="29" name="TextBox 28"/>
-            <p:cNvSpPr txBox="1"/>
-            <p:nvPr/>
-          </p:nvSpPr>
-          <p:spPr>
-            <a:xfrm>
-              <a:off x="5764317" y="3479406"/>
-              <a:ext cx="1188805" cy="136614"/>
-            </a:xfrm>
-            <a:prstGeom prst="rect">
-              <a:avLst/>
-            </a:prstGeom>
-            <a:noFill/>
-          </p:spPr>
-          <p:txBody>
-            <a:bodyPr wrap="none" lIns="0" rIns="0" tIns="0" bIns="0" anchor="t">
-              <a:noAutofit/>
-            </a:bodyPr>
-            <a:lstStyle/>
-            <a:p>
-              <a:pPr algn="ctr">
-                <a:lnSpc>
-                  <a:spcPct val="100000"/>
-                </a:lnSpc>
-              </a:pPr>
-              <a:r>
-                <a:rPr sz="827" b="0" lang="ko-KR">
-                  <a:solidFill>
-                    <a:srgbClr val="232F3E"/>
-                  </a:solidFill>
-                  <a:latin typeface="Arial"/>
-                  <a:ea typeface="Malgun Gothic"/>
-                  <a:cs typeface="Malgun Gothic"/>
-                </a:rPr>
-                <a:t>10.255.255.1/32</a:t>
-              </a:r>
-            </a:p>
-          </p:txBody>
-        </p:sp>
-        <p:sp>
-          <p:nvSpPr>
-            <p:cNvPr id="30" name="TextBox 29"/>
-            <p:cNvSpPr txBox="1"/>
-            <p:nvPr/>
-          </p:nvSpPr>
-          <p:spPr>
-            <a:xfrm>
-              <a:off x="5488461" y="3619523"/>
-              <a:ext cx="1740516" cy="136614"/>
-            </a:xfrm>
-            <a:prstGeom prst="rect">
-              <a:avLst/>
-            </a:prstGeom>
-            <a:noFill/>
-          </p:spPr>
-          <p:txBody>
-            <a:bodyPr wrap="none" lIns="0" rIns="0" tIns="0" bIns="0" anchor="t">
-              <a:noAutofit/>
-            </a:bodyPr>
-            <a:lstStyle/>
-            <a:p>
-              <a:pPr algn="ctr">
-                <a:lnSpc>
-                  <a:spcPct val="100000"/>
-                </a:lnSpc>
-              </a:pPr>
-              <a:r>
-                <a:rPr sz="827" b="0" lang="ko-KR">
-                  <a:solidFill>
-                    <a:srgbClr val="232F3E"/>
-                  </a:solidFill>
-                  <a:latin typeface="Arial"/>
-                  <a:ea typeface="Malgun Gothic"/>
-                  <a:cs typeface="Malgun Gothic"/>
-                </a:rPr>
-                <a:t>→ VPC attachment (정적)</a:t>
-              </a:r>
-            </a:p>
-          </p:txBody>
-        </p:sp>
-        <p:sp>
-          <p:nvSpPr>
-            <p:cNvPr id="31" name="Rectangle 30"/>
-            <p:cNvSpPr/>
-            <p:nvPr/>
-          </p:nvSpPr>
-          <p:spPr>
-            <a:xfrm>
-              <a:off x="7234451" y="1967893"/>
-              <a:ext cx="4238540" cy="3765645"/>
-            </a:xfrm>
-            <a:prstGeom prst="rect">
-              <a:avLst/>
-            </a:prstGeom>
-            <a:noFill/>
-            <a:ln w="17515">
-              <a:solidFill>
-                <a:srgbClr val="8C4FFF"/>
-              </a:solidFill>
-              <a:prstDash val="solid"/>
-              <a:miter lim="800000"/>
-            </a:ln>
-          </p:spPr>
-          <p:txBody>
-            <a:bodyPr rtlCol="0" anchor="ctr"/>
-            <a:lstStyle/>
-            <a:p>
-              <a:pPr algn="ctr"/>
-            </a:p>
-          </p:txBody>
-        </p:sp>
         <p:pic>
           <p:nvPicPr>
-            <p:cNvPr id="32" name="Virtual-private-cloud-VPC_32" descr="Virtual private cloud VPC_32"/>
+            <p:cNvPr id="28" name="Amazon-Route-53_Route-Table" descr="Amazon Route 53_Route Table"/>
             <p:cNvPicPr>
               <a:picLocks noChangeAspect="1"/>
             </p:cNvPicPr>
@@ -8036,14 +7250,163 @@
           </p:blipFill>
           <p:spPr>
             <a:xfrm>
-              <a:off x="7234451" y="1967893"/>
-              <a:ext cx="210176" cy="210176"/>
+              <a:off x="5224393" y="4250221"/>
+              <a:ext cx="510209" cy="510209"/>
             </a:xfrm>
             <a:prstGeom prst="rect">
               <a:avLst/>
             </a:prstGeom>
           </p:spPr>
         </p:pic>
+        <p:sp>
+          <p:nvSpPr>
+            <p:cNvPr id="29" name="TextBox 28"/>
+            <p:cNvSpPr txBox="1"/>
+            <p:nvPr/>
+          </p:nvSpPr>
+          <p:spPr>
+            <a:xfrm>
+              <a:off x="4591283" y="4810387"/>
+              <a:ext cx="1776430" cy="193454"/>
+            </a:xfrm>
+            <a:prstGeom prst="rect">
+              <a:avLst/>
+            </a:prstGeom>
+            <a:noFill/>
+          </p:spPr>
+          <p:txBody>
+            <a:bodyPr wrap="none" lIns="0" rIns="0" tIns="0" bIns="0" anchor="t">
+              <a:noAutofit/>
+            </a:bodyPr>
+            <a:lstStyle/>
+            <a:p>
+              <a:pPr algn="ctr">
+                <a:lnSpc>
+                  <a:spcPct val="100000"/>
+                </a:lnSpc>
+              </a:pPr>
+              <a:r>
+                <a:rPr sz="1171" b="0" lang="ko-KR">
+                  <a:solidFill>
+                    <a:srgbClr val="232F3E"/>
+                  </a:solidFill>
+                  <a:latin typeface="Arial"/>
+                  <a:ea typeface="Malgun Gothic"/>
+                  <a:cs typeface="Malgun Gothic"/>
+                </a:rPr>
+                <a:t>TGW 라우팅 테이블</a:t>
+              </a:r>
+            </a:p>
+          </p:txBody>
+        </p:sp>
+        <p:sp>
+          <p:nvSpPr>
+            <p:cNvPr id="30" name="TextBox 29"/>
+            <p:cNvSpPr txBox="1"/>
+            <p:nvPr/>
+          </p:nvSpPr>
+          <p:spPr>
+            <a:xfrm>
+              <a:off x="4758031" y="5000653"/>
+              <a:ext cx="1442934" cy="165818"/>
+            </a:xfrm>
+            <a:prstGeom prst="rect">
+              <a:avLst/>
+            </a:prstGeom>
+            <a:noFill/>
+          </p:spPr>
+          <p:txBody>
+            <a:bodyPr wrap="none" lIns="0" rIns="0" tIns="0" bIns="0" anchor="t">
+              <a:noAutofit/>
+            </a:bodyPr>
+            <a:lstStyle/>
+            <a:p>
+              <a:pPr algn="ctr">
+                <a:lnSpc>
+                  <a:spcPct val="100000"/>
+                </a:lnSpc>
+              </a:pPr>
+              <a:r>
+                <a:rPr sz="1004" b="0" lang="ko-KR">
+                  <a:solidFill>
+                    <a:srgbClr val="545B64"/>
+                  </a:solidFill>
+                  <a:latin typeface="Arial"/>
+                  <a:ea typeface="Malgun Gothic"/>
+                  <a:cs typeface="Malgun Gothic"/>
+                </a:rPr>
+                <a:t>10.255.255.1/32</a:t>
+              </a:r>
+            </a:p>
+          </p:txBody>
+        </p:sp>
+        <p:sp>
+          <p:nvSpPr>
+            <p:cNvPr id="31" name="TextBox 30"/>
+            <p:cNvSpPr txBox="1"/>
+            <p:nvPr/>
+          </p:nvSpPr>
+          <p:spPr>
+            <a:xfrm>
+              <a:off x="4730129" y="5170722"/>
+              <a:ext cx="1498738" cy="165818"/>
+            </a:xfrm>
+            <a:prstGeom prst="rect">
+              <a:avLst/>
+            </a:prstGeom>
+            <a:noFill/>
+          </p:spPr>
+          <p:txBody>
+            <a:bodyPr wrap="none" lIns="0" rIns="0" tIns="0" bIns="0" anchor="t">
+              <a:noAutofit/>
+            </a:bodyPr>
+            <a:lstStyle/>
+            <a:p>
+              <a:pPr algn="ctr">
+                <a:lnSpc>
+                  <a:spcPct val="100000"/>
+                </a:lnSpc>
+              </a:pPr>
+              <a:r>
+                <a:rPr sz="1004" b="0" lang="ko-KR">
+                  <a:solidFill>
+                    <a:srgbClr val="545B64"/>
+                  </a:solidFill>
+                  <a:latin typeface="Arial"/>
+                  <a:ea typeface="Malgun Gothic"/>
+                  <a:cs typeface="Malgun Gothic"/>
+                </a:rPr>
+                <a:t>→ VPC att (정적)</a:t>
+              </a:r>
+            </a:p>
+          </p:txBody>
+        </p:sp>
+        <p:cxnSp>
+          <p:nvCxnSpPr>
+            <p:cNvPr id="32" name="Connector 31"/>
+            <p:cNvCxnSpPr/>
+            <p:nvPr/>
+          </p:nvCxnSpPr>
+          <p:spPr>
+            <a:xfrm>
+              <a:off x="5479498" y="3569942"/>
+              <a:ext cx="0" cy="637761"/>
+            </a:xfrm>
+            <a:prstGeom prst="line">
+              <a:avLst/>
+            </a:prstGeom>
+            <a:ln w="15944">
+              <a:solidFill>
+                <a:srgbClr val="232F3E"/>
+              </a:solidFill>
+              <a:custDash>
+                <a:ds d="400000" sp="266667"/>
+              </a:custDash>
+              <a:miter lim="800000"/>
+              <a:tailEnd type="triangle" w="med" len="med"/>
+            </a:ln>
+          </p:spPr>
+        </p:cxnSp>
         <p:sp>
           <p:nvSpPr>
             <p:cNvPr id="33" name="TextBox 32"/>
@@ -8052,8 +7415,8 @@
           </p:nvSpPr>
           <p:spPr>
             <a:xfrm>
-              <a:off x="7514685" y="2009053"/>
-              <a:ext cx="1386940" cy="159383"/>
+              <a:off x="5564533" y="3810166"/>
+              <a:ext cx="446433" cy="165818"/>
             </a:xfrm>
             <a:prstGeom prst="rect">
               <a:avLst/>
@@ -8072,15 +7435,15 @@
                 </a:lnSpc>
               </a:pPr>
               <a:r>
-                <a:rPr sz="965" b="1" lang="ko-KR">
+                <a:rPr sz="1004" b="0" lang="ko-KR">
                   <a:solidFill>
-                    <a:srgbClr val="8C4FFF"/>
+                    <a:srgbClr val="232F3E"/>
                   </a:solidFill>
                   <a:latin typeface="Arial"/>
                   <a:ea typeface="Malgun Gothic"/>
                   <a:cs typeface="Malgun Gothic"/>
                 </a:rPr>
-                <a:t>VPC 10.1.1.0/24</a:t>
+                <a:t>조회</a:t>
               </a:r>
             </a:p>
           </p:txBody>
@@ -8093,16 +7456,16 @@
           </p:nvSpPr>
           <p:spPr>
             <a:xfrm>
-              <a:off x="7409597" y="2283157"/>
-              <a:ext cx="1926609" cy="1874065"/>
-            </a:xfrm>
-            <a:prstGeom prst="rect">
-              <a:avLst/>
-            </a:prstGeom>
-            <a:noFill/>
-            <a:ln w="13136">
+              <a:off x="6351104" y="2145610"/>
+              <a:ext cx="5229639" cy="3465167"/>
+            </a:xfrm>
+            <a:prstGeom prst="rect">
+              <a:avLst/>
+            </a:prstGeom>
+            <a:noFill/>
+            <a:ln w="21259">
               <a:solidFill>
-                <a:srgbClr val="00A4A6"/>
+                <a:srgbClr val="8C4FFF"/>
               </a:solidFill>
               <a:prstDash val="solid"/>
               <a:miter lim="800000"/>
@@ -8118,7 +7481,7 @@
         </p:sp>
         <p:pic>
           <p:nvPicPr>
-            <p:cNvPr id="35" name="Private-subnet_32" descr="Private subnet_32"/>
+            <p:cNvPr id="35" name="Virtual-private-cloud-VPC_32" descr="Virtual private cloud VPC_32"/>
             <p:cNvPicPr>
               <a:picLocks noChangeAspect="1"/>
             </p:cNvPicPr>
@@ -8138,8 +7501,8 @@
           </p:blipFill>
           <p:spPr>
             <a:xfrm>
-              <a:off x="7409597" y="2283157"/>
-              <a:ext cx="210176" cy="210176"/>
+              <a:off x="6351104" y="2145610"/>
+              <a:ext cx="255104" cy="255104"/>
             </a:xfrm>
             <a:prstGeom prst="rect">
               <a:avLst/>
@@ -8154,8 +7517,8 @@
           </p:nvSpPr>
           <p:spPr>
             <a:xfrm>
-              <a:off x="7689831" y="2324316"/>
-              <a:ext cx="1471229" cy="159383"/>
+              <a:off x="6691243" y="2195568"/>
+              <a:ext cx="1683423" cy="193454"/>
             </a:xfrm>
             <a:prstGeom prst="rect">
               <a:avLst/>
@@ -8174,15 +7537,15 @@
                 </a:lnSpc>
               </a:pPr>
               <a:r>
-                <a:rPr sz="965" b="1" lang="ko-KR">
+                <a:rPr sz="1171" b="1" lang="ko-KR">
                   <a:solidFill>
-                    <a:srgbClr val="00A4A6"/>
+                    <a:srgbClr val="8C4FFF"/>
                   </a:solidFill>
                   <a:latin typeface="Arial"/>
                   <a:ea typeface="Malgun Gothic"/>
                   <a:cs typeface="Malgun Gothic"/>
                 </a:rPr>
-                <a:t>TGW subnet · AZ1</a:t>
+                <a:t>VPC 10.1.1.0/24</a:t>
               </a:r>
             </a:p>
           </p:txBody>
@@ -8195,14 +7558,14 @@
           </p:nvSpPr>
           <p:spPr>
             <a:xfrm>
-              <a:off x="9546381" y="2283157"/>
-              <a:ext cx="1751463" cy="1874065"/>
-            </a:xfrm>
-            <a:prstGeom prst="rect">
-              <a:avLst/>
-            </a:prstGeom>
-            <a:noFill/>
-            <a:ln w="13136">
+              <a:off x="7796696" y="2464490"/>
+              <a:ext cx="1806989" cy="2976217"/>
+            </a:xfrm>
+            <a:prstGeom prst="rect">
+              <a:avLst/>
+            </a:prstGeom>
+            <a:noFill/>
+            <a:ln w="15944">
               <a:solidFill>
                 <a:srgbClr val="00A4A6"/>
               </a:solidFill>
@@ -8221,179 +7584,6 @@
         <p:pic>
           <p:nvPicPr>
             <p:cNvPr id="38" name="Private-subnet_32" descr="Private subnet_32"/>
-            <p:cNvPicPr>
-              <a:picLocks noChangeAspect="1"/>
-            </p:cNvPicPr>
-            <p:nvPr/>
-          </p:nvPicPr>
-          <p:blipFill>
-            <a:blip r:embed="rId18">
-              <a:extLst>
-                <a:ext uri="{96DAC541-7B7A-43D3-8B79-37D633B846F1}">
-                  <asvg:svgBlip xmlns:asvg="http://schemas.microsoft.com/office/drawing/2016/SVG/main" r:embed="rId19"/>
-                </a:ext>
-              </a:extLst>
-            </a:blip>
-            <a:stretch>
-              <a:fillRect/>
-            </a:stretch>
-          </p:blipFill>
-          <p:spPr>
-            <a:xfrm>
-              <a:off x="9546381" y="2283157"/>
-              <a:ext cx="210176" cy="210176"/>
-            </a:xfrm>
-            <a:prstGeom prst="rect">
-              <a:avLst/>
-            </a:prstGeom>
-          </p:spPr>
-        </p:pic>
-        <p:sp>
-          <p:nvSpPr>
-            <p:cNvPr id="39" name="TextBox 38"/>
-            <p:cNvSpPr txBox="1"/>
-            <p:nvPr/>
-          </p:nvSpPr>
-          <p:spPr>
-            <a:xfrm>
-              <a:off x="9826616" y="2324316"/>
-              <a:ext cx="1724096" cy="159383"/>
-            </a:xfrm>
-            <a:prstGeom prst="rect">
-              <a:avLst/>
-            </a:prstGeom>
-            <a:noFill/>
-          </p:spPr>
-          <p:txBody>
-            <a:bodyPr wrap="none" lIns="0" rIns="0" tIns="0" bIns="0" anchor="t">
-              <a:noAutofit/>
-            </a:bodyPr>
-            <a:lstStyle/>
-            <a:p>
-              <a:pPr algn="l">
-                <a:lnSpc>
-                  <a:spcPct val="100000"/>
-                </a:lnSpc>
-              </a:pPr>
-              <a:r>
-                <a:rPr sz="965" b="1" lang="ko-KR">
-                  <a:solidFill>
-                    <a:srgbClr val="00A4A6"/>
-                  </a:solidFill>
-                  <a:latin typeface="Arial"/>
-                  <a:ea typeface="Malgun Gothic"/>
-                  <a:cs typeface="Malgun Gothic"/>
-                </a:rPr>
-                <a:t>Router subnet · AZ1</a:t>
-              </a:r>
-            </a:p>
-          </p:txBody>
-        </p:sp>
-        <p:sp>
-          <p:nvSpPr>
-            <p:cNvPr id="40" name="Rectangle 39"/>
-            <p:cNvSpPr/>
-            <p:nvPr/>
-          </p:nvSpPr>
-          <p:spPr>
-            <a:xfrm>
-              <a:off x="9546381" y="4332368"/>
-              <a:ext cx="1751463" cy="1226024"/>
-            </a:xfrm>
-            <a:prstGeom prst="rect">
-              <a:avLst/>
-            </a:prstGeom>
-            <a:noFill/>
-            <a:ln w="13136">
-              <a:solidFill>
-                <a:srgbClr val="00A4A6"/>
-              </a:solidFill>
-              <a:prstDash val="solid"/>
-              <a:miter lim="800000"/>
-            </a:ln>
-          </p:spPr>
-          <p:txBody>
-            <a:bodyPr rtlCol="0" anchor="ctr"/>
-            <a:lstStyle/>
-            <a:p>
-              <a:pPr algn="ctr"/>
-            </a:p>
-          </p:txBody>
-        </p:sp>
-        <p:pic>
-          <p:nvPicPr>
-            <p:cNvPr id="41" name="Private-subnet_32" descr="Private subnet_32"/>
-            <p:cNvPicPr>
-              <a:picLocks noChangeAspect="1"/>
-            </p:cNvPicPr>
-            <p:nvPr/>
-          </p:nvPicPr>
-          <p:blipFill>
-            <a:blip r:embed="rId18">
-              <a:extLst>
-                <a:ext uri="{96DAC541-7B7A-43D3-8B79-37D633B846F1}">
-                  <asvg:svgBlip xmlns:asvg="http://schemas.microsoft.com/office/drawing/2016/SVG/main" r:embed="rId19"/>
-                </a:ext>
-              </a:extLst>
-            </a:blip>
-            <a:stretch>
-              <a:fillRect/>
-            </a:stretch>
-          </p:blipFill>
-          <p:spPr>
-            <a:xfrm>
-              <a:off x="9546381" y="4332368"/>
-              <a:ext cx="210176" cy="210176"/>
-            </a:xfrm>
-            <a:prstGeom prst="rect">
-              <a:avLst/>
-            </a:prstGeom>
-          </p:spPr>
-        </p:pic>
-        <p:sp>
-          <p:nvSpPr>
-            <p:cNvPr id="42" name="TextBox 41"/>
-            <p:cNvSpPr txBox="1"/>
-            <p:nvPr/>
-          </p:nvSpPr>
-          <p:spPr>
-            <a:xfrm>
-              <a:off x="9826616" y="4373527"/>
-              <a:ext cx="1724096" cy="159383"/>
-            </a:xfrm>
-            <a:prstGeom prst="rect">
-              <a:avLst/>
-            </a:prstGeom>
-            <a:noFill/>
-          </p:spPr>
-          <p:txBody>
-            <a:bodyPr wrap="none" lIns="0" rIns="0" tIns="0" bIns="0" anchor="t">
-              <a:noAutofit/>
-            </a:bodyPr>
-            <a:lstStyle/>
-            <a:p>
-              <a:pPr algn="l">
-                <a:lnSpc>
-                  <a:spcPct val="100000"/>
-                </a:lnSpc>
-              </a:pPr>
-              <a:r>
-                <a:rPr sz="965" b="1" lang="ko-KR">
-                  <a:solidFill>
-                    <a:srgbClr val="00A4A6"/>
-                  </a:solidFill>
-                  <a:latin typeface="Arial"/>
-                  <a:ea typeface="Malgun Gothic"/>
-                  <a:cs typeface="Malgun Gothic"/>
-                </a:rPr>
-                <a:t>Router subnet · AZ2</a:t>
-              </a:r>
-            </a:p>
-          </p:txBody>
-        </p:sp>
-        <p:pic>
-          <p:nvPicPr>
-            <p:cNvPr id="43" name="AWS-Transit-Gateway_Attachment" descr="AWS Transit Gateway_Attachment"/>
             <p:cNvPicPr>
               <a:picLocks noChangeAspect="1"/>
             </p:cNvPicPr>
@@ -8413,8 +7603,8 @@
           </p:blipFill>
           <p:spPr>
             <a:xfrm>
-              <a:off x="8162726" y="2580905"/>
-              <a:ext cx="420351" cy="420351"/>
+              <a:off x="7796696" y="2464490"/>
+              <a:ext cx="255104" cy="255104"/>
             </a:xfrm>
             <a:prstGeom prst="rect">
               <a:avLst/>
@@ -8423,14 +7613,14 @@
         </p:pic>
         <p:sp>
           <p:nvSpPr>
-            <p:cNvPr id="44" name="TextBox 43"/>
+            <p:cNvPr id="39" name="TextBox 38"/>
             <p:cNvSpPr txBox="1"/>
             <p:nvPr/>
           </p:nvSpPr>
           <p:spPr>
             <a:xfrm>
-              <a:off x="7552998" y="3042416"/>
-              <a:ext cx="1639807" cy="159383"/>
+              <a:off x="8136835" y="2514448"/>
+              <a:ext cx="1785730" cy="193454"/>
             </a:xfrm>
             <a:prstGeom prst="rect">
               <a:avLst/>
@@ -8443,71 +7633,43 @@
             </a:bodyPr>
             <a:lstStyle/>
             <a:p>
-              <a:pPr algn="ctr">
+              <a:pPr algn="l">
                 <a:lnSpc>
                   <a:spcPct val="100000"/>
                 </a:lnSpc>
               </a:pPr>
               <a:r>
-                <a:rPr sz="965" b="0" lang="ko-KR">
+                <a:rPr sz="1171" b="1" lang="ko-KR">
                   <a:solidFill>
-                    <a:srgbClr val="232F3E"/>
+                    <a:srgbClr val="00A4A6"/>
                   </a:solidFill>
                   <a:latin typeface="Arial"/>
                   <a:ea typeface="Malgun Gothic"/>
                   <a:cs typeface="Malgun Gothic"/>
                 </a:rPr>
-                <a:t>TGW attachment ENI</a:t>
+                <a:t>TGW subnet · AZ1</a:t>
               </a:r>
             </a:p>
           </p:txBody>
         </p:sp>
-        <p:cxnSp>
-          <p:nvCxnSpPr>
-            <p:cNvPr id="45" name="Connector 44"/>
-            <p:cNvCxnSpPr/>
-            <p:nvPr/>
-          </p:nvCxnSpPr>
-          <p:spPr>
-            <a:xfrm>
-              <a:off x="6603924" y="2791081"/>
-              <a:ext cx="1506258" cy="0"/>
-            </a:xfrm>
-            <a:prstGeom prst="line">
-              <a:avLst/>
-            </a:prstGeom>
-            <a:ln w="13136">
+        <p:sp>
+          <p:nvSpPr>
+            <p:cNvPr id="40" name="Rectangle 39"/>
+            <p:cNvSpPr/>
+            <p:nvPr/>
+          </p:nvSpPr>
+          <p:spPr>
+            <a:xfrm>
+              <a:off x="9816272" y="2464490"/>
+              <a:ext cx="1594402" cy="1296780"/>
+            </a:xfrm>
+            <a:prstGeom prst="rect">
+              <a:avLst/>
+            </a:prstGeom>
+            <a:noFill/>
+            <a:ln w="15944">
               <a:solidFill>
-                <a:srgbClr val="232F3E"/>
-              </a:solidFill>
-              <a:prstDash val="solid"/>
-              <a:miter lim="800000"/>
-              <a:tailEnd type="triangle" w="med" len="med"/>
-            </a:ln>
-          </p:spPr>
-        </p:cxnSp>
-        <p:sp>
-          <p:nvSpPr>
-            <p:cNvPr id="46" name="Rounded Rectangle 45"/>
-            <p:cNvSpPr/>
-            <p:nvPr/>
-          </p:nvSpPr>
-          <p:spPr>
-            <a:xfrm>
-              <a:off x="7584743" y="3281490"/>
-              <a:ext cx="1576316" cy="507924"/>
-            </a:xfrm>
-            <a:prstGeom prst="roundRect">
-              <a:avLst>
-                <a:gd name="adj" fmla="val 10344"/>
-              </a:avLst>
-            </a:prstGeom>
-            <a:solidFill>
-              <a:srgbClr val="F2F3F3"/>
-            </a:solidFill>
-            <a:ln w="13136">
-              <a:solidFill>
-                <a:srgbClr val="232F3E"/>
+                <a:srgbClr val="00A4A6"/>
               </a:solidFill>
               <a:prstDash val="solid"/>
               <a:miter lim="800000"/>
@@ -8521,16 +7683,46 @@
             </a:p>
           </p:txBody>
         </p:sp>
-        <p:sp>
-          <p:nvSpPr>
-            <p:cNvPr id="47" name="TextBox 46"/>
+        <p:pic>
+          <p:nvPicPr>
+            <p:cNvPr id="41" name="Private-subnet_32" descr="Private subnet_32"/>
+            <p:cNvPicPr>
+              <a:picLocks noChangeAspect="1"/>
+            </p:cNvPicPr>
+            <p:nvPr/>
+          </p:nvPicPr>
+          <p:blipFill>
+            <a:blip r:embed="rId20">
+              <a:extLst>
+                <a:ext uri="{96DAC541-7B7A-43D3-8B79-37D633B846F1}">
+                  <asvg:svgBlip xmlns:asvg="http://schemas.microsoft.com/office/drawing/2016/SVG/main" r:embed="rId21"/>
+                </a:ext>
+              </a:extLst>
+            </a:blip>
+            <a:stretch>
+              <a:fillRect/>
+            </a:stretch>
+          </p:blipFill>
+          <p:spPr>
+            <a:xfrm>
+              <a:off x="9816272" y="2464490"/>
+              <a:ext cx="255104" cy="255104"/>
+            </a:xfrm>
+            <a:prstGeom prst="rect">
+              <a:avLst/>
+            </a:prstGeom>
+          </p:spPr>
+        </p:pic>
+        <p:sp>
+          <p:nvSpPr>
+            <p:cNvPr id="42" name="TextBox 41"/>
             <p:cNvSpPr txBox="1"/>
             <p:nvPr/>
           </p:nvSpPr>
           <p:spPr>
             <a:xfrm>
-              <a:off x="7551903" y="3339289"/>
-              <a:ext cx="1641996" cy="136614"/>
+              <a:off x="10156411" y="2514448"/>
+              <a:ext cx="1376501" cy="193454"/>
             </a:xfrm>
             <a:prstGeom prst="rect">
               <a:avLst/>
@@ -8543,35 +7735,96 @@
             </a:bodyPr>
             <a:lstStyle/>
             <a:p>
-              <a:pPr algn="ctr">
+              <a:pPr algn="l">
                 <a:lnSpc>
                   <a:spcPct val="100000"/>
                 </a:lnSpc>
               </a:pPr>
               <a:r>
-                <a:rPr sz="827" b="1" lang="ko-KR">
+                <a:rPr sz="1171" b="1" lang="ko-KR">
                   <a:solidFill>
-                    <a:srgbClr val="232F3E"/>
+                    <a:srgbClr val="00A4A6"/>
                   </a:solidFill>
                   <a:latin typeface="Arial"/>
                   <a:ea typeface="Malgun Gothic"/>
                   <a:cs typeface="Malgun Gothic"/>
                 </a:rPr>
-                <a:t>tgw-rtb 조회 ← RS 주입</a:t>
+                <a:t>Router · AZ1</a:t>
               </a:r>
             </a:p>
           </p:txBody>
         </p:sp>
         <p:sp>
           <p:nvSpPr>
-            <p:cNvPr id="48" name="TextBox 47"/>
+            <p:cNvPr id="43" name="Rectangle 42"/>
+            <p:cNvSpPr/>
+            <p:nvPr/>
+          </p:nvSpPr>
+          <p:spPr>
+            <a:xfrm>
+              <a:off x="9816272" y="3931340"/>
+              <a:ext cx="1594402" cy="1509367"/>
+            </a:xfrm>
+            <a:prstGeom prst="rect">
+              <a:avLst/>
+            </a:prstGeom>
+            <a:noFill/>
+            <a:ln w="15944">
+              <a:solidFill>
+                <a:srgbClr val="00A4A6"/>
+              </a:solidFill>
+              <a:prstDash val="solid"/>
+              <a:miter lim="800000"/>
+            </a:ln>
+          </p:spPr>
+          <p:txBody>
+            <a:bodyPr rtlCol="0" anchor="ctr"/>
+            <a:lstStyle/>
+            <a:p>
+              <a:pPr algn="ctr"/>
+            </a:p>
+          </p:txBody>
+        </p:sp>
+        <p:pic>
+          <p:nvPicPr>
+            <p:cNvPr id="44" name="Private-subnet_32" descr="Private subnet_32"/>
+            <p:cNvPicPr>
+              <a:picLocks noChangeAspect="1"/>
+            </p:cNvPicPr>
+            <p:nvPr/>
+          </p:nvPicPr>
+          <p:blipFill>
+            <a:blip r:embed="rId20">
+              <a:extLst>
+                <a:ext uri="{96DAC541-7B7A-43D3-8B79-37D633B846F1}">
+                  <asvg:svgBlip xmlns:asvg="http://schemas.microsoft.com/office/drawing/2016/SVG/main" r:embed="rId21"/>
+                </a:ext>
+              </a:extLst>
+            </a:blip>
+            <a:stretch>
+              <a:fillRect/>
+            </a:stretch>
+          </p:blipFill>
+          <p:spPr>
+            <a:xfrm>
+              <a:off x="9816272" y="3931340"/>
+              <a:ext cx="255104" cy="255104"/>
+            </a:xfrm>
+            <a:prstGeom prst="rect">
+              <a:avLst/>
+            </a:prstGeom>
+          </p:spPr>
+        </p:pic>
+        <p:sp>
+          <p:nvSpPr>
+            <p:cNvPr id="45" name="TextBox 44"/>
             <p:cNvSpPr txBox="1"/>
             <p:nvPr/>
           </p:nvSpPr>
           <p:spPr>
             <a:xfrm>
-              <a:off x="7778499" y="3479406"/>
-              <a:ext cx="1188805" cy="136614"/>
+              <a:off x="10156411" y="3981298"/>
+              <a:ext cx="1376501" cy="193454"/>
             </a:xfrm>
             <a:prstGeom prst="rect">
               <a:avLst/>
@@ -8584,69 +7837,28 @@
             </a:bodyPr>
             <a:lstStyle/>
             <a:p>
-              <a:pPr algn="ctr">
+              <a:pPr algn="l">
                 <a:lnSpc>
                   <a:spcPct val="100000"/>
                 </a:lnSpc>
               </a:pPr>
               <a:r>
-                <a:rPr sz="827" b="0" lang="ko-KR">
+                <a:rPr sz="1171" b="1" lang="ko-KR">
                   <a:solidFill>
-                    <a:srgbClr val="232F3E"/>
+                    <a:srgbClr val="00A4A6"/>
                   </a:solidFill>
                   <a:latin typeface="Arial"/>
                   <a:ea typeface="Malgun Gothic"/>
                   <a:cs typeface="Malgun Gothic"/>
                 </a:rPr>
-                <a:t>10.255.255.1/32</a:t>
-              </a:r>
-            </a:p>
-          </p:txBody>
-        </p:sp>
-        <p:sp>
-          <p:nvSpPr>
-            <p:cNvPr id="49" name="TextBox 48"/>
-            <p:cNvSpPr txBox="1"/>
-            <p:nvPr/>
-          </p:nvSpPr>
-          <p:spPr>
-            <a:xfrm>
-              <a:off x="7574891" y="3619523"/>
-              <a:ext cx="1596020" cy="136614"/>
-            </a:xfrm>
-            <a:prstGeom prst="rect">
-              <a:avLst/>
-            </a:prstGeom>
-            <a:noFill/>
-          </p:spPr>
-          <p:txBody>
-            <a:bodyPr wrap="none" lIns="0" rIns="0" tIns="0" bIns="0" anchor="t">
-              <a:noAutofit/>
-            </a:bodyPr>
-            <a:lstStyle/>
-            <a:p>
-              <a:pPr algn="ctr">
-                <a:lnSpc>
-                  <a:spcPct val="100000"/>
-                </a:lnSpc>
-              </a:pPr>
-              <a:r>
-                <a:rPr sz="827" b="0" lang="ko-KR">
-                  <a:solidFill>
-                    <a:srgbClr val="232F3E"/>
-                  </a:solidFill>
-                  <a:latin typeface="Arial"/>
-                  <a:ea typeface="Malgun Gothic"/>
-                  <a:cs typeface="Malgun Gothic"/>
-                </a:rPr>
-                <a:t>→ 활성 C8000V Gi1 ENI</a:t>
+                <a:t>Router · AZ2</a:t>
               </a:r>
             </a:p>
           </p:txBody>
         </p:sp>
         <p:pic>
           <p:nvPicPr>
-            <p:cNvPr id="50" name="Amazon-EC2_Instance" descr="Amazon EC2_Instance"/>
+            <p:cNvPr id="46" name="AWS-Transit-Gateway_Attachment" descr="AWS Transit Gateway_Attachment"/>
             <p:cNvPicPr>
               <a:picLocks noChangeAspect="1"/>
             </p:cNvPicPr>
@@ -8666,8 +7878,8 @@
           </p:blipFill>
           <p:spPr>
             <a:xfrm>
-              <a:off x="10211937" y="2580905"/>
-              <a:ext cx="420351" cy="420351"/>
+              <a:off x="8445086" y="2804629"/>
+              <a:ext cx="510209" cy="510209"/>
             </a:xfrm>
             <a:prstGeom prst="rect">
               <a:avLst/>
@@ -8676,14 +7888,14 @@
         </p:pic>
         <p:sp>
           <p:nvSpPr>
-            <p:cNvPr id="51" name="TextBox 50"/>
+            <p:cNvPr id="47" name="TextBox 46"/>
             <p:cNvSpPr txBox="1"/>
             <p:nvPr/>
           </p:nvSpPr>
           <p:spPr>
             <a:xfrm>
-              <a:off x="9743968" y="3042416"/>
-              <a:ext cx="1356289" cy="159383"/>
+              <a:off x="7705018" y="3364796"/>
+              <a:ext cx="1990345" cy="193454"/>
             </a:xfrm>
             <a:prstGeom prst="rect">
               <a:avLst/>
@@ -8702,7 +7914,7 @@
                 </a:lnSpc>
               </a:pPr>
               <a:r>
-                <a:rPr sz="965" b="0" lang="ko-KR">
+                <a:rPr sz="1171" b="0" lang="ko-KR">
                   <a:solidFill>
                     <a:srgbClr val="232F3E"/>
                   </a:solidFill>
@@ -8710,67 +7922,26 @@
                   <a:ea typeface="Malgun Gothic"/>
                   <a:cs typeface="Malgun Gothic"/>
                 </a:rPr>
-                <a:t>C8000V-1 · 활성</a:t>
-              </a:r>
-            </a:p>
-          </p:txBody>
-        </p:sp>
-        <p:sp>
-          <p:nvSpPr>
-            <p:cNvPr id="52" name="TextBox 51"/>
-            <p:cNvSpPr txBox="1"/>
-            <p:nvPr/>
-          </p:nvSpPr>
-          <p:spPr>
-            <a:xfrm>
-              <a:off x="9926230" y="3199172"/>
-              <a:ext cx="991766" cy="136614"/>
-            </a:xfrm>
-            <a:prstGeom prst="rect">
-              <a:avLst/>
-            </a:prstGeom>
-            <a:noFill/>
-          </p:spPr>
-          <p:txBody>
-            <a:bodyPr wrap="none" lIns="0" rIns="0" tIns="0" bIns="0" anchor="t">
-              <a:noAutofit/>
-            </a:bodyPr>
-            <a:lstStyle/>
-            <a:p>
-              <a:pPr algn="ctr">
-                <a:lnSpc>
-                  <a:spcPct val="100000"/>
-                </a:lnSpc>
-              </a:pPr>
-              <a:r>
-                <a:rPr sz="827" b="0" lang="ko-KR">
-                  <a:solidFill>
-                    <a:srgbClr val="545B64"/>
-                  </a:solidFill>
-                  <a:latin typeface="Arial"/>
-                  <a:ea typeface="Malgun Gothic"/>
-                  <a:cs typeface="Malgun Gothic"/>
-                </a:rPr>
-                <a:t>GRE 캡슐 해제</a:t>
+                <a:t>TGW attachment ENI</a:t>
               </a:r>
             </a:p>
           </p:txBody>
         </p:sp>
         <p:cxnSp>
           <p:nvCxnSpPr>
-            <p:cNvPr id="53" name="Connector 52"/>
+            <p:cNvPr id="48" name="Connector 47"/>
             <p:cNvCxnSpPr/>
             <p:nvPr/>
           </p:nvCxnSpPr>
           <p:spPr>
             <a:xfrm>
-              <a:off x="8618106" y="2791081"/>
-              <a:ext cx="1541287" cy="0"/>
+              <a:off x="5777120" y="3059734"/>
+              <a:ext cx="2604190" cy="0"/>
             </a:xfrm>
             <a:prstGeom prst="line">
               <a:avLst/>
             </a:prstGeom>
-            <a:ln w="13136">
+            <a:ln w="15944">
               <a:solidFill>
                 <a:srgbClr val="232F3E"/>
               </a:solidFill>
@@ -8780,257 +7951,9 @@
             </a:ln>
           </p:spPr>
         </p:cxnSp>
-        <p:sp>
-          <p:nvSpPr>
-            <p:cNvPr id="54" name="TextBox 53"/>
-            <p:cNvSpPr txBox="1"/>
-            <p:nvPr/>
-          </p:nvSpPr>
-          <p:spPr>
-            <a:xfrm>
-              <a:off x="8789969" y="2621189"/>
-              <a:ext cx="321831" cy="136614"/>
-            </a:xfrm>
-            <a:prstGeom prst="rect">
-              <a:avLst/>
-            </a:prstGeom>
-            <a:noFill/>
-          </p:spPr>
-          <p:txBody>
-            <a:bodyPr wrap="none" lIns="0" rIns="0" tIns="0" bIns="0" anchor="t">
-              <a:noAutofit/>
-            </a:bodyPr>
-            <a:lstStyle/>
-            <a:p>
-              <a:pPr algn="ctr">
-                <a:lnSpc>
-                  <a:spcPct val="100000"/>
-                </a:lnSpc>
-              </a:pPr>
-              <a:r>
-                <a:rPr sz="827" b="0" lang="ko-KR">
-                  <a:solidFill>
-                    <a:srgbClr val="232F3E"/>
-                  </a:solidFill>
-                  <a:latin typeface="Arial"/>
-                  <a:ea typeface="Malgun Gothic"/>
-                  <a:cs typeface="Malgun Gothic"/>
-                </a:rPr>
-                <a:t>GRE</a:t>
-              </a:r>
-            </a:p>
-          </p:txBody>
-        </p:sp>
         <p:pic>
           <p:nvPicPr>
-            <p:cNvPr id="55" name="Amazon-EC2_Instance" descr="Amazon EC2_Instance"/>
-            <p:cNvPicPr>
-              <a:picLocks noChangeAspect="1"/>
-            </p:cNvPicPr>
-            <p:nvPr/>
-          </p:nvPicPr>
-          <p:blipFill>
-            <a:blip r:embed="rId22">
-              <a:extLst>
-                <a:ext uri="{96DAC541-7B7A-43D3-8B79-37D633B846F1}">
-                  <asvg:svgBlip xmlns:asvg="http://schemas.microsoft.com/office/drawing/2016/SVG/main" r:embed="rId23"/>
-                </a:ext>
-              </a:extLst>
-            </a:blip>
-            <a:stretch>
-              <a:fillRect/>
-            </a:stretch>
-          </p:blipFill>
-          <p:spPr>
-            <a:xfrm>
-              <a:off x="10211937" y="4630117"/>
-              <a:ext cx="420351" cy="420351"/>
-            </a:xfrm>
-            <a:prstGeom prst="rect">
-              <a:avLst/>
-            </a:prstGeom>
-          </p:spPr>
-        </p:pic>
-        <p:sp>
-          <p:nvSpPr>
-            <p:cNvPr id="56" name="TextBox 55"/>
-            <p:cNvSpPr txBox="1"/>
-            <p:nvPr/>
-          </p:nvSpPr>
-          <p:spPr>
-            <a:xfrm>
-              <a:off x="9743968" y="5091627"/>
-              <a:ext cx="1356289" cy="159383"/>
-            </a:xfrm>
-            <a:prstGeom prst="rect">
-              <a:avLst/>
-            </a:prstGeom>
-            <a:noFill/>
-          </p:spPr>
-          <p:txBody>
-            <a:bodyPr wrap="none" lIns="0" rIns="0" tIns="0" bIns="0" anchor="t">
-              <a:noAutofit/>
-            </a:bodyPr>
-            <a:lstStyle/>
-            <a:p>
-              <a:pPr algn="ctr">
-                <a:lnSpc>
-                  <a:spcPct val="100000"/>
-                </a:lnSpc>
-              </a:pPr>
-              <a:r>
-                <a:rPr sz="965" b="0" lang="ko-KR">
-                  <a:solidFill>
-                    <a:srgbClr val="232F3E"/>
-                  </a:solidFill>
-                  <a:latin typeface="Arial"/>
-                  <a:ea typeface="Malgun Gothic"/>
-                  <a:cs typeface="Malgun Gothic"/>
-                </a:rPr>
-                <a:t>C8000V-2 · 대기</a:t>
-              </a:r>
-            </a:p>
-          </p:txBody>
-        </p:sp>
-        <p:sp>
-          <p:nvSpPr>
-            <p:cNvPr id="57" name="TextBox 56"/>
-            <p:cNvSpPr txBox="1"/>
-            <p:nvPr/>
-          </p:nvSpPr>
-          <p:spPr>
-            <a:xfrm>
-              <a:off x="10008330" y="5248383"/>
-              <a:ext cx="827566" cy="136614"/>
-            </a:xfrm>
-            <a:prstGeom prst="rect">
-              <a:avLst/>
-            </a:prstGeom>
-            <a:noFill/>
-          </p:spPr>
-          <p:txBody>
-            <a:bodyPr wrap="none" lIns="0" rIns="0" tIns="0" bIns="0" anchor="t">
-              <a:noAutofit/>
-            </a:bodyPr>
-            <a:lstStyle/>
-            <a:p>
-              <a:pPr algn="ctr">
-                <a:lnSpc>
-                  <a:spcPct val="100000"/>
-                </a:lnSpc>
-              </a:pPr>
-              <a:r>
-                <a:rPr sz="827" b="0" lang="ko-KR">
-                  <a:solidFill>
-                    <a:srgbClr val="545B64"/>
-                  </a:solidFill>
-                  <a:latin typeface="Arial"/>
-                  <a:ea typeface="Malgun Gothic"/>
-                  <a:cs typeface="Malgun Gothic"/>
-                </a:rPr>
-                <a:t>prepend ×3</a:t>
-              </a:r>
-            </a:p>
-          </p:txBody>
-        </p:sp>
-        <p:sp>
-          <p:nvSpPr>
-            <p:cNvPr id="58" name="Freeform 57"/>
-            <p:cNvSpPr/>
-            <p:nvPr/>
-          </p:nvSpPr>
-          <p:spPr>
-            <a:xfrm>
-              <a:off x="9161060" y="3535453"/>
-              <a:ext cx="998333" cy="1304839"/>
-            </a:xfrm>
-            <a:custGeom>
-              <a:avLst/>
-              <a:gdLst/>
-              <a:ahLst/>
-              <a:cxnLst/>
-              <a:rect l="l" t="t" r="r" b="b"/>
-              <a:pathLst>
-                <a:path w="998333" h="1304839">
-                  <a:moveTo>
-                    <a:pt x="0" y="0"/>
-                  </a:moveTo>
-                  <a:lnTo>
-                    <a:pt x="280234" y="0"/>
-                  </a:lnTo>
-                  <a:lnTo>
-                    <a:pt x="280234" y="1304839"/>
-                  </a:lnTo>
-                  <a:lnTo>
-                    <a:pt x="998333" y="1304839"/>
-                  </a:lnTo>
-                </a:path>
-              </a:pathLst>
-            </a:custGeom>
-            <a:noFill/>
-            <a:ln w="13136">
-              <a:solidFill>
-                <a:srgbClr val="232F3E"/>
-              </a:solidFill>
-              <a:custDash>
-                <a:ds d="400000" sp="266667"/>
-              </a:custDash>
-              <a:miter lim="800000"/>
-              <a:tailEnd type="triangle" w="med" len="med"/>
-            </a:ln>
-          </p:spPr>
-          <p:txBody>
-            <a:bodyPr rtlCol="0" anchor="ctr"/>
-            <a:lstStyle/>
-            <a:p>
-              <a:pPr algn="ctr"/>
-            </a:p>
-          </p:txBody>
-        </p:sp>
-        <p:sp>
-          <p:nvSpPr>
-            <p:cNvPr id="59" name="TextBox 58"/>
-            <p:cNvSpPr txBox="1"/>
-            <p:nvPr/>
-          </p:nvSpPr>
-          <p:spPr>
-            <a:xfrm>
-              <a:off x="8554616" y="4442710"/>
-              <a:ext cx="834134" cy="136614"/>
-            </a:xfrm>
-            <a:prstGeom prst="rect">
-              <a:avLst/>
-            </a:prstGeom>
-            <a:noFill/>
-          </p:spPr>
-          <p:txBody>
-            <a:bodyPr wrap="none" lIns="0" rIns="0" tIns="0" bIns="0" anchor="t">
-              <a:noAutofit/>
-            </a:bodyPr>
-            <a:lstStyle/>
-            <a:p>
-              <a:pPr algn="r">
-                <a:lnSpc>
-                  <a:spcPct val="100000"/>
-                </a:lnSpc>
-              </a:pPr>
-              <a:r>
-                <a:rPr sz="827" b="0" lang="ko-KR">
-                  <a:solidFill>
-                    <a:srgbClr val="232F3E"/>
-                  </a:solidFill>
-                  <a:latin typeface="Arial"/>
-                  <a:ea typeface="Malgun Gothic"/>
-                  <a:cs typeface="Malgun Gothic"/>
-                </a:rPr>
-                <a:t>페일오버 시</a:t>
-              </a:r>
-            </a:p>
-          </p:txBody>
-        </p:sp>
-        <p:pic>
-          <p:nvPicPr>
-            <p:cNvPr id="60" name="Amazon-VPC_Router" descr="Amazon VPC_Router"/>
+            <p:cNvPr id="49" name="Amazon-EC2_Instance" descr="Amazon EC2_Instance"/>
             <p:cNvPicPr>
               <a:picLocks noChangeAspect="1"/>
             </p:cNvPicPr>
@@ -9050,8 +7973,8 @@
           </p:blipFill>
           <p:spPr>
             <a:xfrm>
-              <a:off x="8162726" y="4630117"/>
-              <a:ext cx="420351" cy="420351"/>
+              <a:off x="10358368" y="2804629"/>
+              <a:ext cx="510209" cy="510209"/>
             </a:xfrm>
             <a:prstGeom prst="rect">
               <a:avLst/>
@@ -9060,14 +7983,14 @@
         </p:pic>
         <p:sp>
           <p:nvSpPr>
-            <p:cNvPr id="61" name="TextBox 60"/>
+            <p:cNvPr id="50" name="TextBox 49"/>
             <p:cNvSpPr txBox="1"/>
             <p:nvPr/>
           </p:nvSpPr>
           <p:spPr>
             <a:xfrm>
-              <a:off x="7637287" y="5091627"/>
-              <a:ext cx="1471229" cy="159383"/>
+              <a:off x="9790363" y="3364796"/>
+              <a:ext cx="1646220" cy="193454"/>
             </a:xfrm>
             <a:prstGeom prst="rect">
               <a:avLst/>
@@ -9086,7 +8009,7 @@
                 </a:lnSpc>
               </a:pPr>
               <a:r>
-                <a:rPr sz="965" b="0" lang="ko-KR">
+                <a:rPr sz="1171" b="0" lang="ko-KR">
                   <a:solidFill>
                     <a:srgbClr val="232F3E"/>
                   </a:solidFill>
@@ -9094,21 +8017,21 @@
                   <a:ea typeface="Malgun Gothic"/>
                   <a:cs typeface="Malgun Gothic"/>
                 </a:rPr>
-                <a:t>VPC Route Server</a:t>
+                <a:t>C8000V-1 · 활성</a:t>
               </a:r>
             </a:p>
           </p:txBody>
         </p:sp>
         <p:sp>
           <p:nvSpPr>
-            <p:cNvPr id="62" name="TextBox 61"/>
+            <p:cNvPr id="51" name="TextBox 50"/>
             <p:cNvSpPr txBox="1"/>
             <p:nvPr/>
           </p:nvSpPr>
           <p:spPr>
             <a:xfrm>
-              <a:off x="7479656" y="5248383"/>
-              <a:ext cx="1786492" cy="136614"/>
+              <a:off x="10011586" y="3555061"/>
+              <a:ext cx="1203774" cy="165818"/>
             </a:xfrm>
             <a:prstGeom prst="rect">
               <a:avLst/>
@@ -9127,7 +8050,7 @@
                 </a:lnSpc>
               </a:pPr>
               <a:r>
-                <a:rPr sz="827" b="0" lang="ko-KR">
+                <a:rPr sz="1004" b="0" lang="ko-KR">
                   <a:solidFill>
                     <a:srgbClr val="545B64"/>
                   </a:solidFill>
@@ -9135,26 +8058,244 @@
                   <a:ea typeface="Malgun Gothic"/>
                   <a:cs typeface="Malgun Gothic"/>
                 </a:rPr>
-                <a:t>BGP best-path → 넥스트홉</a:t>
+                <a:t>GRE 캡슐 해제</a:t>
               </a:r>
             </a:p>
           </p:txBody>
         </p:sp>
         <p:cxnSp>
           <p:nvCxnSpPr>
-            <p:cNvPr id="63" name="Connector 62"/>
+            <p:cNvPr id="52" name="Connector 51"/>
             <p:cNvCxnSpPr/>
             <p:nvPr/>
           </p:nvCxnSpPr>
           <p:spPr>
-            <a:xfrm flipV="1">
-              <a:off x="8372901" y="3824444"/>
-              <a:ext cx="0" cy="770643"/>
+            <a:xfrm>
+              <a:off x="8997812" y="3059734"/>
+              <a:ext cx="1296780" cy="0"/>
             </a:xfrm>
             <a:prstGeom prst="line">
               <a:avLst/>
             </a:prstGeom>
-            <a:ln w="13136">
+            <a:ln w="15944">
+              <a:solidFill>
+                <a:srgbClr val="232F3E"/>
+              </a:solidFill>
+              <a:prstDash val="solid"/>
+              <a:miter lim="800000"/>
+              <a:tailEnd type="triangle" w="med" len="med"/>
+            </a:ln>
+          </p:spPr>
+        </p:cxnSp>
+        <p:sp>
+          <p:nvSpPr>
+            <p:cNvPr id="53" name="TextBox 52"/>
+            <p:cNvSpPr txBox="1"/>
+            <p:nvPr/>
+          </p:nvSpPr>
+          <p:spPr>
+            <a:xfrm>
+              <a:off x="9100119" y="2853524"/>
+              <a:ext cx="390629" cy="165818"/>
+            </a:xfrm>
+            <a:prstGeom prst="rect">
+              <a:avLst/>
+            </a:prstGeom>
+            <a:noFill/>
+          </p:spPr>
+          <p:txBody>
+            <a:bodyPr wrap="none" lIns="0" rIns="0" tIns="0" bIns="0" anchor="t">
+              <a:noAutofit/>
+            </a:bodyPr>
+            <a:lstStyle/>
+            <a:p>
+              <a:pPr algn="ctr">
+                <a:lnSpc>
+                  <a:spcPct val="100000"/>
+                </a:lnSpc>
+              </a:pPr>
+              <a:r>
+                <a:rPr sz="1004" b="0" lang="ko-KR">
+                  <a:solidFill>
+                    <a:srgbClr val="232F3E"/>
+                  </a:solidFill>
+                  <a:latin typeface="Arial"/>
+                  <a:ea typeface="Malgun Gothic"/>
+                  <a:cs typeface="Malgun Gothic"/>
+                </a:rPr>
+                <a:t>GRE</a:t>
+              </a:r>
+            </a:p>
+          </p:txBody>
+        </p:sp>
+        <p:pic>
+          <p:nvPicPr>
+            <p:cNvPr id="54" name="Amazon-Route-53_Route-Table" descr="Amazon Route 53_Route Table"/>
+            <p:cNvPicPr>
+              <a:picLocks noChangeAspect="1"/>
+            </p:cNvPicPr>
+            <p:nvPr/>
+          </p:nvPicPr>
+          <p:blipFill>
+            <a:blip r:embed="rId16">
+              <a:extLst>
+                <a:ext uri="{96DAC541-7B7A-43D3-8B79-37D633B846F1}">
+                  <asvg:svgBlip xmlns:asvg="http://schemas.microsoft.com/office/drawing/2016/SVG/main" r:embed="rId17"/>
+                </a:ext>
+              </a:extLst>
+            </a:blip>
+            <a:stretch>
+              <a:fillRect/>
+            </a:stretch>
+          </p:blipFill>
+          <p:spPr>
+            <a:xfrm>
+              <a:off x="8445086" y="4250221"/>
+              <a:ext cx="510209" cy="510209"/>
+            </a:xfrm>
+            <a:prstGeom prst="rect">
+              <a:avLst/>
+            </a:prstGeom>
+          </p:spPr>
+        </p:pic>
+        <p:sp>
+          <p:nvSpPr>
+            <p:cNvPr id="55" name="TextBox 54"/>
+            <p:cNvSpPr txBox="1"/>
+            <p:nvPr/>
+          </p:nvSpPr>
+          <p:spPr>
+            <a:xfrm>
+              <a:off x="8267709" y="4810387"/>
+              <a:ext cx="864963" cy="193454"/>
+            </a:xfrm>
+            <a:prstGeom prst="rect">
+              <a:avLst/>
+            </a:prstGeom>
+            <a:noFill/>
+          </p:spPr>
+          <p:txBody>
+            <a:bodyPr wrap="none" lIns="0" rIns="0" tIns="0" bIns="0" anchor="t">
+              <a:noAutofit/>
+            </a:bodyPr>
+            <a:lstStyle/>
+            <a:p>
+              <a:pPr algn="ctr">
+                <a:lnSpc>
+                  <a:spcPct val="100000"/>
+                </a:lnSpc>
+              </a:pPr>
+              <a:r>
+                <a:rPr sz="1171" b="0" lang="ko-KR">
+                  <a:solidFill>
+                    <a:srgbClr val="232F3E"/>
+                  </a:solidFill>
+                  <a:latin typeface="Arial"/>
+                  <a:ea typeface="Malgun Gothic"/>
+                  <a:cs typeface="Malgun Gothic"/>
+                </a:rPr>
+                <a:t>tgw-rtb</a:t>
+              </a:r>
+            </a:p>
+          </p:txBody>
+        </p:sp>
+        <p:sp>
+          <p:nvSpPr>
+            <p:cNvPr id="56" name="TextBox 55"/>
+            <p:cNvSpPr txBox="1"/>
+            <p:nvPr/>
+          </p:nvSpPr>
+          <p:spPr>
+            <a:xfrm>
+              <a:off x="7978723" y="5000653"/>
+              <a:ext cx="1442934" cy="165818"/>
+            </a:xfrm>
+            <a:prstGeom prst="rect">
+              <a:avLst/>
+            </a:prstGeom>
+            <a:noFill/>
+          </p:spPr>
+          <p:txBody>
+            <a:bodyPr wrap="none" lIns="0" rIns="0" tIns="0" bIns="0" anchor="t">
+              <a:noAutofit/>
+            </a:bodyPr>
+            <a:lstStyle/>
+            <a:p>
+              <a:pPr algn="ctr">
+                <a:lnSpc>
+                  <a:spcPct val="100000"/>
+                </a:lnSpc>
+              </a:pPr>
+              <a:r>
+                <a:rPr sz="1004" b="0" lang="ko-KR">
+                  <a:solidFill>
+                    <a:srgbClr val="545B64"/>
+                  </a:solidFill>
+                  <a:latin typeface="Arial"/>
+                  <a:ea typeface="Malgun Gothic"/>
+                  <a:cs typeface="Malgun Gothic"/>
+                </a:rPr>
+                <a:t>10.255.255.1/32</a:t>
+              </a:r>
+            </a:p>
+          </p:txBody>
+        </p:sp>
+        <p:sp>
+          <p:nvSpPr>
+            <p:cNvPr id="57" name="TextBox 56"/>
+            <p:cNvSpPr txBox="1"/>
+            <p:nvPr/>
+          </p:nvSpPr>
+          <p:spPr>
+            <a:xfrm>
+              <a:off x="7906975" y="5170722"/>
+              <a:ext cx="1586430" cy="165818"/>
+            </a:xfrm>
+            <a:prstGeom prst="rect">
+              <a:avLst/>
+            </a:prstGeom>
+            <a:noFill/>
+          </p:spPr>
+          <p:txBody>
+            <a:bodyPr wrap="none" lIns="0" rIns="0" tIns="0" bIns="0" anchor="t">
+              <a:noAutofit/>
+            </a:bodyPr>
+            <a:lstStyle/>
+            <a:p>
+              <a:pPr algn="ctr">
+                <a:lnSpc>
+                  <a:spcPct val="100000"/>
+                </a:lnSpc>
+              </a:pPr>
+              <a:r>
+                <a:rPr sz="1004" b="0" lang="ko-KR">
+                  <a:solidFill>
+                    <a:srgbClr val="545B64"/>
+                  </a:solidFill>
+                  <a:latin typeface="Arial"/>
+                  <a:ea typeface="Malgun Gothic"/>
+                  <a:cs typeface="Malgun Gothic"/>
+                </a:rPr>
+                <a:t>→ 활성 C8000V Gi1</a:t>
+              </a:r>
+            </a:p>
+          </p:txBody>
+        </p:sp>
+        <p:cxnSp>
+          <p:nvCxnSpPr>
+            <p:cNvPr id="58" name="Connector 57"/>
+            <p:cNvCxnSpPr/>
+            <p:nvPr/>
+          </p:nvCxnSpPr>
+          <p:spPr>
+            <a:xfrm>
+              <a:off x="8700190" y="3569942"/>
+              <a:ext cx="0" cy="637761"/>
+            </a:xfrm>
+            <a:prstGeom prst="line">
+              <a:avLst/>
+            </a:prstGeom>
+            <a:ln w="15944">
               <a:solidFill>
                 <a:srgbClr val="232F3E"/>
               </a:solidFill>
@@ -9168,14 +8309,14 @@
         </p:cxnSp>
         <p:sp>
           <p:nvSpPr>
-            <p:cNvPr id="64" name="TextBox 63"/>
+            <p:cNvPr id="59" name="TextBox 58"/>
             <p:cNvSpPr txBox="1"/>
             <p:nvPr/>
           </p:nvSpPr>
           <p:spPr>
             <a:xfrm>
-              <a:off x="8442960" y="4215020"/>
-              <a:ext cx="1037742" cy="136614"/>
+              <a:off x="8785225" y="3810166"/>
+              <a:ext cx="446433" cy="165818"/>
             </a:xfrm>
             <a:prstGeom prst="rect">
               <a:avLst/>
@@ -9194,7 +8335,7 @@
                 </a:lnSpc>
               </a:pPr>
               <a:r>
-                <a:rPr sz="827" b="0" lang="ko-KR">
+                <a:rPr sz="1004" b="0" lang="ko-KR">
                   <a:solidFill>
                     <a:srgbClr val="232F3E"/>
                   </a:solidFill>
@@ -9202,21 +8343,51 @@
                   <a:ea typeface="Malgun Gothic"/>
                   <a:cs typeface="Malgun Gothic"/>
                 </a:rPr>
-                <a:t>경로 주입·전환</a:t>
+                <a:t>조회</a:t>
               </a:r>
             </a:p>
           </p:txBody>
         </p:sp>
-        <p:sp>
-          <p:nvSpPr>
-            <p:cNvPr id="65" name="TextBox 64"/>
+        <p:pic>
+          <p:nvPicPr>
+            <p:cNvPr id="60" name="Amazon-VPC_Router" descr="Amazon VPC_Router"/>
+            <p:cNvPicPr>
+              <a:picLocks noChangeAspect="1"/>
+            </p:cNvPicPr>
+            <p:nvPr/>
+          </p:nvPicPr>
+          <p:blipFill>
+            <a:blip r:embed="rId26">
+              <a:extLst>
+                <a:ext uri="{96DAC541-7B7A-43D3-8B79-37D633B846F1}">
+                  <asvg:svgBlip xmlns:asvg="http://schemas.microsoft.com/office/drawing/2016/SVG/main" r:embed="rId27"/>
+                </a:ext>
+              </a:extLst>
+            </a:blip>
+            <a:stretch>
+              <a:fillRect/>
+            </a:stretch>
+          </p:blipFill>
+          <p:spPr>
+            <a:xfrm>
+              <a:off x="6755020" y="4250221"/>
+              <a:ext cx="510209" cy="510209"/>
+            </a:xfrm>
+            <a:prstGeom prst="rect">
+              <a:avLst/>
+            </a:prstGeom>
+          </p:spPr>
+        </p:pic>
+        <p:sp>
+          <p:nvSpPr>
+            <p:cNvPr id="61" name="TextBox 60"/>
             <p:cNvSpPr txBox="1"/>
             <p:nvPr/>
           </p:nvSpPr>
           <p:spPr>
             <a:xfrm>
-              <a:off x="4694830" y="5861395"/>
-              <a:ext cx="6778161" cy="136614"/>
+              <a:off x="6321874" y="4810387"/>
+              <a:ext cx="1376501" cy="193454"/>
             </a:xfrm>
             <a:prstGeom prst="rect">
               <a:avLst/>
@@ -9229,13 +8400,54 @@
             </a:bodyPr>
             <a:lstStyle/>
             <a:p>
-              <a:pPr algn="r">
+              <a:pPr algn="ctr">
                 <a:lnSpc>
                   <a:spcPct val="100000"/>
                 </a:lnSpc>
               </a:pPr>
               <a:r>
-                <a:rPr sz="827" b="0" lang="ko-KR">
+                <a:rPr sz="1171" b="0" lang="ko-KR">
+                  <a:solidFill>
+                    <a:srgbClr val="232F3E"/>
+                  </a:solidFill>
+                  <a:latin typeface="Arial"/>
+                  <a:ea typeface="Malgun Gothic"/>
+                  <a:cs typeface="Malgun Gothic"/>
+                </a:rPr>
+                <a:t>Route Server</a:t>
+              </a:r>
+            </a:p>
+          </p:txBody>
+        </p:sp>
+        <p:sp>
+          <p:nvSpPr>
+            <p:cNvPr id="62" name="TextBox 61"/>
+            <p:cNvSpPr txBox="1"/>
+            <p:nvPr/>
+          </p:nvSpPr>
+          <p:spPr>
+            <a:xfrm>
+              <a:off x="6376349" y="5000653"/>
+              <a:ext cx="1267550" cy="165818"/>
+            </a:xfrm>
+            <a:prstGeom prst="rect">
+              <a:avLst/>
+            </a:prstGeom>
+            <a:noFill/>
+          </p:spPr>
+          <p:txBody>
+            <a:bodyPr wrap="none" lIns="0" rIns="0" tIns="0" bIns="0" anchor="t">
+              <a:noAutofit/>
+            </a:bodyPr>
+            <a:lstStyle/>
+            <a:p>
+              <a:pPr algn="ctr">
+                <a:lnSpc>
+                  <a:spcPct val="100000"/>
+                </a:lnSpc>
+              </a:pPr>
+              <a:r>
+                <a:rPr sz="1004" b="0" lang="ko-KR">
                   <a:solidFill>
                     <a:srgbClr val="545B64"/>
                   </a:solidFill>
@@ -9243,7 +8455,294 @@
                   <a:ea typeface="Malgun Gothic"/>
                   <a:cs typeface="Malgun Gothic"/>
                 </a:rPr>
-                <a:t>온프렘 → AWS 방향 GRE 캡슐 패킷 경로 — 마지막 홉(tgw-rtb의 /32)이 어느 라우터가 터널을 받을지 결정</a:t>
+                <a:t>BGP best-path</a:t>
+              </a:r>
+            </a:p>
+          </p:txBody>
+        </p:sp>
+        <p:cxnSp>
+          <p:nvCxnSpPr>
+            <p:cNvPr id="63" name="Connector 62"/>
+            <p:cNvCxnSpPr/>
+            <p:nvPr/>
+          </p:nvCxnSpPr>
+          <p:spPr>
+            <a:xfrm>
+              <a:off x="7307746" y="4505325"/>
+              <a:ext cx="1073564" cy="0"/>
+            </a:xfrm>
+            <a:prstGeom prst="line">
+              <a:avLst/>
+            </a:prstGeom>
+            <a:ln w="15944">
+              <a:solidFill>
+                <a:srgbClr val="232F3E"/>
+              </a:solidFill>
+              <a:custDash>
+                <a:ds d="400000" sp="266667"/>
+              </a:custDash>
+              <a:miter lim="800000"/>
+              <a:tailEnd type="triangle" w="med" len="med"/>
+            </a:ln>
+          </p:spPr>
+        </p:cxnSp>
+        <p:sp>
+          <p:nvSpPr>
+            <p:cNvPr id="64" name="TextBox 63"/>
+            <p:cNvSpPr txBox="1"/>
+            <p:nvPr/>
+          </p:nvSpPr>
+          <p:spPr>
+            <a:xfrm>
+              <a:off x="7329004" y="4299116"/>
+              <a:ext cx="446433" cy="165818"/>
+            </a:xfrm>
+            <a:prstGeom prst="rect">
+              <a:avLst/>
+            </a:prstGeom>
+            <a:noFill/>
+          </p:spPr>
+          <p:txBody>
+            <a:bodyPr wrap="none" lIns="0" rIns="0" tIns="0" bIns="0" anchor="t">
+              <a:noAutofit/>
+            </a:bodyPr>
+            <a:lstStyle/>
+            <a:p>
+              <a:pPr algn="ctr">
+                <a:lnSpc>
+                  <a:spcPct val="100000"/>
+                </a:lnSpc>
+              </a:pPr>
+              <a:r>
+                <a:rPr sz="1004" b="0" lang="ko-KR">
+                  <a:solidFill>
+                    <a:srgbClr val="232F3E"/>
+                  </a:solidFill>
+                  <a:latin typeface="Arial"/>
+                  <a:ea typeface="Malgun Gothic"/>
+                  <a:cs typeface="Malgun Gothic"/>
+                </a:rPr>
+                <a:t>주입</a:t>
+              </a:r>
+            </a:p>
+          </p:txBody>
+        </p:sp>
+        <p:pic>
+          <p:nvPicPr>
+            <p:cNvPr id="65" name="Amazon-EC2_Instance" descr="Amazon EC2_Instance"/>
+            <p:cNvPicPr>
+              <a:picLocks noChangeAspect="1"/>
+            </p:cNvPicPr>
+            <p:nvPr/>
+          </p:nvPicPr>
+          <p:blipFill>
+            <a:blip r:embed="rId24">
+              <a:extLst>
+                <a:ext uri="{96DAC541-7B7A-43D3-8B79-37D633B846F1}">
+                  <asvg:svgBlip xmlns:asvg="http://schemas.microsoft.com/office/drawing/2016/SVG/main" r:embed="rId25"/>
+                </a:ext>
+              </a:extLst>
+            </a:blip>
+            <a:stretch>
+              <a:fillRect/>
+            </a:stretch>
+          </p:blipFill>
+          <p:spPr>
+            <a:xfrm>
+              <a:off x="10358368" y="4250221"/>
+              <a:ext cx="510209" cy="510209"/>
+            </a:xfrm>
+            <a:prstGeom prst="rect">
+              <a:avLst/>
+            </a:prstGeom>
+          </p:spPr>
+        </p:pic>
+        <p:sp>
+          <p:nvSpPr>
+            <p:cNvPr id="66" name="TextBox 65"/>
+            <p:cNvSpPr txBox="1"/>
+            <p:nvPr/>
+          </p:nvSpPr>
+          <p:spPr>
+            <a:xfrm>
+              <a:off x="9790363" y="4810387"/>
+              <a:ext cx="1646220" cy="193454"/>
+            </a:xfrm>
+            <a:prstGeom prst="rect">
+              <a:avLst/>
+            </a:prstGeom>
+            <a:noFill/>
+          </p:spPr>
+          <p:txBody>
+            <a:bodyPr wrap="none" lIns="0" rIns="0" tIns="0" bIns="0" anchor="t">
+              <a:noAutofit/>
+            </a:bodyPr>
+            <a:lstStyle/>
+            <a:p>
+              <a:pPr algn="ctr">
+                <a:lnSpc>
+                  <a:spcPct val="100000"/>
+                </a:lnSpc>
+              </a:pPr>
+              <a:r>
+                <a:rPr sz="1171" b="0" lang="ko-KR">
+                  <a:solidFill>
+                    <a:srgbClr val="232F3E"/>
+                  </a:solidFill>
+                  <a:latin typeface="Arial"/>
+                  <a:ea typeface="Malgun Gothic"/>
+                  <a:cs typeface="Malgun Gothic"/>
+                </a:rPr>
+                <a:t>C8000V-2 · 대기</a:t>
+              </a:r>
+            </a:p>
+          </p:txBody>
+        </p:sp>
+        <p:sp>
+          <p:nvSpPr>
+            <p:cNvPr id="67" name="TextBox 66"/>
+            <p:cNvSpPr txBox="1"/>
+            <p:nvPr/>
+          </p:nvSpPr>
+          <p:spPr>
+            <a:xfrm>
+              <a:off x="10111236" y="5000653"/>
+              <a:ext cx="1004473" cy="165818"/>
+            </a:xfrm>
+            <a:prstGeom prst="rect">
+              <a:avLst/>
+            </a:prstGeom>
+            <a:noFill/>
+          </p:spPr>
+          <p:txBody>
+            <a:bodyPr wrap="none" lIns="0" rIns="0" tIns="0" bIns="0" anchor="t">
+              <a:noAutofit/>
+            </a:bodyPr>
+            <a:lstStyle/>
+            <a:p>
+              <a:pPr algn="ctr">
+                <a:lnSpc>
+                  <a:spcPct val="100000"/>
+                </a:lnSpc>
+              </a:pPr>
+              <a:r>
+                <a:rPr sz="1004" b="0" lang="ko-KR">
+                  <a:solidFill>
+                    <a:srgbClr val="545B64"/>
+                  </a:solidFill>
+                  <a:latin typeface="Arial"/>
+                  <a:ea typeface="Malgun Gothic"/>
+                  <a:cs typeface="Malgun Gothic"/>
+                </a:rPr>
+                <a:t>prepend ×3</a:t>
+              </a:r>
+            </a:p>
+          </p:txBody>
+        </p:sp>
+        <p:cxnSp>
+          <p:nvCxnSpPr>
+            <p:cNvPr id="68" name="Connector 67"/>
+            <p:cNvCxnSpPr/>
+            <p:nvPr/>
+          </p:nvCxnSpPr>
+          <p:spPr>
+            <a:xfrm>
+              <a:off x="8997812" y="4505325"/>
+              <a:ext cx="1296780" cy="0"/>
+            </a:xfrm>
+            <a:prstGeom prst="line">
+              <a:avLst/>
+            </a:prstGeom>
+            <a:ln w="15944">
+              <a:solidFill>
+                <a:srgbClr val="232F3E"/>
+              </a:solidFill>
+              <a:custDash>
+                <a:ds d="400000" sp="266667"/>
+              </a:custDash>
+              <a:miter lim="800000"/>
+              <a:tailEnd type="triangle" w="med" len="med"/>
+            </a:ln>
+          </p:spPr>
+        </p:cxnSp>
+        <p:sp>
+          <p:nvSpPr>
+            <p:cNvPr id="69" name="TextBox 68"/>
+            <p:cNvSpPr txBox="1"/>
+            <p:nvPr/>
+          </p:nvSpPr>
+          <p:spPr>
+            <a:xfrm>
+              <a:off x="8912777" y="4299116"/>
+              <a:ext cx="765313" cy="165818"/>
+            </a:xfrm>
+            <a:prstGeom prst="rect">
+              <a:avLst/>
+            </a:prstGeom>
+            <a:noFill/>
+          </p:spPr>
+          <p:txBody>
+            <a:bodyPr wrap="none" lIns="0" rIns="0" tIns="0" bIns="0" anchor="t">
+              <a:noAutofit/>
+            </a:bodyPr>
+            <a:lstStyle/>
+            <a:p>
+              <a:pPr algn="ctr">
+                <a:lnSpc>
+                  <a:spcPct val="100000"/>
+                </a:lnSpc>
+              </a:pPr>
+              <a:r>
+                <a:rPr sz="1004" b="0" lang="ko-KR">
+                  <a:solidFill>
+                    <a:srgbClr val="232F3E"/>
+                  </a:solidFill>
+                  <a:latin typeface="Arial"/>
+                  <a:ea typeface="Malgun Gothic"/>
+                  <a:cs typeface="Malgun Gothic"/>
+                </a:rPr>
+                <a:t>페일오버</a:t>
+              </a:r>
+            </a:p>
+          </p:txBody>
+        </p:sp>
+        <p:sp>
+          <p:nvSpPr>
+            <p:cNvPr id="70" name="TextBox 69"/>
+            <p:cNvSpPr txBox="1"/>
+            <p:nvPr/>
+          </p:nvSpPr>
+          <p:spPr>
+            <a:xfrm>
+              <a:off x="5612365" y="5765966"/>
+              <a:ext cx="5947120" cy="165818"/>
+            </a:xfrm>
+            <a:prstGeom prst="rect">
+              <a:avLst/>
+            </a:prstGeom>
+            <a:noFill/>
+          </p:spPr>
+          <p:txBody>
+            <a:bodyPr wrap="none" lIns="0" rIns="0" tIns="0" bIns="0" anchor="t">
+              <a:noAutofit/>
+            </a:bodyPr>
+            <a:lstStyle/>
+            <a:p>
+              <a:pPr algn="r">
+                <a:lnSpc>
+                  <a:spcPct val="100000"/>
+                </a:lnSpc>
+              </a:pPr>
+              <a:r>
+                <a:rPr sz="1004" b="0" lang="ko-KR">
+                  <a:solidFill>
+                    <a:srgbClr val="545B64"/>
+                  </a:solidFill>
+                  <a:latin typeface="Arial"/>
+                  <a:ea typeface="Malgun Gothic"/>
+                  <a:cs typeface="Malgun Gothic"/>
+                </a:rPr>
+                <a:t>온프렘 → AWS GRE 패킷 경로 — tgw-rtb의 /32가 터널을 받을 라우터를 결정</a:t>
               </a:r>
             </a:p>
           </p:txBody>
